--- a/docs/presentations/executive/pixi-sbom-executive.pptx
+++ b/docs/presentations/executive/pixi-sbom-executive.pptx
@@ -14,9 +14,10 @@
     <p:sldId id="262" r:id="rId8"/>
     <p:sldId id="263" r:id="rId9"/>
     <p:sldId id="264" r:id="rId10"/>
+    <p:sldId id="265" r:id="rId11"/>
   </p:sldIdLst>
   <p:notesMasterIdLst>
-    <p:notesMasterId r:id="rId11"/>
+    <p:notesMasterId r:id="rId12"/>
   </p:notesMasterIdLst>
   <p:sldSz cx="12192000" cy="6858000"/>
   <p:notesSz cx="6858000" cy="12192000"/>
@@ -552,6 +553,94 @@
 </p:notes>
 </file>
 
+<file path=ppt/notesSlides/notesSlide10.xml><?xml version="1.0" encoding="utf-8"?>
+<p:notes xmlns:a="http://schemas.openxmlformats.org/drawingml/2006/main" xmlns:r="http://schemas.openxmlformats.org/officeDocument/2006/relationships" xmlns:p="http://schemas.openxmlformats.org/presentationml/2006/main">
+  <p:cSld>
+    <p:spTree>
+      <p:nvGrpSpPr>
+        <p:cNvPr id="1" name=""/>
+        <p:cNvGrpSpPr/>
+        <p:nvPr/>
+      </p:nvGrpSpPr>
+      <p:grpSpPr>
+        <a:xfrm>
+          <a:off x="0" y="0"/>
+          <a:ext cx="0" cy="0"/>
+          <a:chOff x="0" y="0"/>
+          <a:chExt cx="0" cy="0"/>
+        </a:xfrm>
+      </p:grpSpPr>
+      <p:sp>
+        <p:nvSpPr>
+          <p:cNvPr id="2" name="Slide Image Placeholder 1"/>
+          <p:cNvSpPr>
+            <a:spLocks noGrp="1" noRot="1" noChangeAspect="1"/>
+          </p:cNvSpPr>
+          <p:nvPr>
+            <p:ph type="sldImg"/>
+          </p:nvPr>
+        </p:nvSpPr>
+        <p:spPr/>
+      </p:sp>
+      <p:sp>
+        <p:nvSpPr>
+          <p:cNvPr id="3" name="Notes Placeholder 2"/>
+          <p:cNvSpPr>
+            <a:spLocks noGrp="1"/>
+          </p:cNvSpPr>
+          <p:nvPr>
+            <p:ph type="body" idx="1"/>
+          </p:nvPr>
+        </p:nvSpPr>
+        <p:spPr/>
+        <p:txBody>
+          <a:bodyPr/>
+          <a:lstStyle/>
+          <a:p>
+            <a:r>
+              <a:rPr lang="en-US" dirty="0"/>
+              <a:t>Ask for the decision in the room and then stop. Do not reopen the detail. The phrase that earns trust is the last one: you are willing to come back and recommend dropping it, which tells them the results will be real. Have the date and the product team picked before you walk in, so the yes has nowhere to slip to.</a:t>
+            </a:r>
+            <a:endParaRPr lang="en-US" dirty="0"/>
+          </a:p>
+        </p:txBody>
+      </p:sp>
+      <p:sp>
+        <p:nvSpPr>
+          <p:cNvPr id="4" name="Slide Number Placeholder 3"/>
+          <p:cNvSpPr>
+            <a:spLocks noGrp="1"/>
+          </p:cNvSpPr>
+          <p:nvPr>
+            <p:ph type="sldNum" sz="quarter" idx="10"/>
+          </p:nvPr>
+        </p:nvSpPr>
+        <p:spPr/>
+        <p:txBody>
+          <a:bodyPr/>
+          <a:lstStyle/>
+          <a:p>
+            <a:fld id="{F7021451-1387-4CA6-816F-3879F97B5CBC}" type="slidenum">
+              <a:rPr lang="en-US"/>
+              <a:t>10</a:t>
+            </a:fld>
+            <a:endParaRPr lang="en-US"/>
+          </a:p>
+        </p:txBody>
+      </p:sp>
+    </p:spTree>
+    <p:extLst>
+      <p:ext uri="{BB962C8B-B14F-4D97-AF65-F5344CB8AC3E}">
+        <p14:creationId xmlns:p14="http://schemas.microsoft.com/office/powerpoint/2010/main" val="1024086991"/>
+      </p:ext>
+    </p:extLst>
+  </p:cSld>
+  <p:clrMapOvr>
+    <a:masterClrMapping/>
+  </p:clrMapOvr>
+</p:notes>
+</file>
+
 <file path=ppt/notesSlides/notesSlide2.xml><?xml version="1.0" encoding="utf-8"?>
 <p:notes xmlns:a="http://schemas.openxmlformats.org/drawingml/2006/main" xmlns:r="http://schemas.openxmlformats.org/officeDocument/2006/relationships" xmlns:p="http://schemas.openxmlformats.org/presentationml/2006/main">
   <p:cSld>
@@ -774,7 +863,7 @@
           <a:p>
             <a:r>
               <a:rPr lang="en-US" dirty="0"/>
-              <a:t>Fill these in before the meeting. Sales or the deal desk can give you the questionnaire and deal numbers; whoever ran the last incident can give you the hours. Do not present this slide with brackets still on it — an executive audience will read placeholders as a case you have not built. If a number turns out to be small, use it anyway and say so; being straight about a modest cost buys you the benefit of the doubt on the risk slide.</a:t>
+              <a:t>One point to land: for a financial institution this is not a future requirement. Do not read the table; say which rows apply to us. PCI DSS 4.0, Requirement 6.3.2: keep an inventory of our own software and the third-party components built into it, for vulnerability and patch management. Assessed since 31 March 2025, for anyone who stores, processes or transmits card data. EU DORA, Commission Delegated Regulation 2024/1774, Article 10(2)(d): track the third-party libraries, open source included, in the services behind critical or important functions. Applies since 17 January 2025. Cyber Resilience Act: a machine-readable SBOM for products sold in the EU from 11 December 2027; reporting of exploited vulnerabilities from 11 September 2026. If asked: neither financial rule uses the word "SBOM". An SBOM is how we show an auditor the inventory they require, produced the same way at every build. Have compliance confirm which rows apply to us before the meeting.</a:t>
             </a:r>
             <a:endParaRPr lang="en-US" dirty="0"/>
           </a:p>
@@ -862,7 +951,7 @@
           <a:p>
             <a:r>
               <a:rPr lang="en-US" dirty="0"/>
-              <a:t>This is the build-versus-buy slide and it is where a CFO or CTO will push. Two points to hold. First, the gap is silent: a tool that does not understand conda packages reports success, not failure, so we would not discover the hole until someone checked our answer. Second, we are not proposing to build anything — the thing exists and runs today. If they ask whether a vendor will close the gap eventually, say probably, and that we can switch when they do; the output is a standard format, so nothing here locks us in.</a:t>
+              <a:t>Fill these in before the meeting. Sales or the deal desk can give you the questionnaire and deal numbers; whoever ran the last incident can give you the hours. Do not present this slide with brackets still on it — an executive audience will read placeholders as a case you have not built. If a number turns out to be small, use it anyway and say so; being straight about a modest cost buys you the benefit of the doubt on the risk slide.</a:t>
             </a:r>
             <a:endParaRPr lang="en-US" dirty="0"/>
           </a:p>
@@ -950,7 +1039,7 @@
           <a:p>
             <a:r>
               <a:rPr lang="en-US" dirty="0"/>
-              <a:t>Walk the rows, do not read them. The fourth is the one that tends to wake people up, because it is the only row where the answer today is that nobody is looking — a restricted license in a dependency is a legal exposure we are currently carrying without knowing. If someone asks whether stopping builds will slow delivery, the answer is that every check is off by default and we turn them on one at a time once we have seen what they would have caught.</a:t>
+              <a:t>This is the build-versus-buy slide and it is where a CFO or CTO will push. Two points to hold. First, the gap is silent: a tool that does not understand conda packages reports success, not failure, so we would not discover the hole until someone checked our answer. Second, we are not proposing to build anything — the thing exists and runs today. If they ask whether a vendor will close the gap eventually, say probably, and that we can switch when they do; the output is a standard format, so nothing here locks us in.</a:t>
             </a:r>
             <a:endParaRPr lang="en-US" dirty="0"/>
           </a:p>
@@ -1038,7 +1127,7 @@
           <a:p>
             <a:r>
               <a:rPr lang="en-US" dirty="0"/>
-              <a:t>Put this in front of the objection rather than waiting for it. Executives have been sold too much and they discount anyone who won't name a limit. The third bullet is doing quiet work: it flags that adopting this raises a governance question we have not answered, which is better coming from you now than from an auditor later. If someone asks who should own it, say you have a view and will bring it with the results rather than deciding it here.</a:t>
+              <a:t>Walk the rows, do not read them. The fourth is the one that tends to wake people up, because it is the only row where the answer today is that nobody is looking — a restricted license in a dependency is a legal exposure we are currently carrying without knowing. The fifth matters as soon as we buy software: suppliers now send their own bills of materials, and today we have no way to tell a thorough one from a hollow one. The tool grades a supplier's document and checks it before we rely on it. If someone asks whether stopping builds will slow delivery, the answer is that every check is off by default and we turn them on one at a time once we have seen what they would have caught.</a:t>
             </a:r>
             <a:endParaRPr lang="en-US" dirty="0"/>
           </a:p>
@@ -1126,7 +1215,7 @@
           <a:p>
             <a:r>
               <a:rPr lang="en-US" dirty="0"/>
-              <a:t>The last line is the one to land on. The downside of this decision is genuinely one deleted CI step, and saying so plainly is more persuasive than any benefit on the earlier slides. Be honest about the bus factor if we are the maintainer — name who it is and say the codebase is small and documented. If the room would rather depend on a vendor, that is a reasonable instinct and worth hearing; the answer is that the output format is standard, so moving later costs us nothing we would not pay anyway.</a:t>
+              <a:t>Put this in front of the objection rather than waiting for it. Executives have been sold too much and they discount anyone who won't name a limit. The third bullet is doing quiet work: it flags that adopting this raises a governance question we have not answered, which is better coming from you now than from an auditor later. If someone asks who should own it, say you have a view and will bring it with the results rather than deciding it here.</a:t>
             </a:r>
             <a:endParaRPr lang="en-US" dirty="0"/>
           </a:p>
@@ -1214,7 +1303,7 @@
           <a:p>
             <a:r>
               <a:rPr lang="en-US" dirty="0"/>
-              <a:t>Ask for the decision in the room and then stop. Do not reopen the detail. The phrase that earns trust is the last one: you are willing to come back and recommend dropping it, which tells them the results will be real. Have the date and the product team picked before you walk in, so the yes has nowhere to slip to.</a:t>
+              <a:t>The last line is the one to land on. The downside of this decision is genuinely one deleted CI step, and saying so plainly is more persuasive than any benefit on the earlier slides. Be honest about the bus factor if we are the maintainer — name who it is and say the codebase is small and documented. If the room would rather depend on a vendor, that is a reasonable instinct and worth hearing; the answer is that the output format is standard, so moving later costs us nothing we would not pay anyway.</a:t>
             </a:r>
             <a:endParaRPr lang="en-US" dirty="0"/>
           </a:p>
@@ -1286,9 +1375,16 @@
 </p:sldLayout>
 </file>
 
-<file path=ppt/slideMasters/slideMaster1.xml><?xml version="1.0" encoding="utf-8"?>
-<p:sldMaster xmlns:a="http://schemas.openxmlformats.org/drawingml/2006/main" xmlns:r="http://schemas.openxmlformats.org/officeDocument/2006/relationships" xmlns:p="http://schemas.openxmlformats.org/presentationml/2006/main">
-  <p:cSld>
+<file path=ppt/slideLayouts/slideLayout2.xml><?xml version="1.0" encoding="utf-8"?>
+<p:sldLayout xmlns:a="http://schemas.openxmlformats.org/drawingml/2006/main" xmlns:r="http://schemas.openxmlformats.org/officeDocument/2006/relationships" xmlns:p="http://schemas.openxmlformats.org/presentationml/2006/main" preserve="1">
+  <p:cSld name="Title and body">
+    <p:bg>
+      <p:bgPr>
+        <a:solidFill>
+          <a:srgbClr val="F7F8F6"/>
+        </a:solidFill>
+      </p:bgPr>
+    </p:bg>
     <p:spTree>
       <p:nvGrpSpPr>
         <p:cNvPr id="1" name=""/>
@@ -1303,11 +1399,236 @@
           <a:chExt cx="0" cy="0"/>
         </a:xfrm>
       </p:grpSpPr>
+      <p:sp>
+        <p:nvSpPr>
+          <p:cNvPr id="2" name="Title Placeholder 1"/>
+          <p:cNvSpPr/>
+          <p:nvPr>
+            <p:ph type="title"/>
+          </p:nvPr>
+        </p:nvSpPr>
+        <p:spPr>
+          <a:xfrm>
+            <a:off x="812800" y="812800"/>
+            <a:ext cx="10566400" cy="502890"/>
+          </a:xfrm>
+          <a:prstGeom prst="rect">
+            <a:avLst/>
+          </a:prstGeom>
+          <a:noFill/>
+          <a:ln/>
+        </p:spPr>
+        <p:txBody>
+          <a:bodyPr wrap="square" lIns="0" tIns="0" rIns="0" bIns="0" rtlCol="0" anchor="t"/>
+          <a:lstStyle>
+            <a:lvl1pPr algn="l" indent="0" marL="0">
+              <a:lnSpc>
+                <a:spcPct val="115000"/>
+              </a:lnSpc>
+              <a:buNone/>
+              <a:defRPr lang="en-US" sz="3600" dirty="0">
+                <a:solidFill>
+                  <a:srgbClr val="10212B"/>
+                </a:solidFill>
+                <a:latin typeface="Verdana" pitchFamily="34" charset="0"/>
+                <a:ea typeface="Verdana" pitchFamily="34" charset="-122"/>
+                <a:cs typeface="Verdana" pitchFamily="34" charset="-120"/>
+              </a:defRPr>
+            </a:lvl1pPr>
+          </a:lstStyle>
+          <a:p>
+            <a:pPr algn="l" indent="0" marL="0">
+              <a:lnSpc>
+                <a:spcPct val="115000"/>
+              </a:lnSpc>
+              <a:buNone/>
+            </a:pPr>
+            <a:endParaRPr lang="en-US" sz="3600" dirty="0"/>
+          </a:p>
+        </p:txBody>
+      </p:sp>
+      <p:sp>
+        <p:nvSpPr>
+          <p:cNvPr id="3" name="Text Placeholder 2"/>
+          <p:cNvSpPr/>
+          <p:nvPr>
+            <p:ph idx="101" type="body"/>
+          </p:nvPr>
+        </p:nvSpPr>
+        <p:spPr>
+          <a:xfrm>
+            <a:off x="812800" y="1620490"/>
+            <a:ext cx="10566400" cy="4424710"/>
+          </a:xfrm>
+          <a:prstGeom prst="rect">
+            <a:avLst/>
+          </a:prstGeom>
+          <a:noFill/>
+          <a:ln/>
+        </p:spPr>
+        <p:txBody>
+          <a:bodyPr wrap="square" lIns="0" tIns="0" rIns="0" bIns="0" rtlCol="0" anchor="t"/>
+          <a:lstStyle>
+            <a:lvl1pPr algn="l" indent="0" marL="0">
+              <a:lnSpc>
+                <a:spcPct val="140000"/>
+              </a:lnSpc>
+              <a:buNone/>
+              <a:defRPr lang="en-US" sz="1600" dirty="0">
+                <a:solidFill>
+                  <a:srgbClr val="10212B"/>
+                </a:solidFill>
+                <a:latin typeface="Verdana" pitchFamily="34" charset="0"/>
+                <a:ea typeface="Verdana" pitchFamily="34" charset="-122"/>
+                <a:cs typeface="Verdana" pitchFamily="34" charset="-120"/>
+              </a:defRPr>
+            </a:lvl1pPr>
+          </a:lstStyle>
+          <a:p>
+            <a:pPr algn="l" indent="0" marL="0">
+              <a:lnSpc>
+                <a:spcPct val="140000"/>
+              </a:lnSpc>
+              <a:buNone/>
+            </a:pPr>
+            <a:endParaRPr lang="en-US" sz="1600" dirty="0"/>
+          </a:p>
+        </p:txBody>
+      </p:sp>
+    </p:spTree>
+  </p:cSld>
+  <p:clrMapOvr>
+    <a:masterClrMapping/>
+  </p:clrMapOvr>
+</p:sldLayout>
+</file>
+
+<file path=ppt/slideMasters/slideMaster1.xml><?xml version="1.0" encoding="utf-8"?>
+<p:sldMaster xmlns:a="http://schemas.openxmlformats.org/drawingml/2006/main" xmlns:r="http://schemas.openxmlformats.org/officeDocument/2006/relationships" xmlns:p="http://schemas.openxmlformats.org/presentationml/2006/main">
+  <p:cSld>
+    <p:bg>
+      <p:bgPr>
+        <a:solidFill>
+          <a:srgbClr val="F7F8F6"/>
+        </a:solidFill>
+      </p:bgPr>
+    </p:bg>
+    <p:spTree>
+      <p:nvGrpSpPr>
+        <p:cNvPr id="1" name=""/>
+        <p:cNvGrpSpPr/>
+        <p:nvPr/>
+      </p:nvGrpSpPr>
+      <p:grpSpPr>
+        <a:xfrm>
+          <a:off x="0" y="0"/>
+          <a:ext cx="0" cy="0"/>
+          <a:chOff x="0" y="0"/>
+          <a:chExt cx="0" cy="0"/>
+        </a:xfrm>
+      </p:grpSpPr>
+      <p:sp>
+        <p:nvSpPr>
+          <p:cNvPr id="2" name="Title Placeholder 1"/>
+          <p:cNvSpPr/>
+          <p:nvPr>
+            <p:ph type="title"/>
+          </p:nvPr>
+        </p:nvSpPr>
+        <p:spPr>
+          <a:xfrm>
+            <a:off x="812800" y="812800"/>
+            <a:ext cx="10566400" cy="502890"/>
+          </a:xfrm>
+          <a:prstGeom prst="rect">
+            <a:avLst/>
+          </a:prstGeom>
+          <a:noFill/>
+          <a:ln/>
+        </p:spPr>
+        <p:txBody>
+          <a:bodyPr wrap="square" lIns="0" tIns="0" rIns="0" bIns="0" rtlCol="0" anchor="t"/>
+          <a:lstStyle>
+            <a:lvl1pPr algn="l" indent="0" marL="0">
+              <a:lnSpc>
+                <a:spcPct val="115000"/>
+              </a:lnSpc>
+              <a:buNone/>
+              <a:defRPr lang="en-US" sz="3600" dirty="0">
+                <a:solidFill>
+                  <a:srgbClr val="10212B"/>
+                </a:solidFill>
+                <a:latin typeface="Verdana" pitchFamily="34" charset="0"/>
+                <a:ea typeface="Verdana" pitchFamily="34" charset="-122"/>
+                <a:cs typeface="Verdana" pitchFamily="34" charset="-120"/>
+              </a:defRPr>
+            </a:lvl1pPr>
+          </a:lstStyle>
+          <a:p>
+            <a:pPr algn="l" indent="0" marL="0">
+              <a:lnSpc>
+                <a:spcPct val="115000"/>
+              </a:lnSpc>
+              <a:buNone/>
+            </a:pPr>
+            <a:endParaRPr lang="en-US" sz="3600" dirty="0"/>
+          </a:p>
+        </p:txBody>
+      </p:sp>
+      <p:sp>
+        <p:nvSpPr>
+          <p:cNvPr id="3" name="Text Placeholder 2"/>
+          <p:cNvSpPr/>
+          <p:nvPr>
+            <p:ph idx="101" type="body"/>
+          </p:nvPr>
+        </p:nvSpPr>
+        <p:spPr>
+          <a:xfrm>
+            <a:off x="812800" y="1620490"/>
+            <a:ext cx="10566400" cy="4424710"/>
+          </a:xfrm>
+          <a:prstGeom prst="rect">
+            <a:avLst/>
+          </a:prstGeom>
+          <a:noFill/>
+          <a:ln/>
+        </p:spPr>
+        <p:txBody>
+          <a:bodyPr wrap="square" lIns="0" tIns="0" rIns="0" bIns="0" rtlCol="0" anchor="t"/>
+          <a:lstStyle>
+            <a:lvl1pPr algn="l" indent="0" marL="0">
+              <a:lnSpc>
+                <a:spcPct val="140000"/>
+              </a:lnSpc>
+              <a:buNone/>
+              <a:defRPr lang="en-US" sz="1600" dirty="0">
+                <a:solidFill>
+                  <a:srgbClr val="10212B"/>
+                </a:solidFill>
+                <a:latin typeface="Verdana" pitchFamily="34" charset="0"/>
+                <a:ea typeface="Verdana" pitchFamily="34" charset="-122"/>
+                <a:cs typeface="Verdana" pitchFamily="34" charset="-120"/>
+              </a:defRPr>
+            </a:lvl1pPr>
+          </a:lstStyle>
+          <a:p>
+            <a:pPr algn="l" indent="0" marL="0">
+              <a:lnSpc>
+                <a:spcPct val="140000"/>
+              </a:lnSpc>
+              <a:buNone/>
+            </a:pPr>
+            <a:endParaRPr lang="en-US" sz="1600" dirty="0"/>
+          </a:p>
+        </p:txBody>
+      </p:sp>
     </p:spTree>
   </p:cSld>
   <p:clrMap bg1="lt1" tx1="dk1" bg2="lt2" tx2="dk2" accent1="accent1" accent2="accent2" accent3="accent3" accent4="accent4" accent5="accent5" accent6="accent6" hlink="hlink" folHlink="folHlink"/>
   <p:sldLayoutIdLst>
     <p:sldLayoutId id="2147483649" r:id="rId1"/>
+    <p:sldLayoutId id="2147483650" r:id="rId2"/>
   </p:sldLayoutIdLst>
   <p:hf sldNum="0" hdr="0" ftr="0" dt="0"/>
   <p:txStyles>
@@ -1621,9 +1942,9 @@
                 <a:solidFill>
                   <a:srgbClr val="6FBFAE"/>
                 </a:solidFill>
-                <a:latin typeface="JetBrains Mono" pitchFamily="34" charset="0"/>
-                <a:ea typeface="JetBrains Mono" pitchFamily="34" charset="-122"/>
-                <a:cs typeface="JetBrains Mono" pitchFamily="34" charset="-120"/>
+                <a:latin typeface="Courier New" pitchFamily="49" charset="0"/>
+                <a:ea typeface="Courier New" pitchFamily="49" charset="-122"/>
+                <a:cs typeface="Courier New" pitchFamily="49" charset="-120"/>
               </a:rPr>
               <a:t>DECISION REQUESTED</a:t>
             </a:r>
@@ -1635,7 +1956,9 @@
         <p:nvSpPr>
           <p:cNvPr id="3" name="Text 1"/>
           <p:cNvSpPr/>
-          <p:nvPr/>
+          <p:nvPr>
+            <p:ph type="title"/>
+          </p:nvPr>
         </p:nvSpPr>
         <p:spPr>
           <a:xfrm>
@@ -1661,13 +1984,13 @@
               <a:buNone/>
             </a:pPr>
             <a:r>
-              <a:rPr lang="en-US" sz="5800" b="1" dirty="0">
+              <a:rPr lang="en-US" sz="5800" b="1" i="0" dirty="0">
                 <a:solidFill>
                   <a:srgbClr val="F7F8F6"/>
                 </a:solidFill>
-                <a:latin typeface="IBM Plex Sans" pitchFamily="34" charset="0"/>
-                <a:ea typeface="IBM Plex Sans" pitchFamily="34" charset="-122"/>
-                <a:cs typeface="IBM Plex Sans" pitchFamily="34" charset="-120"/>
+                <a:latin typeface="Verdana" pitchFamily="34" charset="0"/>
+                <a:ea typeface="Verdana" pitchFamily="34" charset="-122"/>
+                <a:cs typeface="Verdana" pitchFamily="34" charset="-120"/>
               </a:rPr>
               <a:t>We can't prove what's in our software</a:t>
             </a:r>
@@ -1709,9 +2032,9 @@
                 <a:solidFill>
                   <a:srgbClr val="B5C4CA"/>
                 </a:solidFill>
-                <a:latin typeface="IBM Plex Sans" pitchFamily="34" charset="0"/>
-                <a:ea typeface="IBM Plex Sans" pitchFamily="34" charset="-122"/>
-                <a:cs typeface="IBM Plex Sans" pitchFamily="34" charset="-120"/>
+                <a:latin typeface="Verdana" pitchFamily="34" charset="0"/>
+                <a:ea typeface="Verdana" pitchFamily="34" charset="-122"/>
+                <a:cs typeface="Verdana" pitchFamily="34" charset="-120"/>
               </a:rPr>
               <a:t>Customers ask. Regulators are starting to. So does our own incident response. Today we answer by hand, slowly, and never quite the same way twice.</a:t>
             </a:r>
@@ -1728,7 +2051,7 @@
         <p:spPr>
           <a:xfrm>
             <a:off x="812800" y="6238280"/>
-            <a:ext cx="1352451" cy="238720"/>
+            <a:ext cx="1835348" cy="238720"/>
           </a:xfrm>
           <a:prstGeom prst="rect">
             <a:avLst/>
@@ -1753,11 +2076,221 @@
                 <a:solidFill>
                   <a:srgbClr val="7A8C93"/>
                 </a:solidFill>
-                <a:latin typeface="IBM Plex Sans" pitchFamily="34" charset="0"/>
-                <a:ea typeface="IBM Plex Sans" pitchFamily="34" charset="-122"/>
-                <a:cs typeface="IBM Plex Sans" pitchFamily="34" charset="-120"/>
+                <a:latin typeface="Verdana" pitchFamily="34" charset="0"/>
+                <a:ea typeface="Verdana" pitchFamily="34" charset="-122"/>
+                <a:cs typeface="Verdana" pitchFamily="34" charset="-120"/>
               </a:rPr>
               <a:t>[Presenter] · [Date]</a:t>
+            </a:r>
+            <a:endParaRPr lang="en-US" sz="1200" dirty="0"/>
+          </a:p>
+        </p:txBody>
+      </p:sp>
+    </p:spTree>
+  </p:cSld>
+  <p:clrMapOvr>
+    <a:masterClrMapping/>
+  </p:clrMapOvr>
+</p:sld>
+</file>
+
+<file path=ppt/slides/slide10.xml><?xml version="1.0" encoding="utf-8"?>
+<p:sld xmlns:a="http://schemas.openxmlformats.org/drawingml/2006/main" xmlns:r="http://schemas.openxmlformats.org/officeDocument/2006/relationships" xmlns:p="http://schemas.openxmlformats.org/presentationml/2006/main">
+  <p:cSld name="Slide 10">
+    <p:bg>
+      <p:bgPr>
+        <a:solidFill>
+          <a:srgbClr val="1F7A6C"/>
+        </a:solidFill>
+      </p:bgPr>
+    </p:bg>
+    <p:spTree>
+      <p:nvGrpSpPr>
+        <p:cNvPr id="1" name=""/>
+        <p:cNvGrpSpPr/>
+        <p:nvPr/>
+      </p:nvGrpSpPr>
+      <p:grpSpPr>
+        <a:xfrm>
+          <a:off x="0" y="0"/>
+          <a:ext cx="0" cy="0"/>
+          <a:chOff x="0" y="0"/>
+          <a:chExt cx="0" cy="0"/>
+        </a:xfrm>
+      </p:grpSpPr>
+      <p:sp>
+        <p:nvSpPr>
+          <p:cNvPr id="2" name="Text 0"/>
+          <p:cNvSpPr/>
+          <p:nvPr/>
+        </p:nvSpPr>
+        <p:spPr>
+          <a:xfrm>
+            <a:off x="812800" y="1790750"/>
+            <a:ext cx="10883392" cy="238720"/>
+          </a:xfrm>
+          <a:prstGeom prst="rect">
+            <a:avLst/>
+          </a:prstGeom>
+          <a:noFill/>
+          <a:ln/>
+        </p:spPr>
+        <p:txBody>
+          <a:bodyPr wrap="square" lIns="0" tIns="0" rIns="0" bIns="0" rtlCol="0" anchor="t">
+            <a:normAutofit/>
+          </a:bodyPr>
+          <a:lstStyle/>
+          <a:p>
+            <a:pPr algn="l" indent="0" marL="0">
+              <a:lnSpc>
+                <a:spcPts val="1680"/>
+              </a:lnSpc>
+              <a:buNone/>
+            </a:pPr>
+            <a:r>
+              <a:rPr lang="en-US" sz="1200" b="1" spc="150" kern="0" dirty="0">
+                <a:solidFill>
+                  <a:srgbClr val="CDEDE5"/>
+                </a:solidFill>
+                <a:latin typeface="Courier New" pitchFamily="49" charset="0"/>
+                <a:ea typeface="Courier New" pitchFamily="49" charset="-122"/>
+                <a:cs typeface="Courier New" pitchFamily="49" charset="-120"/>
+              </a:rPr>
+              <a:t>WHAT I NEED FROM YOU</a:t>
+            </a:r>
+            <a:endParaRPr lang="en-US" sz="1200" dirty="0"/>
+          </a:p>
+        </p:txBody>
+      </p:sp>
+      <p:sp>
+        <p:nvSpPr>
+          <p:cNvPr id="3" name="Text 1"/>
+          <p:cNvSpPr/>
+          <p:nvPr>
+            <p:ph type="title"/>
+          </p:nvPr>
+        </p:nvSpPr>
+        <p:spPr>
+          <a:xfrm>
+            <a:off x="812800" y="2258070"/>
+            <a:ext cx="10203180" cy="1310580"/>
+          </a:xfrm>
+          <a:prstGeom prst="rect">
+            <a:avLst/>
+          </a:prstGeom>
+          <a:noFill/>
+          <a:ln/>
+        </p:spPr>
+        <p:txBody>
+          <a:bodyPr wrap="square" lIns="0" tIns="0" rIns="0" bIns="0" rtlCol="0" anchor="t">
+            <a:normAutofit/>
+          </a:bodyPr>
+          <a:lstStyle/>
+          <a:p>
+            <a:pPr algn="l" indent="0" marL="0">
+              <a:lnSpc>
+                <a:spcPts val="5060"/>
+              </a:lnSpc>
+              <a:buNone/>
+            </a:pPr>
+            <a:r>
+              <a:rPr lang="en-US" sz="4600" b="1" i="0" dirty="0">
+                <a:solidFill>
+                  <a:srgbClr val="F7F8F6"/>
+                </a:solidFill>
+                <a:latin typeface="Verdana" pitchFamily="34" charset="0"/>
+                <a:ea typeface="Verdana" pitchFamily="34" charset="-122"/>
+                <a:cs typeface="Verdana" pitchFamily="34" charset="-120"/>
+              </a:rPr>
+              <a:t>Say yes to two weeks on one product.</a:t>
+            </a:r>
+            <a:endParaRPr lang="en-US" sz="4600" dirty="0"/>
+          </a:p>
+        </p:txBody>
+      </p:sp>
+      <p:sp>
+        <p:nvSpPr>
+          <p:cNvPr id="4" name="Text 2"/>
+          <p:cNvSpPr/>
+          <p:nvPr/>
+        </p:nvSpPr>
+        <p:spPr>
+          <a:xfrm>
+            <a:off x="812800" y="3797250"/>
+            <a:ext cx="10072370" cy="1092200"/>
+          </a:xfrm>
+          <a:prstGeom prst="rect">
+            <a:avLst/>
+          </a:prstGeom>
+          <a:noFill/>
+          <a:ln/>
+        </p:spPr>
+        <p:txBody>
+          <a:bodyPr wrap="square" lIns="0" tIns="0" rIns="0" bIns="0" rtlCol="0" anchor="t">
+            <a:normAutofit/>
+          </a:bodyPr>
+          <a:lstStyle/>
+          <a:p>
+            <a:pPr algn="l" indent="0" marL="0">
+              <a:lnSpc>
+                <a:spcPts val="2800"/>
+              </a:lnSpc>
+              <a:buNone/>
+            </a:pPr>
+            <a:r>
+              <a:rPr lang="en-US" sz="2000" dirty="0">
+                <a:solidFill>
+                  <a:srgbClr val="E4F4F0"/>
+                </a:solidFill>
+                <a:latin typeface="Verdana" pitchFamily="34" charset="0"/>
+                <a:ea typeface="Verdana" pitchFamily="34" charset="-122"/>
+                <a:cs typeface="Verdana" pitchFamily="34" charset="-120"/>
+              </a:rPr>
+              <a:t>I'll come back with the bill of materials from a real release, what it found that we didn't know, and a plan to make it standard — or a recommendation to drop it.</a:t>
+            </a:r>
+            <a:endParaRPr lang="en-US" sz="2000" dirty="0"/>
+          </a:p>
+        </p:txBody>
+      </p:sp>
+      <p:sp>
+        <p:nvSpPr>
+          <p:cNvPr id="5" name="Text 3"/>
+          <p:cNvSpPr/>
+          <p:nvPr/>
+        </p:nvSpPr>
+        <p:spPr>
+          <a:xfrm>
+            <a:off x="812800" y="6238280"/>
+            <a:ext cx="3879354" cy="238720"/>
+          </a:xfrm>
+          <a:prstGeom prst="rect">
+            <a:avLst/>
+          </a:prstGeom>
+          <a:noFill/>
+          <a:ln/>
+        </p:spPr>
+        <p:txBody>
+          <a:bodyPr wrap="square" lIns="0" tIns="0" rIns="0" bIns="0" rtlCol="0" anchor="t">
+            <a:normAutofit/>
+          </a:bodyPr>
+          <a:lstStyle/>
+          <a:p>
+            <a:pPr algn="l" indent="0" marL="0">
+              <a:lnSpc>
+                <a:spcPts val="1680"/>
+              </a:lnSpc>
+              <a:buNone/>
+            </a:pPr>
+            <a:r>
+              <a:rPr lang="en-US" sz="1200" dirty="0">
+                <a:solidFill>
+                  <a:srgbClr val="CDEDE5"/>
+                </a:solidFill>
+                <a:latin typeface="Verdana" pitchFamily="34" charset="0"/>
+                <a:ea typeface="Verdana" pitchFamily="34" charset="-122"/>
+                <a:cs typeface="Verdana" pitchFamily="34" charset="-120"/>
+              </a:rPr>
+              <a:t>[Presenter] · decision requested by [date]</a:t>
             </a:r>
             <a:endParaRPr lang="en-US" sz="1200" dirty="0"/>
           </a:p>
@@ -1799,7 +2332,9 @@
         <p:nvSpPr>
           <p:cNvPr id="2" name="Text 0"/>
           <p:cNvSpPr/>
-          <p:nvPr/>
+          <p:nvPr>
+            <p:ph type="title"/>
+          </p:nvPr>
         </p:nvSpPr>
         <p:spPr>
           <a:xfrm>
@@ -1825,13 +2360,13 @@
               <a:buNone/>
             </a:pPr>
             <a:r>
-              <a:rPr lang="en-US" sz="3600" b="1" dirty="0">
+              <a:rPr lang="en-US" sz="3600" b="1" i="0" dirty="0">
                 <a:solidFill>
                   <a:srgbClr val="10212B"/>
                 </a:solidFill>
-                <a:latin typeface="IBM Plex Sans" pitchFamily="34" charset="0"/>
-                <a:ea typeface="IBM Plex Sans" pitchFamily="34" charset="-122"/>
-                <a:cs typeface="IBM Plex Sans" pitchFamily="34" charset="-120"/>
+                <a:latin typeface="Verdana" pitchFamily="34" charset="0"/>
+                <a:ea typeface="Verdana" pitchFamily="34" charset="-122"/>
+                <a:cs typeface="Verdana" pitchFamily="34" charset="-120"/>
               </a:rPr>
               <a:t>What I'm asking you to approve</a:t>
             </a:r>
@@ -1873,9 +2408,9 @@
                 <a:solidFill>
                   <a:srgbClr val="10212B"/>
                 </a:solidFill>
-                <a:latin typeface="IBM Plex Sans" pitchFamily="34" charset="0"/>
-                <a:ea typeface="IBM Plex Sans" pitchFamily="34" charset="-122"/>
-                <a:cs typeface="IBM Plex Sans" pitchFamily="34" charset="-120"/>
+                <a:latin typeface="Verdana" pitchFamily="34" charset="0"/>
+                <a:ea typeface="Verdana" pitchFamily="34" charset="-122"/>
+                <a:cs typeface="Verdana" pitchFamily="34" charset="-120"/>
               </a:rPr>
               <a:t>Make a bill of materials a standard output of every release, starting with one product team.</a:t>
             </a:r>
@@ -1944,9 +2479,9 @@
                 <a:solidFill>
                   <a:srgbClr val="1F7A6C"/>
                 </a:solidFill>
-                <a:latin typeface="IBM Plex Sans" pitchFamily="34" charset="0"/>
-                <a:ea typeface="IBM Plex Sans" pitchFamily="34" charset="-122"/>
-                <a:cs typeface="IBM Plex Sans" pitchFamily="34" charset="-120"/>
+                <a:latin typeface="Verdana" pitchFamily="34" charset="0"/>
+                <a:ea typeface="Verdana" pitchFamily="34" charset="-122"/>
+                <a:cs typeface="Verdana" pitchFamily="34" charset="-120"/>
               </a:rPr>
               <a:t>What it needs</a:t>
             </a:r>
@@ -1963,7 +2498,7 @@
         <p:spPr>
           <a:xfrm>
             <a:off x="1073150" y="3345061"/>
-            <a:ext cx="2951912" cy="848271"/>
+            <a:ext cx="2951912" cy="1122561"/>
           </a:xfrm>
           <a:prstGeom prst="rect">
             <a:avLst/>
@@ -1988,9 +2523,9 @@
                 <a:solidFill>
                   <a:srgbClr val="4A5568"/>
                 </a:solidFill>
-                <a:latin typeface="IBM Plex Sans" pitchFamily="34" charset="0"/>
-                <a:ea typeface="IBM Plex Sans" pitchFamily="34" charset="-122"/>
-                <a:cs typeface="IBM Plex Sans" pitchFamily="34" charset="-120"/>
+                <a:latin typeface="Verdana" pitchFamily="34" charset="0"/>
+                <a:ea typeface="Verdana" pitchFamily="34" charset="-122"/>
+                <a:cs typeface="Verdana" pitchFamily="34" charset="-120"/>
               </a:rPr>
               <a:t>One engineer, part time, for two weeks. No purchase, no new vendor, no headcount.</a:t>
             </a:r>
@@ -2059,9 +2594,9 @@
                 <a:solidFill>
                   <a:srgbClr val="1F7A6C"/>
                 </a:solidFill>
-                <a:latin typeface="IBM Plex Sans" pitchFamily="34" charset="0"/>
-                <a:ea typeface="IBM Plex Sans" pitchFamily="34" charset="-122"/>
-                <a:cs typeface="IBM Plex Sans" pitchFamily="34" charset="-120"/>
+                <a:latin typeface="Verdana" pitchFamily="34" charset="0"/>
+                <a:ea typeface="Verdana" pitchFamily="34" charset="-122"/>
+                <a:cs typeface="Verdana" pitchFamily="34" charset="-120"/>
               </a:rPr>
               <a:t>What it costs</a:t>
             </a:r>
@@ -2103,9 +2638,9 @@
                 <a:solidFill>
                   <a:srgbClr val="4A5568"/>
                 </a:solidFill>
-                <a:latin typeface="IBM Plex Sans" pitchFamily="34" charset="0"/>
-                <a:ea typeface="IBM Plex Sans" pitchFamily="34" charset="-122"/>
-                <a:cs typeface="IBM Plex Sans" pitchFamily="34" charset="-120"/>
+                <a:latin typeface="Verdana" pitchFamily="34" charset="0"/>
+                <a:ea typeface="Verdana" pitchFamily="34" charset="-122"/>
+                <a:cs typeface="Verdana" pitchFamily="34" charset="-120"/>
               </a:rPr>
               <a:t>Roughly [$___] of engineering time to prove it. The software itself is free and already written.</a:t>
             </a:r>
@@ -2174,9 +2709,9 @@
                 <a:solidFill>
                   <a:srgbClr val="1F7A6C"/>
                 </a:solidFill>
-                <a:latin typeface="IBM Plex Sans" pitchFamily="34" charset="0"/>
-                <a:ea typeface="IBM Plex Sans" pitchFamily="34" charset="-122"/>
-                <a:cs typeface="IBM Plex Sans" pitchFamily="34" charset="-120"/>
+                <a:latin typeface="Verdana" pitchFamily="34" charset="0"/>
+                <a:ea typeface="Verdana" pitchFamily="34" charset="-122"/>
+                <a:cs typeface="Verdana" pitchFamily="34" charset="-120"/>
               </a:rPr>
               <a:t>What you get back</a:t>
             </a:r>
@@ -2193,7 +2728,7 @@
         <p:spPr>
           <a:xfrm>
             <a:off x="8252867" y="3345061"/>
-            <a:ext cx="2951963" cy="848271"/>
+            <a:ext cx="2951963" cy="1122561"/>
           </a:xfrm>
           <a:prstGeom prst="rect">
             <a:avLst/>
@@ -2218,9 +2753,9 @@
                 <a:solidFill>
                   <a:srgbClr val="4A5568"/>
                 </a:solidFill>
-                <a:latin typeface="IBM Plex Sans" pitchFamily="34" charset="0"/>
-                <a:ea typeface="IBM Plex Sans" pitchFamily="34" charset="-122"/>
-                <a:cs typeface="IBM Plex Sans" pitchFamily="34" charset="-120"/>
+                <a:latin typeface="Verdana" pitchFamily="34" charset="0"/>
+                <a:ea typeface="Verdana" pitchFamily="34" charset="-122"/>
+                <a:cs typeface="Verdana" pitchFamily="34" charset="-120"/>
               </a:rPr>
               <a:t>Evidence from our own code by [date], and a recommendation either way.</a:t>
             </a:r>
@@ -2264,7 +2799,9 @@
         <p:nvSpPr>
           <p:cNvPr id="2" name="Text 0"/>
           <p:cNvSpPr/>
-          <p:nvPr/>
+          <p:nvPr>
+            <p:ph type="title"/>
+          </p:nvPr>
         </p:nvSpPr>
         <p:spPr>
           <a:xfrm>
@@ -2290,13 +2827,13 @@
               <a:buNone/>
             </a:pPr>
             <a:r>
-              <a:rPr lang="en-US" sz="3600" b="1" dirty="0">
+              <a:rPr lang="en-US" sz="3600" b="1" i="0" dirty="0">
                 <a:solidFill>
                   <a:srgbClr val="10212B"/>
                 </a:solidFill>
-                <a:latin typeface="IBM Plex Sans" pitchFamily="34" charset="0"/>
-                <a:ea typeface="IBM Plex Sans" pitchFamily="34" charset="-122"/>
-                <a:cs typeface="IBM Plex Sans" pitchFamily="34" charset="-120"/>
+                <a:latin typeface="Verdana" pitchFamily="34" charset="0"/>
+                <a:ea typeface="Verdana" pitchFamily="34" charset="-122"/>
+                <a:cs typeface="Verdana" pitchFamily="34" charset="-120"/>
               </a:rPr>
               <a:t>Three things that are true today</a:t>
             </a:r>
@@ -2388,9 +2925,9 @@
                 <a:solidFill>
                   <a:srgbClr val="10212B"/>
                 </a:solidFill>
-                <a:latin typeface="IBM Plex Sans" pitchFamily="34" charset="0"/>
-                <a:ea typeface="IBM Plex Sans" pitchFamily="34" charset="-122"/>
-                <a:cs typeface="IBM Plex Sans" pitchFamily="34" charset="-120"/>
+                <a:latin typeface="Verdana" pitchFamily="34" charset="0"/>
+                <a:ea typeface="Verdana" pitchFamily="34" charset="-122"/>
+                <a:cs typeface="Verdana" pitchFamily="34" charset="-120"/>
               </a:rPr>
               <a:t>A customer asks what's inside the product. We assemble the answer by hand, and the deal waits while we do.</a:t>
             </a:r>
@@ -2407,11 +2944,11 @@
         <p:spPr>
           <a:xfrm>
             <a:off x="815975" y="2854275"/>
-            <a:ext cx="10560050" cy="793750"/>
+            <a:ext cx="10560050" cy="1046460"/>
           </a:xfrm>
           <a:prstGeom prst="roundRect">
             <a:avLst>
-              <a:gd name="adj" fmla="val 12400"/>
+              <a:gd name="adj" fmla="val 9406"/>
             </a:avLst>
           </a:prstGeom>
           <a:solidFill>
@@ -2440,7 +2977,7 @@
         </p:blipFill>
         <p:spPr>
           <a:xfrm>
-            <a:off x="1073150" y="3086050"/>
+            <a:off x="1073150" y="3212405"/>
             <a:ext cx="330200" cy="330200"/>
           </a:xfrm>
           <a:prstGeom prst="rect">
@@ -2456,8 +2993,8 @@
         </p:nvSpPr>
         <p:spPr>
           <a:xfrm>
-            <a:off x="1581150" y="3105398"/>
-            <a:ext cx="9823831" cy="316855"/>
+            <a:off x="1581150" y="3086050"/>
+            <a:ext cx="9823831" cy="608310"/>
           </a:xfrm>
           <a:prstGeom prst="rect">
             <a:avLst/>
@@ -2482,9 +3019,9 @@
                 <a:solidFill>
                   <a:srgbClr val="10212B"/>
                 </a:solidFill>
-                <a:latin typeface="IBM Plex Sans" pitchFamily="34" charset="0"/>
-                <a:ea typeface="IBM Plex Sans" pitchFamily="34" charset="-122"/>
-                <a:cs typeface="IBM Plex Sans" pitchFamily="34" charset="-120"/>
+                <a:latin typeface="Verdana" pitchFamily="34" charset="0"/>
+                <a:ea typeface="Verdana" pitchFamily="34" charset="-122"/>
+                <a:cs typeface="Verdana" pitchFamily="34" charset="-120"/>
               </a:rPr>
               <a:t>A serious vulnerability hits the news. We can't say that morning whether it's in anything we ship.</a:t>
             </a:r>
@@ -2500,7 +3037,7 @@
         </p:nvSpPr>
         <p:spPr>
           <a:xfrm>
-            <a:off x="815975" y="3832175"/>
+            <a:off x="815975" y="4084886"/>
             <a:ext cx="10560050" cy="1046460"/>
           </a:xfrm>
           <a:prstGeom prst="roundRect">
@@ -2534,7 +3071,7 @@
         </p:blipFill>
         <p:spPr>
           <a:xfrm>
-            <a:off x="1073150" y="4190305"/>
+            <a:off x="1073150" y="4443016"/>
             <a:ext cx="330200" cy="330200"/>
           </a:xfrm>
           <a:prstGeom prst="rect">
@@ -2550,7 +3087,7 @@
         </p:nvSpPr>
         <p:spPr>
           <a:xfrm>
-            <a:off x="1581150" y="4063950"/>
+            <a:off x="1581150" y="4316661"/>
             <a:ext cx="9823831" cy="608310"/>
           </a:xfrm>
           <a:prstGeom prst="rect">
@@ -2576,9 +3113,9 @@
                 <a:solidFill>
                   <a:srgbClr val="10212B"/>
                 </a:solidFill>
-                <a:latin typeface="IBM Plex Sans" pitchFamily="34" charset="0"/>
-                <a:ea typeface="IBM Plex Sans" pitchFamily="34" charset="-122"/>
-                <a:cs typeface="IBM Plex Sans" pitchFamily="34" charset="-120"/>
+                <a:latin typeface="Verdana" pitchFamily="34" charset="0"/>
+                <a:ea typeface="Verdana" pitchFamily="34" charset="-122"/>
+                <a:cs typeface="Verdana" pitchFamily="34" charset="-120"/>
               </a:rPr>
               <a:t>US federal purchasing already requires this list. The EU Cyber Resilience Act phases in through 2027.</a:t>
             </a:r>
@@ -2595,7 +3132,7 @@
         <p:spPr>
           <a:xfrm>
             <a:off x="812800" y="6238280"/>
-            <a:ext cx="4151327" cy="238720"/>
+            <a:ext cx="5471041" cy="238720"/>
           </a:xfrm>
           <a:prstGeom prst="rect">
             <a:avLst/>
@@ -2620,9 +3157,9 @@
                 <a:solidFill>
                   <a:srgbClr val="6A7179"/>
                 </a:solidFill>
-                <a:latin typeface="IBM Plex Sans" pitchFamily="34" charset="0"/>
-                <a:ea typeface="IBM Plex Sans" pitchFamily="34" charset="-122"/>
-                <a:cs typeface="IBM Plex Sans" pitchFamily="34" charset="-120"/>
+                <a:latin typeface="Verdana" pitchFamily="34" charset="0"/>
+                <a:ea typeface="Verdana" pitchFamily="34" charset="-122"/>
+                <a:cs typeface="Verdana" pitchFamily="34" charset="-120"/>
               </a:rPr>
               <a:t>Confirm the current regulatory timelines before presenting.</a:t>
             </a:r>
@@ -2641,6 +3178,1262 @@
 <file path=ppt/slides/slide4.xml><?xml version="1.0" encoding="utf-8"?>
 <p:sld xmlns:a="http://schemas.openxmlformats.org/drawingml/2006/main" xmlns:r="http://schemas.openxmlformats.org/officeDocument/2006/relationships" xmlns:p="http://schemas.openxmlformats.org/presentationml/2006/main">
   <p:cSld name="Slide 4">
+    <p:bg>
+      <p:bgPr>
+        <a:solidFill>
+          <a:srgbClr val="F7F8F6"/>
+        </a:solidFill>
+      </p:bgPr>
+    </p:bg>
+    <p:spTree>
+      <p:nvGrpSpPr>
+        <p:cNvPr id="1" name=""/>
+        <p:cNvGrpSpPr/>
+        <p:nvPr/>
+      </p:nvGrpSpPr>
+      <p:grpSpPr>
+        <a:xfrm>
+          <a:off x="0" y="0"/>
+          <a:ext cx="0" cy="0"/>
+          <a:chOff x="0" y="0"/>
+          <a:chExt cx="0" cy="0"/>
+        </a:xfrm>
+      </p:grpSpPr>
+      <p:sp>
+        <p:nvSpPr>
+          <p:cNvPr id="2" name="Text 0"/>
+          <p:cNvSpPr/>
+          <p:nvPr>
+            <p:ph type="title"/>
+          </p:nvPr>
+        </p:nvSpPr>
+        <p:spPr>
+          <a:xfrm>
+            <a:off x="812800" y="812800"/>
+            <a:ext cx="10883392" cy="528290"/>
+          </a:xfrm>
+          <a:prstGeom prst="rect">
+            <a:avLst/>
+          </a:prstGeom>
+          <a:noFill/>
+          <a:ln/>
+        </p:spPr>
+        <p:txBody>
+          <a:bodyPr wrap="square" lIns="0" tIns="0" rIns="0" bIns="0" rtlCol="0" anchor="t">
+            <a:normAutofit/>
+          </a:bodyPr>
+          <a:lstStyle/>
+          <a:p>
+            <a:pPr algn="l" indent="0" marL="0">
+              <a:lnSpc>
+                <a:spcPts val="3960"/>
+              </a:lnSpc>
+              <a:buNone/>
+            </a:pPr>
+            <a:r>
+              <a:rPr lang="en-US" sz="3600" b="1" i="0" dirty="0">
+                <a:solidFill>
+                  <a:srgbClr val="10212B"/>
+                </a:solidFill>
+                <a:latin typeface="Verdana" pitchFamily="34" charset="0"/>
+                <a:ea typeface="Verdana" pitchFamily="34" charset="-122"/>
+                <a:cs typeface="Verdana" pitchFamily="34" charset="-120"/>
+              </a:rPr>
+              <a:t>The rules that already ask for this list</a:t>
+            </a:r>
+            <a:endParaRPr lang="en-US" sz="3600" dirty="0"/>
+          </a:p>
+        </p:txBody>
+      </p:sp>
+      <p:sp>
+        <p:nvSpPr>
+          <p:cNvPr id="3" name="Shape 1"/>
+          <p:cNvSpPr/>
+          <p:nvPr/>
+        </p:nvSpPr>
+        <p:spPr>
+          <a:xfrm>
+            <a:off x="812800" y="1601440"/>
+            <a:ext cx="10566400" cy="0"/>
+          </a:xfrm>
+          <a:prstGeom prst="line">
+            <a:avLst/>
+          </a:prstGeom>
+          <a:noFill/>
+          <a:ln w="12700">
+            <a:solidFill>
+              <a:srgbClr val="141413">
+                <a:alpha val="22000"/>
+              </a:srgbClr>
+            </a:solidFill>
+            <a:prstDash val="solid"/>
+          </a:ln>
+        </p:spPr>
+      </p:sp>
+      <p:sp>
+        <p:nvSpPr>
+          <p:cNvPr id="4" name="Shape 2"/>
+          <p:cNvSpPr/>
+          <p:nvPr/>
+        </p:nvSpPr>
+        <p:spPr>
+          <a:xfrm>
+            <a:off x="819150" y="1595090"/>
+            <a:ext cx="0" cy="2463403"/>
+          </a:xfrm>
+          <a:prstGeom prst="line">
+            <a:avLst/>
+          </a:prstGeom>
+          <a:noFill/>
+          <a:ln w="12700">
+            <a:solidFill>
+              <a:srgbClr val="141413">
+                <a:alpha val="22000"/>
+              </a:srgbClr>
+            </a:solidFill>
+            <a:prstDash val="solid"/>
+          </a:ln>
+        </p:spPr>
+      </p:sp>
+      <p:graphicFrame>
+        <p:nvGraphicFramePr>
+          <p:cNvPr id="5" name="Table 0"/>
+          <p:cNvGraphicFramePr>
+            <a:graphicFrameLocks noGrp="1"/>
+          </p:cNvGraphicFramePr>
+          <p:nvPr>
+            <p:extLst>
+              <p:ext uri="{D42A27DB-BD31-4B8C-83A1-F6EECF244321}">
+                <p14:modId xmlns:p14="http://schemas.microsoft.com/office/powerpoint/2010/main" val="1579011935"/>
+              </p:ext>
+            </p:extLst>
+          </p:nvPr>
+        </p:nvGraphicFramePr>
+        <p:xfrm>
+          <a:off x="977900" y="1734790"/>
+          <a:ext cx="10248900" cy="2196703"/>
+        </p:xfrm>
+        <a:graphic>
+          <a:graphicData uri="http://schemas.openxmlformats.org/drawingml/2006/table">
+            <a:tbl>
+              <a:tblPr/>
+              <a:tblGrid>
+                <a:gridCol w="4099560"/>
+                <a:gridCol w="4304538"/>
+                <a:gridCol w="1844802"/>
+              </a:tblGrid>
+              <a:tr h="439341">
+                <a:tc>
+                  <a:txBody>
+                    <a:bodyPr/>
+                    <a:lstStyle/>
+                    <a:p>
+                      <a:pPr indent="0" marL="0">
+                        <a:lnSpc>
+                          <a:spcPts val="2240"/>
+                        </a:lnSpc>
+                        <a:buNone/>
+                      </a:pPr>
+                      <a:r>
+                        <a:rPr lang="en-US" sz="1600" b="1" dirty="0">
+                          <a:solidFill>
+                            <a:srgbClr val="F7F8F6"/>
+                          </a:solidFill>
+                          <a:latin typeface="Verdana" pitchFamily="34" charset="0"/>
+                          <a:ea typeface="Verdana" pitchFamily="34" charset="-122"/>
+                          <a:cs typeface="Verdana" pitchFamily="34" charset="-120"/>
+                        </a:rPr>
+                        <a:t>Rule</a:t>
+                      </a:r>
+                      <a:endParaRPr lang="en-US" sz="1600" dirty="0">
+                        <a:latin typeface="Verdana" charset="0"/>
+                        <a:ea typeface="Verdana" charset="0"/>
+                        <a:cs typeface="Verdana" charset="0"/>
+                      </a:endParaRPr>
+                    </a:p>
+                  </a:txBody>
+                  <a:tcPr marL="71120" marR="71120" marT="71120" marB="71120" anchor="t">
+                    <a:lnL w="0" cap="flat" cmpd="sng" algn="ctr">
+                      <a:noFill/>
+                    </a:lnL>
+                    <a:lnR w="12700" cap="flat" cmpd="sng" algn="ctr">
+                      <a:solidFill>
+                        <a:srgbClr val="111E26"/>
+                      </a:solidFill>
+                      <a:prstDash val="solid"/>
+                      <a:round/>
+                      <a:headEnd type="none" w="med" len="med"/>
+                      <a:tailEnd type="none" w="med" len="med"/>
+                    </a:lnR>
+                    <a:lnT w="0" cap="flat" cmpd="sng" algn="ctr">
+                      <a:noFill/>
+                    </a:lnT>
+                    <a:lnB w="12700" cap="flat" cmpd="sng" algn="ctr">
+                      <a:solidFill>
+                        <a:srgbClr val="111E26"/>
+                      </a:solidFill>
+                      <a:prstDash val="solid"/>
+                      <a:round/>
+                      <a:headEnd type="none" w="med" len="med"/>
+                      <a:tailEnd type="none" w="med" len="med"/>
+                    </a:lnB>
+                    <a:solidFill>
+                      <a:srgbClr val="10212B"/>
+                    </a:solidFill>
+                  </a:tcPr>
+                </a:tc>
+                <a:tc>
+                  <a:txBody>
+                    <a:bodyPr/>
+                    <a:lstStyle/>
+                    <a:p>
+                      <a:pPr indent="0" marL="0">
+                        <a:lnSpc>
+                          <a:spcPts val="2240"/>
+                        </a:lnSpc>
+                        <a:buNone/>
+                      </a:pPr>
+                      <a:r>
+                        <a:rPr lang="en-US" sz="1600" b="1" dirty="0">
+                          <a:solidFill>
+                            <a:srgbClr val="F7F8F6"/>
+                          </a:solidFill>
+                          <a:latin typeface="Verdana" pitchFamily="34" charset="0"/>
+                          <a:ea typeface="Verdana" pitchFamily="34" charset="-122"/>
+                          <a:cs typeface="Verdana" pitchFamily="34" charset="-120"/>
+                        </a:rPr>
+                        <a:t>Who it covers</a:t>
+                      </a:r>
+                      <a:endParaRPr lang="en-US" sz="1600" dirty="0">
+                        <a:latin typeface="Verdana" charset="0"/>
+                        <a:ea typeface="Verdana" charset="0"/>
+                        <a:cs typeface="Verdana" charset="0"/>
+                      </a:endParaRPr>
+                    </a:p>
+                  </a:txBody>
+                  <a:tcPr marL="71120" marR="71120" marT="71120" marB="71120" anchor="t">
+                    <a:lnL w="12700" cap="flat" cmpd="sng" algn="ctr">
+                      <a:solidFill>
+                        <a:srgbClr val="111E26"/>
+                      </a:solidFill>
+                      <a:prstDash val="solid"/>
+                      <a:round/>
+                      <a:headEnd type="none" w="med" len="med"/>
+                      <a:tailEnd type="none" w="med" len="med"/>
+                    </a:lnL>
+                    <a:lnR w="12700" cap="flat" cmpd="sng" algn="ctr">
+                      <a:solidFill>
+                        <a:srgbClr val="111E26"/>
+                      </a:solidFill>
+                      <a:prstDash val="solid"/>
+                      <a:round/>
+                      <a:headEnd type="none" w="med" len="med"/>
+                      <a:tailEnd type="none" w="med" len="med"/>
+                    </a:lnR>
+                    <a:lnT w="0" cap="flat" cmpd="sng" algn="ctr">
+                      <a:noFill/>
+                    </a:lnT>
+                    <a:lnB w="12700" cap="flat" cmpd="sng" algn="ctr">
+                      <a:solidFill>
+                        <a:srgbClr val="111E26"/>
+                      </a:solidFill>
+                      <a:prstDash val="solid"/>
+                      <a:round/>
+                      <a:headEnd type="none" w="med" len="med"/>
+                      <a:tailEnd type="none" w="med" len="med"/>
+                    </a:lnB>
+                    <a:solidFill>
+                      <a:srgbClr val="10212B"/>
+                    </a:solidFill>
+                  </a:tcPr>
+                </a:tc>
+                <a:tc>
+                  <a:txBody>
+                    <a:bodyPr/>
+                    <a:lstStyle/>
+                    <a:p>
+                      <a:pPr indent="0" marL="0">
+                        <a:lnSpc>
+                          <a:spcPts val="2240"/>
+                        </a:lnSpc>
+                        <a:buNone/>
+                      </a:pPr>
+                      <a:r>
+                        <a:rPr lang="en-US" sz="1600" b="1" dirty="0">
+                          <a:solidFill>
+                            <a:srgbClr val="F7F8F6"/>
+                          </a:solidFill>
+                          <a:latin typeface="Verdana" pitchFamily="34" charset="0"/>
+                          <a:ea typeface="Verdana" pitchFamily="34" charset="-122"/>
+                          <a:cs typeface="Verdana" pitchFamily="34" charset="-120"/>
+                        </a:rPr>
+                        <a:t>In force</a:t>
+                      </a:r>
+                      <a:endParaRPr lang="en-US" sz="1600" dirty="0">
+                        <a:latin typeface="Verdana" charset="0"/>
+                        <a:ea typeface="Verdana" charset="0"/>
+                        <a:cs typeface="Verdana" charset="0"/>
+                      </a:endParaRPr>
+                    </a:p>
+                  </a:txBody>
+                  <a:tcPr marL="71120" marR="71120" marT="71120" marB="71120" anchor="t">
+                    <a:lnL w="12700" cap="flat" cmpd="sng" algn="ctr">
+                      <a:solidFill>
+                        <a:srgbClr val="111E26"/>
+                      </a:solidFill>
+                      <a:prstDash val="solid"/>
+                      <a:round/>
+                      <a:headEnd type="none" w="med" len="med"/>
+                      <a:tailEnd type="none" w="med" len="med"/>
+                    </a:lnL>
+                    <a:lnR w="12700" cap="flat" cmpd="sng" algn="ctr">
+                      <a:solidFill>
+                        <a:srgbClr val="111E26"/>
+                      </a:solidFill>
+                      <a:prstDash val="solid"/>
+                      <a:round/>
+                      <a:headEnd type="none" w="med" len="med"/>
+                      <a:tailEnd type="none" w="med" len="med"/>
+                    </a:lnR>
+                    <a:lnT w="0" cap="flat" cmpd="sng" algn="ctr">
+                      <a:noFill/>
+                    </a:lnT>
+                    <a:lnB w="12700" cap="flat" cmpd="sng" algn="ctr">
+                      <a:solidFill>
+                        <a:srgbClr val="111E26"/>
+                      </a:solidFill>
+                      <a:prstDash val="solid"/>
+                      <a:round/>
+                      <a:headEnd type="none" w="med" len="med"/>
+                      <a:tailEnd type="none" w="med" len="med"/>
+                    </a:lnB>
+                    <a:solidFill>
+                      <a:srgbClr val="10212B"/>
+                    </a:solidFill>
+                  </a:tcPr>
+                </a:tc>
+              </a:tr>
+              <a:tr h="439341">
+                <a:tc>
+                  <a:txBody>
+                    <a:bodyPr/>
+                    <a:lstStyle/>
+                    <a:p>
+                      <a:pPr indent="0" marL="0">
+                        <a:lnSpc>
+                          <a:spcPts val="2240"/>
+                        </a:lnSpc>
+                        <a:buNone/>
+                      </a:pPr>
+                      <a:r>
+                        <a:rPr lang="en-US" sz="1600" dirty="0">
+                          <a:solidFill>
+                            <a:srgbClr val="10212B"/>
+                          </a:solidFill>
+                          <a:latin typeface="Verdana" pitchFamily="34" charset="0"/>
+                          <a:ea typeface="Verdana" pitchFamily="34" charset="-122"/>
+                          <a:cs typeface="Verdana" pitchFamily="34" charset="-120"/>
+                        </a:rPr>
+                        <a:t>PCI DSS 4.0</a:t>
+                      </a:r>
+                      <a:endParaRPr lang="en-US" sz="1600" dirty="0">
+                        <a:latin typeface="Verdana" charset="0"/>
+                        <a:ea typeface="Verdana" charset="0"/>
+                        <a:cs typeface="Verdana" charset="0"/>
+                      </a:endParaRPr>
+                    </a:p>
+                  </a:txBody>
+                  <a:tcPr marL="71120" marR="71120" marT="71120" marB="71120" anchor="t">
+                    <a:lnL w="0" cap="flat" cmpd="sng" algn="ctr">
+                      <a:noFill/>
+                    </a:lnL>
+                    <a:lnR w="12700" cap="flat" cmpd="sng" algn="ctr">
+                      <a:solidFill>
+                        <a:srgbClr val="C5C6C4"/>
+                      </a:solidFill>
+                      <a:prstDash val="solid"/>
+                      <a:round/>
+                      <a:headEnd type="none" w="med" len="med"/>
+                      <a:tailEnd type="none" w="med" len="med"/>
+                    </a:lnR>
+                    <a:lnT w="12700" cap="flat" cmpd="sng" algn="ctr">
+                      <a:solidFill>
+                        <a:srgbClr val="111E26"/>
+                      </a:solidFill>
+                      <a:prstDash val="solid"/>
+                      <a:round/>
+                      <a:headEnd type="none" w="med" len="med"/>
+                      <a:tailEnd type="none" w="med" len="med"/>
+                    </a:lnT>
+                    <a:lnB w="12700" cap="flat" cmpd="sng" algn="ctr">
+                      <a:solidFill>
+                        <a:srgbClr val="C5C6C4"/>
+                      </a:solidFill>
+                      <a:prstDash val="solid"/>
+                      <a:round/>
+                      <a:headEnd type="none" w="med" len="med"/>
+                      <a:tailEnd type="none" w="med" len="med"/>
+                    </a:lnB>
+                  </a:tcPr>
+                </a:tc>
+                <a:tc>
+                  <a:txBody>
+                    <a:bodyPr/>
+                    <a:lstStyle/>
+                    <a:p>
+                      <a:pPr indent="0" marL="0">
+                        <a:lnSpc>
+                          <a:spcPts val="2240"/>
+                        </a:lnSpc>
+                        <a:buNone/>
+                      </a:pPr>
+                      <a:r>
+                        <a:rPr lang="en-US" sz="1600" dirty="0">
+                          <a:solidFill>
+                            <a:srgbClr val="10212B"/>
+                          </a:solidFill>
+                          <a:latin typeface="Verdana" pitchFamily="34" charset="0"/>
+                          <a:ea typeface="Verdana" pitchFamily="34" charset="-122"/>
+                          <a:cs typeface="Verdana" pitchFamily="34" charset="-120"/>
+                        </a:rPr>
+                        <a:t>Banks and anyone handling card data</a:t>
+                      </a:r>
+                      <a:endParaRPr lang="en-US" sz="1600" dirty="0">
+                        <a:latin typeface="Verdana" charset="0"/>
+                        <a:ea typeface="Verdana" charset="0"/>
+                        <a:cs typeface="Verdana" charset="0"/>
+                      </a:endParaRPr>
+                    </a:p>
+                  </a:txBody>
+                  <a:tcPr marL="71120" marR="71120" marT="71120" marB="71120" anchor="t">
+                    <a:lnL w="12700" cap="flat" cmpd="sng" algn="ctr">
+                      <a:solidFill>
+                        <a:srgbClr val="C5C6C4"/>
+                      </a:solidFill>
+                      <a:prstDash val="solid"/>
+                      <a:round/>
+                      <a:headEnd type="none" w="med" len="med"/>
+                      <a:tailEnd type="none" w="med" len="med"/>
+                    </a:lnL>
+                    <a:lnR w="12700" cap="flat" cmpd="sng" algn="ctr">
+                      <a:solidFill>
+                        <a:srgbClr val="C5C6C4"/>
+                      </a:solidFill>
+                      <a:prstDash val="solid"/>
+                      <a:round/>
+                      <a:headEnd type="none" w="med" len="med"/>
+                      <a:tailEnd type="none" w="med" len="med"/>
+                    </a:lnR>
+                    <a:lnT w="12700" cap="flat" cmpd="sng" algn="ctr">
+                      <a:solidFill>
+                        <a:srgbClr val="111E26"/>
+                      </a:solidFill>
+                      <a:prstDash val="solid"/>
+                      <a:round/>
+                      <a:headEnd type="none" w="med" len="med"/>
+                      <a:tailEnd type="none" w="med" len="med"/>
+                    </a:lnT>
+                    <a:lnB w="12700" cap="flat" cmpd="sng" algn="ctr">
+                      <a:solidFill>
+                        <a:srgbClr val="C5C6C4"/>
+                      </a:solidFill>
+                      <a:prstDash val="solid"/>
+                      <a:round/>
+                      <a:headEnd type="none" w="med" len="med"/>
+                      <a:tailEnd type="none" w="med" len="med"/>
+                    </a:lnB>
+                  </a:tcPr>
+                </a:tc>
+                <a:tc>
+                  <a:txBody>
+                    <a:bodyPr/>
+                    <a:lstStyle/>
+                    <a:p>
+                      <a:pPr indent="0" marL="0">
+                        <a:lnSpc>
+                          <a:spcPts val="2240"/>
+                        </a:lnSpc>
+                        <a:buNone/>
+                      </a:pPr>
+                      <a:r>
+                        <a:rPr lang="en-US" sz="1600" dirty="0">
+                          <a:solidFill>
+                            <a:srgbClr val="10212B"/>
+                          </a:solidFill>
+                          <a:latin typeface="Verdana" pitchFamily="34" charset="0"/>
+                          <a:ea typeface="Verdana" pitchFamily="34" charset="-122"/>
+                          <a:cs typeface="Verdana" pitchFamily="34" charset="-120"/>
+                        </a:rPr>
+                        <a:t>Mar 2025</a:t>
+                      </a:r>
+                      <a:endParaRPr lang="en-US" sz="1600" dirty="0">
+                        <a:latin typeface="Verdana" charset="0"/>
+                        <a:ea typeface="Verdana" charset="0"/>
+                        <a:cs typeface="Verdana" charset="0"/>
+                      </a:endParaRPr>
+                    </a:p>
+                  </a:txBody>
+                  <a:tcPr marL="71120" marR="71120" marT="71120" marB="71120" anchor="t">
+                    <a:lnL w="12700" cap="flat" cmpd="sng" algn="ctr">
+                      <a:solidFill>
+                        <a:srgbClr val="C5C6C4"/>
+                      </a:solidFill>
+                      <a:prstDash val="solid"/>
+                      <a:round/>
+                      <a:headEnd type="none" w="med" len="med"/>
+                      <a:tailEnd type="none" w="med" len="med"/>
+                    </a:lnL>
+                    <a:lnR w="12700" cap="flat" cmpd="sng" algn="ctr">
+                      <a:solidFill>
+                        <a:srgbClr val="C5C6C4"/>
+                      </a:solidFill>
+                      <a:prstDash val="solid"/>
+                      <a:round/>
+                      <a:headEnd type="none" w="med" len="med"/>
+                      <a:tailEnd type="none" w="med" len="med"/>
+                    </a:lnR>
+                    <a:lnT w="12700" cap="flat" cmpd="sng" algn="ctr">
+                      <a:solidFill>
+                        <a:srgbClr val="111E26"/>
+                      </a:solidFill>
+                      <a:prstDash val="solid"/>
+                      <a:round/>
+                      <a:headEnd type="none" w="med" len="med"/>
+                      <a:tailEnd type="none" w="med" len="med"/>
+                    </a:lnT>
+                    <a:lnB w="12700" cap="flat" cmpd="sng" algn="ctr">
+                      <a:solidFill>
+                        <a:srgbClr val="C5C6C4"/>
+                      </a:solidFill>
+                      <a:prstDash val="solid"/>
+                      <a:round/>
+                      <a:headEnd type="none" w="med" len="med"/>
+                      <a:tailEnd type="none" w="med" len="med"/>
+                    </a:lnB>
+                  </a:tcPr>
+                </a:tc>
+              </a:tr>
+              <a:tr h="439341">
+                <a:tc>
+                  <a:txBody>
+                    <a:bodyPr/>
+                    <a:lstStyle/>
+                    <a:p>
+                      <a:pPr indent="0" marL="0">
+                        <a:lnSpc>
+                          <a:spcPts val="2240"/>
+                        </a:lnSpc>
+                        <a:buNone/>
+                      </a:pPr>
+                      <a:r>
+                        <a:rPr lang="en-US" sz="1600" dirty="0">
+                          <a:solidFill>
+                            <a:srgbClr val="10212B"/>
+                          </a:solidFill>
+                          <a:latin typeface="Verdana" pitchFamily="34" charset="0"/>
+                          <a:ea typeface="Verdana" pitchFamily="34" charset="-122"/>
+                          <a:cs typeface="Verdana" pitchFamily="34" charset="-120"/>
+                        </a:rPr>
+                        <a:t>EU DORA</a:t>
+                      </a:r>
+                      <a:endParaRPr lang="en-US" sz="1600" dirty="0">
+                        <a:latin typeface="Verdana" charset="0"/>
+                        <a:ea typeface="Verdana" charset="0"/>
+                        <a:cs typeface="Verdana" charset="0"/>
+                      </a:endParaRPr>
+                    </a:p>
+                  </a:txBody>
+                  <a:tcPr marL="71120" marR="71120" marT="71120" marB="71120" anchor="t">
+                    <a:lnL w="0" cap="flat" cmpd="sng" algn="ctr">
+                      <a:noFill/>
+                    </a:lnL>
+                    <a:lnR w="12700" cap="flat" cmpd="sng" algn="ctr">
+                      <a:solidFill>
+                        <a:srgbClr val="BFC1BE"/>
+                      </a:solidFill>
+                      <a:prstDash val="solid"/>
+                      <a:round/>
+                      <a:headEnd type="none" w="med" len="med"/>
+                      <a:tailEnd type="none" w="med" len="med"/>
+                    </a:lnR>
+                    <a:lnT w="12700" cap="flat" cmpd="sng" algn="ctr">
+                      <a:solidFill>
+                        <a:srgbClr val="C5C6C4"/>
+                      </a:solidFill>
+                      <a:prstDash val="solid"/>
+                      <a:round/>
+                      <a:headEnd type="none" w="med" len="med"/>
+                      <a:tailEnd type="none" w="med" len="med"/>
+                    </a:lnT>
+                    <a:lnB w="12700" cap="flat" cmpd="sng" algn="ctr">
+                      <a:solidFill>
+                        <a:srgbClr val="BFC1BE"/>
+                      </a:solidFill>
+                      <a:prstDash val="solid"/>
+                      <a:round/>
+                      <a:headEnd type="none" w="med" len="med"/>
+                      <a:tailEnd type="none" w="med" len="med"/>
+                    </a:lnB>
+                    <a:solidFill>
+                      <a:srgbClr val="EFF2EE"/>
+                    </a:solidFill>
+                  </a:tcPr>
+                </a:tc>
+                <a:tc>
+                  <a:txBody>
+                    <a:bodyPr/>
+                    <a:lstStyle/>
+                    <a:p>
+                      <a:pPr indent="0" marL="0">
+                        <a:lnSpc>
+                          <a:spcPts val="2240"/>
+                        </a:lnSpc>
+                        <a:buNone/>
+                      </a:pPr>
+                      <a:r>
+                        <a:rPr lang="en-US" sz="1600" dirty="0">
+                          <a:solidFill>
+                            <a:srgbClr val="10212B"/>
+                          </a:solidFill>
+                          <a:latin typeface="Verdana" pitchFamily="34" charset="0"/>
+                          <a:ea typeface="Verdana" pitchFamily="34" charset="-122"/>
+                          <a:cs typeface="Verdana" pitchFamily="34" charset="-120"/>
+                        </a:rPr>
+                        <a:t>EU banks, insurers, investment firms</a:t>
+                      </a:r>
+                      <a:endParaRPr lang="en-US" sz="1600" dirty="0">
+                        <a:latin typeface="Verdana" charset="0"/>
+                        <a:ea typeface="Verdana" charset="0"/>
+                        <a:cs typeface="Verdana" charset="0"/>
+                      </a:endParaRPr>
+                    </a:p>
+                  </a:txBody>
+                  <a:tcPr marL="71120" marR="71120" marT="71120" marB="71120" anchor="t">
+                    <a:lnL w="12700" cap="flat" cmpd="sng" algn="ctr">
+                      <a:solidFill>
+                        <a:srgbClr val="BFC1BE"/>
+                      </a:solidFill>
+                      <a:prstDash val="solid"/>
+                      <a:round/>
+                      <a:headEnd type="none" w="med" len="med"/>
+                      <a:tailEnd type="none" w="med" len="med"/>
+                    </a:lnL>
+                    <a:lnR w="12700" cap="flat" cmpd="sng" algn="ctr">
+                      <a:solidFill>
+                        <a:srgbClr val="BFC1BE"/>
+                      </a:solidFill>
+                      <a:prstDash val="solid"/>
+                      <a:round/>
+                      <a:headEnd type="none" w="med" len="med"/>
+                      <a:tailEnd type="none" w="med" len="med"/>
+                    </a:lnR>
+                    <a:lnT w="12700" cap="flat" cmpd="sng" algn="ctr">
+                      <a:solidFill>
+                        <a:srgbClr val="C5C6C4"/>
+                      </a:solidFill>
+                      <a:prstDash val="solid"/>
+                      <a:round/>
+                      <a:headEnd type="none" w="med" len="med"/>
+                      <a:tailEnd type="none" w="med" len="med"/>
+                    </a:lnT>
+                    <a:lnB w="12700" cap="flat" cmpd="sng" algn="ctr">
+                      <a:solidFill>
+                        <a:srgbClr val="BFC1BE"/>
+                      </a:solidFill>
+                      <a:prstDash val="solid"/>
+                      <a:round/>
+                      <a:headEnd type="none" w="med" len="med"/>
+                      <a:tailEnd type="none" w="med" len="med"/>
+                    </a:lnB>
+                    <a:solidFill>
+                      <a:srgbClr val="EFF2EE"/>
+                    </a:solidFill>
+                  </a:tcPr>
+                </a:tc>
+                <a:tc>
+                  <a:txBody>
+                    <a:bodyPr/>
+                    <a:lstStyle/>
+                    <a:p>
+                      <a:pPr indent="0" marL="0">
+                        <a:lnSpc>
+                          <a:spcPts val="2240"/>
+                        </a:lnSpc>
+                        <a:buNone/>
+                      </a:pPr>
+                      <a:r>
+                        <a:rPr lang="en-US" sz="1600" dirty="0">
+                          <a:solidFill>
+                            <a:srgbClr val="10212B"/>
+                          </a:solidFill>
+                          <a:latin typeface="Verdana" pitchFamily="34" charset="0"/>
+                          <a:ea typeface="Verdana" pitchFamily="34" charset="-122"/>
+                          <a:cs typeface="Verdana" pitchFamily="34" charset="-120"/>
+                        </a:rPr>
+                        <a:t>Jan 2025</a:t>
+                      </a:r>
+                      <a:endParaRPr lang="en-US" sz="1600" dirty="0">
+                        <a:latin typeface="Verdana" charset="0"/>
+                        <a:ea typeface="Verdana" charset="0"/>
+                        <a:cs typeface="Verdana" charset="0"/>
+                      </a:endParaRPr>
+                    </a:p>
+                  </a:txBody>
+                  <a:tcPr marL="71120" marR="71120" marT="71120" marB="71120" anchor="t">
+                    <a:lnL w="12700" cap="flat" cmpd="sng" algn="ctr">
+                      <a:solidFill>
+                        <a:srgbClr val="BFC1BE"/>
+                      </a:solidFill>
+                      <a:prstDash val="solid"/>
+                      <a:round/>
+                      <a:headEnd type="none" w="med" len="med"/>
+                      <a:tailEnd type="none" w="med" len="med"/>
+                    </a:lnL>
+                    <a:lnR w="12700" cap="flat" cmpd="sng" algn="ctr">
+                      <a:solidFill>
+                        <a:srgbClr val="BFC1BE"/>
+                      </a:solidFill>
+                      <a:prstDash val="solid"/>
+                      <a:round/>
+                      <a:headEnd type="none" w="med" len="med"/>
+                      <a:tailEnd type="none" w="med" len="med"/>
+                    </a:lnR>
+                    <a:lnT w="12700" cap="flat" cmpd="sng" algn="ctr">
+                      <a:solidFill>
+                        <a:srgbClr val="C5C6C4"/>
+                      </a:solidFill>
+                      <a:prstDash val="solid"/>
+                      <a:round/>
+                      <a:headEnd type="none" w="med" len="med"/>
+                      <a:tailEnd type="none" w="med" len="med"/>
+                    </a:lnT>
+                    <a:lnB w="12700" cap="flat" cmpd="sng" algn="ctr">
+                      <a:solidFill>
+                        <a:srgbClr val="BFC1BE"/>
+                      </a:solidFill>
+                      <a:prstDash val="solid"/>
+                      <a:round/>
+                      <a:headEnd type="none" w="med" len="med"/>
+                      <a:tailEnd type="none" w="med" len="med"/>
+                    </a:lnB>
+                    <a:solidFill>
+                      <a:srgbClr val="EFF2EE"/>
+                    </a:solidFill>
+                  </a:tcPr>
+                </a:tc>
+              </a:tr>
+              <a:tr h="439341">
+                <a:tc>
+                  <a:txBody>
+                    <a:bodyPr/>
+                    <a:lstStyle/>
+                    <a:p>
+                      <a:pPr indent="0" marL="0">
+                        <a:lnSpc>
+                          <a:spcPts val="2240"/>
+                        </a:lnSpc>
+                        <a:buNone/>
+                      </a:pPr>
+                      <a:r>
+                        <a:rPr lang="en-US" sz="1600" dirty="0">
+                          <a:solidFill>
+                            <a:srgbClr val="10212B"/>
+                          </a:solidFill>
+                          <a:latin typeface="Verdana" pitchFamily="34" charset="0"/>
+                          <a:ea typeface="Verdana" pitchFamily="34" charset="-122"/>
+                          <a:cs typeface="Verdana" pitchFamily="34" charset="-120"/>
+                        </a:rPr>
+                        <a:t>EU Cyber Resilience Act</a:t>
+                      </a:r>
+                      <a:endParaRPr lang="en-US" sz="1600" dirty="0">
+                        <a:latin typeface="Verdana" charset="0"/>
+                        <a:ea typeface="Verdana" charset="0"/>
+                        <a:cs typeface="Verdana" charset="0"/>
+                      </a:endParaRPr>
+                    </a:p>
+                  </a:txBody>
+                  <a:tcPr marL="71120" marR="71120" marT="71120" marB="71120" anchor="t">
+                    <a:lnL w="0" cap="flat" cmpd="sng" algn="ctr">
+                      <a:noFill/>
+                    </a:lnL>
+                    <a:lnR w="12700" cap="flat" cmpd="sng" algn="ctr">
+                      <a:solidFill>
+                        <a:srgbClr val="C5C6C4"/>
+                      </a:solidFill>
+                      <a:prstDash val="solid"/>
+                      <a:round/>
+                      <a:headEnd type="none" w="med" len="med"/>
+                      <a:tailEnd type="none" w="med" len="med"/>
+                    </a:lnR>
+                    <a:lnT w="12700" cap="flat" cmpd="sng" algn="ctr">
+                      <a:solidFill>
+                        <a:srgbClr val="BFC1BE"/>
+                      </a:solidFill>
+                      <a:prstDash val="solid"/>
+                      <a:round/>
+                      <a:headEnd type="none" w="med" len="med"/>
+                      <a:tailEnd type="none" w="med" len="med"/>
+                    </a:lnT>
+                    <a:lnB w="12700" cap="flat" cmpd="sng" algn="ctr">
+                      <a:solidFill>
+                        <a:srgbClr val="C5C6C4"/>
+                      </a:solidFill>
+                      <a:prstDash val="solid"/>
+                      <a:round/>
+                      <a:headEnd type="none" w="med" len="med"/>
+                      <a:tailEnd type="none" w="med" len="med"/>
+                    </a:lnB>
+                  </a:tcPr>
+                </a:tc>
+                <a:tc>
+                  <a:txBody>
+                    <a:bodyPr/>
+                    <a:lstStyle/>
+                    <a:p>
+                      <a:pPr indent="0" marL="0">
+                        <a:lnSpc>
+                          <a:spcPts val="2240"/>
+                        </a:lnSpc>
+                        <a:buNone/>
+                      </a:pPr>
+                      <a:r>
+                        <a:rPr lang="en-US" sz="1600" dirty="0">
+                          <a:solidFill>
+                            <a:srgbClr val="10212B"/>
+                          </a:solidFill>
+                          <a:latin typeface="Verdana" pitchFamily="34" charset="0"/>
+                          <a:ea typeface="Verdana" pitchFamily="34" charset="-122"/>
+                          <a:cs typeface="Verdana" pitchFamily="34" charset="-120"/>
+                        </a:rPr>
+                        <a:t>Anyone selling software in the EU</a:t>
+                      </a:r>
+                      <a:endParaRPr lang="en-US" sz="1600" dirty="0">
+                        <a:latin typeface="Verdana" charset="0"/>
+                        <a:ea typeface="Verdana" charset="0"/>
+                        <a:cs typeface="Verdana" charset="0"/>
+                      </a:endParaRPr>
+                    </a:p>
+                  </a:txBody>
+                  <a:tcPr marL="71120" marR="71120" marT="71120" marB="71120" anchor="t">
+                    <a:lnL w="12700" cap="flat" cmpd="sng" algn="ctr">
+                      <a:solidFill>
+                        <a:srgbClr val="C5C6C4"/>
+                      </a:solidFill>
+                      <a:prstDash val="solid"/>
+                      <a:round/>
+                      <a:headEnd type="none" w="med" len="med"/>
+                      <a:tailEnd type="none" w="med" len="med"/>
+                    </a:lnL>
+                    <a:lnR w="12700" cap="flat" cmpd="sng" algn="ctr">
+                      <a:solidFill>
+                        <a:srgbClr val="C5C6C4"/>
+                      </a:solidFill>
+                      <a:prstDash val="solid"/>
+                      <a:round/>
+                      <a:headEnd type="none" w="med" len="med"/>
+                      <a:tailEnd type="none" w="med" len="med"/>
+                    </a:lnR>
+                    <a:lnT w="12700" cap="flat" cmpd="sng" algn="ctr">
+                      <a:solidFill>
+                        <a:srgbClr val="BFC1BE"/>
+                      </a:solidFill>
+                      <a:prstDash val="solid"/>
+                      <a:round/>
+                      <a:headEnd type="none" w="med" len="med"/>
+                      <a:tailEnd type="none" w="med" len="med"/>
+                    </a:lnT>
+                    <a:lnB w="12700" cap="flat" cmpd="sng" algn="ctr">
+                      <a:solidFill>
+                        <a:srgbClr val="C5C6C4"/>
+                      </a:solidFill>
+                      <a:prstDash val="solid"/>
+                      <a:round/>
+                      <a:headEnd type="none" w="med" len="med"/>
+                      <a:tailEnd type="none" w="med" len="med"/>
+                    </a:lnB>
+                  </a:tcPr>
+                </a:tc>
+                <a:tc>
+                  <a:txBody>
+                    <a:bodyPr/>
+                    <a:lstStyle/>
+                    <a:p>
+                      <a:pPr indent="0" marL="0">
+                        <a:lnSpc>
+                          <a:spcPts val="2240"/>
+                        </a:lnSpc>
+                        <a:buNone/>
+                      </a:pPr>
+                      <a:r>
+                        <a:rPr lang="en-US" sz="1600" dirty="0">
+                          <a:solidFill>
+                            <a:srgbClr val="10212B"/>
+                          </a:solidFill>
+                          <a:latin typeface="Verdana" pitchFamily="34" charset="0"/>
+                          <a:ea typeface="Verdana" pitchFamily="34" charset="-122"/>
+                          <a:cs typeface="Verdana" pitchFamily="34" charset="-120"/>
+                        </a:rPr>
+                        <a:t>Dec 2027</a:t>
+                      </a:r>
+                      <a:endParaRPr lang="en-US" sz="1600" dirty="0">
+                        <a:latin typeface="Verdana" charset="0"/>
+                        <a:ea typeface="Verdana" charset="0"/>
+                        <a:cs typeface="Verdana" charset="0"/>
+                      </a:endParaRPr>
+                    </a:p>
+                  </a:txBody>
+                  <a:tcPr marL="71120" marR="71120" marT="71120" marB="71120" anchor="t">
+                    <a:lnL w="12700" cap="flat" cmpd="sng" algn="ctr">
+                      <a:solidFill>
+                        <a:srgbClr val="C5C6C4"/>
+                      </a:solidFill>
+                      <a:prstDash val="solid"/>
+                      <a:round/>
+                      <a:headEnd type="none" w="med" len="med"/>
+                      <a:tailEnd type="none" w="med" len="med"/>
+                    </a:lnL>
+                    <a:lnR w="12700" cap="flat" cmpd="sng" algn="ctr">
+                      <a:solidFill>
+                        <a:srgbClr val="C5C6C4"/>
+                      </a:solidFill>
+                      <a:prstDash val="solid"/>
+                      <a:round/>
+                      <a:headEnd type="none" w="med" len="med"/>
+                      <a:tailEnd type="none" w="med" len="med"/>
+                    </a:lnR>
+                    <a:lnT w="12700" cap="flat" cmpd="sng" algn="ctr">
+                      <a:solidFill>
+                        <a:srgbClr val="BFC1BE"/>
+                      </a:solidFill>
+                      <a:prstDash val="solid"/>
+                      <a:round/>
+                      <a:headEnd type="none" w="med" len="med"/>
+                      <a:tailEnd type="none" w="med" len="med"/>
+                    </a:lnT>
+                    <a:lnB w="12700" cap="flat" cmpd="sng" algn="ctr">
+                      <a:solidFill>
+                        <a:srgbClr val="C5C6C4"/>
+                      </a:solidFill>
+                      <a:prstDash val="solid"/>
+                      <a:round/>
+                      <a:headEnd type="none" w="med" len="med"/>
+                      <a:tailEnd type="none" w="med" len="med"/>
+                    </a:lnB>
+                  </a:tcPr>
+                </a:tc>
+              </a:tr>
+              <a:tr h="439341">
+                <a:tc>
+                  <a:txBody>
+                    <a:bodyPr/>
+                    <a:lstStyle/>
+                    <a:p>
+                      <a:pPr indent="0" marL="0">
+                        <a:lnSpc>
+                          <a:spcPts val="2240"/>
+                        </a:lnSpc>
+                        <a:buNone/>
+                      </a:pPr>
+                      <a:r>
+                        <a:rPr lang="en-US" sz="1600" dirty="0">
+                          <a:solidFill>
+                            <a:srgbClr val="10212B"/>
+                          </a:solidFill>
+                          <a:latin typeface="Verdana" pitchFamily="34" charset="0"/>
+                          <a:ea typeface="Verdana" pitchFamily="34" charset="-122"/>
+                          <a:cs typeface="Verdana" pitchFamily="34" charset="-120"/>
+                        </a:rPr>
+                        <a:t>US Executive Order 14028</a:t>
+                      </a:r>
+                      <a:endParaRPr lang="en-US" sz="1600" dirty="0">
+                        <a:latin typeface="Verdana" charset="0"/>
+                        <a:ea typeface="Verdana" charset="0"/>
+                        <a:cs typeface="Verdana" charset="0"/>
+                      </a:endParaRPr>
+                    </a:p>
+                  </a:txBody>
+                  <a:tcPr marL="71120" marR="71120" marT="71120" marB="71120" anchor="t">
+                    <a:lnL w="0" cap="flat" cmpd="sng" algn="ctr">
+                      <a:noFill/>
+                    </a:lnL>
+                    <a:lnR w="12700" cap="flat" cmpd="sng" algn="ctr">
+                      <a:solidFill>
+                        <a:srgbClr val="BFC1BE"/>
+                      </a:solidFill>
+                      <a:prstDash val="solid"/>
+                      <a:round/>
+                      <a:headEnd type="none" w="med" len="med"/>
+                      <a:tailEnd type="none" w="med" len="med"/>
+                    </a:lnR>
+                    <a:lnT w="12700" cap="flat" cmpd="sng" algn="ctr">
+                      <a:solidFill>
+                        <a:srgbClr val="C5C6C4"/>
+                      </a:solidFill>
+                      <a:prstDash val="solid"/>
+                      <a:round/>
+                      <a:headEnd type="none" w="med" len="med"/>
+                      <a:tailEnd type="none" w="med" len="med"/>
+                    </a:lnT>
+                    <a:lnB w="12700" cap="flat" cmpd="sng" algn="ctr">
+                      <a:solidFill>
+                        <a:srgbClr val="BFC1BE"/>
+                      </a:solidFill>
+                      <a:prstDash val="solid"/>
+                      <a:round/>
+                      <a:headEnd type="none" w="med" len="med"/>
+                      <a:tailEnd type="none" w="med" len="med"/>
+                    </a:lnB>
+                    <a:solidFill>
+                      <a:srgbClr val="EFF2EE"/>
+                    </a:solidFill>
+                  </a:tcPr>
+                </a:tc>
+                <a:tc>
+                  <a:txBody>
+                    <a:bodyPr/>
+                    <a:lstStyle/>
+                    <a:p>
+                      <a:pPr indent="0" marL="0">
+                        <a:lnSpc>
+                          <a:spcPts val="2240"/>
+                        </a:lnSpc>
+                        <a:buNone/>
+                      </a:pPr>
+                      <a:r>
+                        <a:rPr lang="en-US" sz="1600" dirty="0">
+                          <a:solidFill>
+                            <a:srgbClr val="10212B"/>
+                          </a:solidFill>
+                          <a:latin typeface="Verdana" pitchFamily="34" charset="0"/>
+                          <a:ea typeface="Verdana" pitchFamily="34" charset="-122"/>
+                          <a:cs typeface="Verdana" pitchFamily="34" charset="-120"/>
+                        </a:rPr>
+                        <a:t>Software sold to federal agencies</a:t>
+                      </a:r>
+                      <a:endParaRPr lang="en-US" sz="1600" dirty="0">
+                        <a:latin typeface="Verdana" charset="0"/>
+                        <a:ea typeface="Verdana" charset="0"/>
+                        <a:cs typeface="Verdana" charset="0"/>
+                      </a:endParaRPr>
+                    </a:p>
+                  </a:txBody>
+                  <a:tcPr marL="71120" marR="71120" marT="71120" marB="71120" anchor="t">
+                    <a:lnL w="12700" cap="flat" cmpd="sng" algn="ctr">
+                      <a:solidFill>
+                        <a:srgbClr val="BFC1BE"/>
+                      </a:solidFill>
+                      <a:prstDash val="solid"/>
+                      <a:round/>
+                      <a:headEnd type="none" w="med" len="med"/>
+                      <a:tailEnd type="none" w="med" len="med"/>
+                    </a:lnL>
+                    <a:lnR w="12700" cap="flat" cmpd="sng" algn="ctr">
+                      <a:solidFill>
+                        <a:srgbClr val="BFC1BE"/>
+                      </a:solidFill>
+                      <a:prstDash val="solid"/>
+                      <a:round/>
+                      <a:headEnd type="none" w="med" len="med"/>
+                      <a:tailEnd type="none" w="med" len="med"/>
+                    </a:lnR>
+                    <a:lnT w="12700" cap="flat" cmpd="sng" algn="ctr">
+                      <a:solidFill>
+                        <a:srgbClr val="C5C6C4"/>
+                      </a:solidFill>
+                      <a:prstDash val="solid"/>
+                      <a:round/>
+                      <a:headEnd type="none" w="med" len="med"/>
+                      <a:tailEnd type="none" w="med" len="med"/>
+                    </a:lnT>
+                    <a:lnB w="12700" cap="flat" cmpd="sng" algn="ctr">
+                      <a:solidFill>
+                        <a:srgbClr val="BFC1BE"/>
+                      </a:solidFill>
+                      <a:prstDash val="solid"/>
+                      <a:round/>
+                      <a:headEnd type="none" w="med" len="med"/>
+                      <a:tailEnd type="none" w="med" len="med"/>
+                    </a:lnB>
+                    <a:solidFill>
+                      <a:srgbClr val="EFF2EE"/>
+                    </a:solidFill>
+                  </a:tcPr>
+                </a:tc>
+                <a:tc>
+                  <a:txBody>
+                    <a:bodyPr/>
+                    <a:lstStyle/>
+                    <a:p>
+                      <a:pPr indent="0" marL="0">
+                        <a:lnSpc>
+                          <a:spcPts val="2240"/>
+                        </a:lnSpc>
+                        <a:buNone/>
+                      </a:pPr>
+                      <a:r>
+                        <a:rPr lang="en-US" sz="1600" dirty="0">
+                          <a:solidFill>
+                            <a:srgbClr val="10212B"/>
+                          </a:solidFill>
+                          <a:latin typeface="Verdana" pitchFamily="34" charset="0"/>
+                          <a:ea typeface="Verdana" pitchFamily="34" charset="-122"/>
+                          <a:cs typeface="Verdana" pitchFamily="34" charset="-120"/>
+                        </a:rPr>
+                        <a:t>2021</a:t>
+                      </a:r>
+                      <a:endParaRPr lang="en-US" sz="1600" dirty="0">
+                        <a:latin typeface="Verdana" charset="0"/>
+                        <a:ea typeface="Verdana" charset="0"/>
+                        <a:cs typeface="Verdana" charset="0"/>
+                      </a:endParaRPr>
+                    </a:p>
+                  </a:txBody>
+                  <a:tcPr marL="71120" marR="71120" marT="71120" marB="71120" anchor="t">
+                    <a:lnL w="12700" cap="flat" cmpd="sng" algn="ctr">
+                      <a:solidFill>
+                        <a:srgbClr val="BFC1BE"/>
+                      </a:solidFill>
+                      <a:prstDash val="solid"/>
+                      <a:round/>
+                      <a:headEnd type="none" w="med" len="med"/>
+                      <a:tailEnd type="none" w="med" len="med"/>
+                    </a:lnL>
+                    <a:lnR w="12700" cap="flat" cmpd="sng" algn="ctr">
+                      <a:solidFill>
+                        <a:srgbClr val="BFC1BE"/>
+                      </a:solidFill>
+                      <a:prstDash val="solid"/>
+                      <a:round/>
+                      <a:headEnd type="none" w="med" len="med"/>
+                      <a:tailEnd type="none" w="med" len="med"/>
+                    </a:lnR>
+                    <a:lnT w="12700" cap="flat" cmpd="sng" algn="ctr">
+                      <a:solidFill>
+                        <a:srgbClr val="C5C6C4"/>
+                      </a:solidFill>
+                      <a:prstDash val="solid"/>
+                      <a:round/>
+                      <a:headEnd type="none" w="med" len="med"/>
+                      <a:tailEnd type="none" w="med" len="med"/>
+                    </a:lnT>
+                    <a:lnB w="12700" cap="flat" cmpd="sng" algn="ctr">
+                      <a:solidFill>
+                        <a:srgbClr val="BFC1BE"/>
+                      </a:solidFill>
+                      <a:prstDash val="solid"/>
+                      <a:round/>
+                      <a:headEnd type="none" w="med" len="med"/>
+                      <a:tailEnd type="none" w="med" len="med"/>
+                    </a:lnB>
+                    <a:solidFill>
+                      <a:srgbClr val="EFF2EE"/>
+                    </a:solidFill>
+                  </a:tcPr>
+                </a:tc>
+              </a:tr>
+            </a:tbl>
+          </a:graphicData>
+        </a:graphic>
+      </p:graphicFrame>
+      <p:sp>
+        <p:nvSpPr>
+          <p:cNvPr id="6" name="Text 3"/>
+          <p:cNvSpPr/>
+          <p:nvPr/>
+        </p:nvSpPr>
+        <p:spPr>
+          <a:xfrm>
+            <a:off x="812800" y="4337893"/>
+            <a:ext cx="10595610" cy="594320"/>
+          </a:xfrm>
+          <a:prstGeom prst="rect">
+            <a:avLst/>
+          </a:prstGeom>
+          <a:noFill/>
+          <a:ln/>
+        </p:spPr>
+        <p:txBody>
+          <a:bodyPr wrap="square" lIns="0" tIns="0" rIns="0" bIns="0" rtlCol="0" anchor="t">
+            <a:normAutofit/>
+          </a:bodyPr>
+          <a:lstStyle/>
+          <a:p>
+            <a:pPr algn="l" indent="0" marL="0">
+              <a:lnSpc>
+                <a:spcPts val="2240"/>
+              </a:lnSpc>
+              <a:buNone/>
+            </a:pPr>
+            <a:r>
+              <a:rPr lang="en-US" sz="1600" dirty="0">
+                <a:solidFill>
+                  <a:srgbClr val="4A5568"/>
+                </a:solidFill>
+                <a:latin typeface="Verdana" pitchFamily="34" charset="0"/>
+                <a:ea typeface="Verdana" pitchFamily="34" charset="-122"/>
+                <a:cs typeface="Verdana" pitchFamily="34" charset="-120"/>
+              </a:rPr>
+              <a:t>The two financial rules apply today. Each asks for an inventory of the software we build and the components inside it.</a:t>
+            </a:r>
+            <a:endParaRPr lang="en-US" sz="1600" dirty="0"/>
+          </a:p>
+        </p:txBody>
+      </p:sp>
+      <p:sp>
+        <p:nvSpPr>
+          <p:cNvPr id="7" name="Text 4"/>
+          <p:cNvSpPr/>
+          <p:nvPr/>
+        </p:nvSpPr>
+        <p:spPr>
+          <a:xfrm>
+            <a:off x="812800" y="6238280"/>
+            <a:ext cx="11379200" cy="238720"/>
+          </a:xfrm>
+          <a:prstGeom prst="rect">
+            <a:avLst/>
+          </a:prstGeom>
+          <a:noFill/>
+          <a:ln/>
+        </p:spPr>
+        <p:txBody>
+          <a:bodyPr wrap="square" lIns="0" tIns="0" rIns="0" bIns="0" rtlCol="0" anchor="t">
+            <a:normAutofit/>
+          </a:bodyPr>
+          <a:lstStyle/>
+          <a:p>
+            <a:pPr algn="l" indent="0" marL="0">
+              <a:lnSpc>
+                <a:spcPts val="1680"/>
+              </a:lnSpc>
+              <a:buNone/>
+            </a:pPr>
+            <a:r>
+              <a:rPr lang="en-US" sz="1200" dirty="0">
+                <a:solidFill>
+                  <a:srgbClr val="6A7179"/>
+                </a:solidFill>
+                <a:latin typeface="Verdana" pitchFamily="34" charset="0"/>
+                <a:ea typeface="Verdana" pitchFamily="34" charset="-122"/>
+                <a:cs typeface="Verdana" pitchFamily="34" charset="-120"/>
+              </a:rPr>
+              <a:t>Sources: PCI DSS v4.0 Req. 6.3.2 · Commission Delegated Reg. (EU) 2024/1774 Art. 10(2)(d) · Reg. (EU) 2024/2847 · EO 14028</a:t>
+            </a:r>
+            <a:endParaRPr lang="en-US" sz="1200" dirty="0"/>
+          </a:p>
+        </p:txBody>
+      </p:sp>
+    </p:spTree>
+  </p:cSld>
+  <p:clrMapOvr>
+    <a:masterClrMapping/>
+  </p:clrMapOvr>
+</p:sld>
+</file>
+
+<file path=ppt/slides/slide5.xml><?xml version="1.0" encoding="utf-8"?>
+<p:sld xmlns:a="http://schemas.openxmlformats.org/drawingml/2006/main" xmlns:r="http://schemas.openxmlformats.org/officeDocument/2006/relationships" xmlns:p="http://schemas.openxmlformats.org/presentationml/2006/main">
+  <p:cSld name="Slide 5">
     <p:bg>
       <p:bgPr>
         <a:solidFill>
@@ -2666,7 +4459,9 @@
         <p:nvSpPr>
           <p:cNvPr id="2" name="Text 0"/>
           <p:cNvSpPr/>
-          <p:nvPr/>
+          <p:nvPr>
+            <p:ph type="title"/>
+          </p:nvPr>
         </p:nvSpPr>
         <p:spPr>
           <a:xfrm>
@@ -2692,13 +4487,13 @@
               <a:buNone/>
             </a:pPr>
             <a:r>
-              <a:rPr lang="en-US" sz="3600" b="1" dirty="0">
+              <a:rPr lang="en-US" sz="3600" b="1" i="0" dirty="0">
                 <a:solidFill>
                   <a:srgbClr val="F7F8F6"/>
                 </a:solidFill>
-                <a:latin typeface="IBM Plex Sans" pitchFamily="34" charset="0"/>
-                <a:ea typeface="IBM Plex Sans" pitchFamily="34" charset="-122"/>
-                <a:cs typeface="IBM Plex Sans" pitchFamily="34" charset="-120"/>
+                <a:latin typeface="Verdana" pitchFamily="34" charset="0"/>
+                <a:ea typeface="Verdana" pitchFamily="34" charset="-122"/>
+                <a:cs typeface="Verdana" pitchFamily="34" charset="-120"/>
               </a:rPr>
               <a:t>What that costs us now</a:t>
             </a:r>
@@ -2762,9 +4557,9 @@
                 <a:solidFill>
                   <a:srgbClr val="6FBFAE"/>
                 </a:solidFill>
-                <a:latin typeface="IBM Plex Sans" pitchFamily="34" charset="0"/>
-                <a:ea typeface="IBM Plex Sans" pitchFamily="34" charset="-122"/>
-                <a:cs typeface="IBM Plex Sans" pitchFamily="34" charset="-120"/>
+                <a:latin typeface="Verdana" pitchFamily="34" charset="0"/>
+                <a:ea typeface="Verdana" pitchFamily="34" charset="-122"/>
+                <a:cs typeface="Verdana" pitchFamily="34" charset="-120"/>
               </a:rPr>
               <a:t>[__]</a:t>
             </a:r>
@@ -2806,9 +4601,9 @@
                 <a:solidFill>
                   <a:srgbClr val="B5C4CA"/>
                 </a:solidFill>
-                <a:latin typeface="IBM Plex Sans" pitchFamily="34" charset="0"/>
-                <a:ea typeface="IBM Plex Sans" pitchFamily="34" charset="-122"/>
-                <a:cs typeface="IBM Plex Sans" pitchFamily="34" charset="-120"/>
+                <a:latin typeface="Verdana" pitchFamily="34" charset="0"/>
+                <a:ea typeface="Verdana" pitchFamily="34" charset="-122"/>
+                <a:cs typeface="Verdana" pitchFamily="34" charset="-120"/>
               </a:rPr>
               <a:t>engineer-days a quarter spent answering security questionnaires</a:t>
             </a:r>
@@ -2872,9 +4667,9 @@
                 <a:solidFill>
                   <a:srgbClr val="6FBFAE"/>
                 </a:solidFill>
-                <a:latin typeface="IBM Plex Sans" pitchFamily="34" charset="0"/>
-                <a:ea typeface="IBM Plex Sans" pitchFamily="34" charset="-122"/>
-                <a:cs typeface="IBM Plex Sans" pitchFamily="34" charset="-120"/>
+                <a:latin typeface="Verdana" pitchFamily="34" charset="0"/>
+                <a:ea typeface="Verdana" pitchFamily="34" charset="-122"/>
+                <a:cs typeface="Verdana" pitchFamily="34" charset="-120"/>
               </a:rPr>
               <a:t>[__]</a:t>
             </a:r>
@@ -2916,9 +4711,9 @@
                 <a:solidFill>
                   <a:srgbClr val="B5C4CA"/>
                 </a:solidFill>
-                <a:latin typeface="IBM Plex Sans" pitchFamily="34" charset="0"/>
-                <a:ea typeface="IBM Plex Sans" pitchFamily="34" charset="-122"/>
-                <a:cs typeface="IBM Plex Sans" pitchFamily="34" charset="-120"/>
+                <a:latin typeface="Verdana" pitchFamily="34" charset="0"/>
+                <a:ea typeface="Verdana" pitchFamily="34" charset="-122"/>
+                <a:cs typeface="Verdana" pitchFamily="34" charset="-120"/>
               </a:rPr>
               <a:t>deals last year where a compliance review pushed the close date</a:t>
             </a:r>
@@ -2982,9 +4777,9 @@
                 <a:solidFill>
                   <a:srgbClr val="6FBFAE"/>
                 </a:solidFill>
-                <a:latin typeface="IBM Plex Sans" pitchFamily="34" charset="0"/>
-                <a:ea typeface="IBM Plex Sans" pitchFamily="34" charset="-122"/>
-                <a:cs typeface="IBM Plex Sans" pitchFamily="34" charset="-120"/>
+                <a:latin typeface="Verdana" pitchFamily="34" charset="0"/>
+                <a:ea typeface="Verdana" pitchFamily="34" charset="-122"/>
+                <a:cs typeface="Verdana" pitchFamily="34" charset="-120"/>
               </a:rPr>
               <a:t>[__]</a:t>
             </a:r>
@@ -3026,9 +4821,9 @@
                 <a:solidFill>
                   <a:srgbClr val="B5C4CA"/>
                 </a:solidFill>
-                <a:latin typeface="IBM Plex Sans" pitchFamily="34" charset="0"/>
-                <a:ea typeface="IBM Plex Sans" pitchFamily="34" charset="-122"/>
-                <a:cs typeface="IBM Plex Sans" pitchFamily="34" charset="-120"/>
+                <a:latin typeface="Verdana" pitchFamily="34" charset="0"/>
+                <a:ea typeface="Verdana" pitchFamily="34" charset="-122"/>
+                <a:cs typeface="Verdana" pitchFamily="34" charset="-120"/>
               </a:rPr>
               <a:t>hours to answer "are we exposed?" the last time it mattered</a:t>
             </a:r>
@@ -3070,402 +4865,13 @@
                 <a:solidFill>
                   <a:srgbClr val="F7F8F6"/>
                 </a:solidFill>
-                <a:latin typeface="IBM Plex Sans" pitchFamily="34" charset="0"/>
-                <a:ea typeface="IBM Plex Sans" pitchFamily="34" charset="-122"/>
-                <a:cs typeface="IBM Plex Sans" pitchFamily="34" charset="-120"/>
+                <a:latin typeface="Verdana" pitchFamily="34" charset="0"/>
+                <a:ea typeface="Verdana" pitchFamily="34" charset="-122"/>
+                <a:cs typeface="Verdana" pitchFamily="34" charset="-120"/>
               </a:rPr>
               <a:t>All three recur, and all three are paid for by pulling senior engineers off product work.</a:t>
             </a:r>
             <a:endParaRPr lang="en-US" sz="1700" dirty="0"/>
-          </a:p>
-        </p:txBody>
-      </p:sp>
-    </p:spTree>
-  </p:cSld>
-  <p:clrMapOvr>
-    <a:masterClrMapping/>
-  </p:clrMapOvr>
-</p:sld>
-</file>
-
-<file path=ppt/slides/slide5.xml><?xml version="1.0" encoding="utf-8"?>
-<p:sld xmlns:a="http://schemas.openxmlformats.org/drawingml/2006/main" xmlns:r="http://schemas.openxmlformats.org/officeDocument/2006/relationships" xmlns:p="http://schemas.openxmlformats.org/presentationml/2006/main">
-  <p:cSld name="Slide 5">
-    <p:bg>
-      <p:bgPr>
-        <a:solidFill>
-          <a:srgbClr val="F7F8F6"/>
-        </a:solidFill>
-      </p:bgPr>
-    </p:bg>
-    <p:spTree>
-      <p:nvGrpSpPr>
-        <p:cNvPr id="1" name=""/>
-        <p:cNvGrpSpPr/>
-        <p:nvPr/>
-      </p:nvGrpSpPr>
-      <p:grpSpPr>
-        <a:xfrm>
-          <a:off x="0" y="0"/>
-          <a:ext cx="0" cy="0"/>
-          <a:chOff x="0" y="0"/>
-          <a:chExt cx="0" cy="0"/>
-        </a:xfrm>
-      </p:grpSpPr>
-      <p:sp>
-        <p:nvSpPr>
-          <p:cNvPr id="2" name="Text 0"/>
-          <p:cNvSpPr/>
-          <p:nvPr/>
-        </p:nvSpPr>
-        <p:spPr>
-          <a:xfrm>
-            <a:off x="812800" y="812800"/>
-            <a:ext cx="10883392" cy="528290"/>
-          </a:xfrm>
-          <a:prstGeom prst="rect">
-            <a:avLst/>
-          </a:prstGeom>
-          <a:noFill/>
-          <a:ln/>
-        </p:spPr>
-        <p:txBody>
-          <a:bodyPr wrap="square" lIns="0" tIns="0" rIns="0" bIns="0" rtlCol="0" anchor="t">
-            <a:normAutofit/>
-          </a:bodyPr>
-          <a:lstStyle/>
-          <a:p>
-            <a:pPr algn="l" indent="0" marL="0">
-              <a:lnSpc>
-                <a:spcPts val="3960"/>
-              </a:lnSpc>
-              <a:buNone/>
-            </a:pPr>
-            <a:r>
-              <a:rPr lang="en-US" sz="3600" b="1" dirty="0">
-                <a:solidFill>
-                  <a:srgbClr val="10212B"/>
-                </a:solidFill>
-                <a:latin typeface="IBM Plex Sans" pitchFamily="34" charset="0"/>
-                <a:ea typeface="IBM Plex Sans" pitchFamily="34" charset="-122"/>
-                <a:cs typeface="IBM Plex Sans" pitchFamily="34" charset="-120"/>
-              </a:rPr>
-              <a:t>Why we can't simply buy this</a:t>
-            </a:r>
-            <a:endParaRPr lang="en-US" sz="3600" dirty="0"/>
-          </a:p>
-        </p:txBody>
-      </p:sp>
-      <p:sp>
-        <p:nvSpPr>
-          <p:cNvPr id="3" name="Text 1"/>
-          <p:cNvSpPr/>
-          <p:nvPr/>
-        </p:nvSpPr>
-        <p:spPr>
-          <a:xfrm>
-            <a:off x="812800" y="1595090"/>
-            <a:ext cx="10595610" cy="700980"/>
-          </a:xfrm>
-          <a:prstGeom prst="rect">
-            <a:avLst/>
-          </a:prstGeom>
-          <a:noFill/>
-          <a:ln/>
-        </p:spPr>
-        <p:txBody>
-          <a:bodyPr wrap="square" lIns="0" tIns="0" rIns="0" bIns="0" rtlCol="0" anchor="t">
-            <a:normAutofit/>
-          </a:bodyPr>
-          <a:lstStyle/>
-          <a:p>
-            <a:pPr algn="l" indent="0" marL="0">
-              <a:lnSpc>
-                <a:spcPts val="2660"/>
-              </a:lnSpc>
-              <a:buNone/>
-            </a:pPr>
-            <a:r>
-              <a:rPr lang="en-US" sz="1900" dirty="0">
-                <a:solidFill>
-                  <a:srgbClr val="4A5568"/>
-                </a:solidFill>
-                <a:latin typeface="IBM Plex Sans" pitchFamily="34" charset="0"/>
-                <a:ea typeface="IBM Plex Sans" pitchFamily="34" charset="-122"/>
-                <a:cs typeface="IBM Plex Sans" pitchFamily="34" charset="-120"/>
-              </a:rPr>
-              <a:t>The tools on the market were built for the ecosystems most companies use. We build on conda packages and Python wheels together, and that combination is the part they handle badly.</a:t>
-            </a:r>
-            <a:endParaRPr lang="en-US" sz="1900" dirty="0"/>
-          </a:p>
-        </p:txBody>
-      </p:sp>
-      <p:sp>
-        <p:nvSpPr>
-          <p:cNvPr id="4" name="Shape 2"/>
-          <p:cNvSpPr/>
-          <p:nvPr/>
-        </p:nvSpPr>
-        <p:spPr>
-          <a:xfrm>
-            <a:off x="815975" y="2553246"/>
-            <a:ext cx="5181600" cy="1418530"/>
-          </a:xfrm>
-          <a:prstGeom prst="roundRect">
-            <a:avLst>
-              <a:gd name="adj" fmla="val 6939"/>
-            </a:avLst>
-          </a:prstGeom>
-          <a:solidFill>
-            <a:srgbClr val="FFFFFF"/>
-          </a:solidFill>
-          <a:ln w="6350">
-            <a:solidFill>
-              <a:srgbClr val="DFE3DE"/>
-            </a:solidFill>
-            <a:prstDash val="solid"/>
-          </a:ln>
-        </p:spPr>
-      </p:sp>
-      <p:sp>
-        <p:nvSpPr>
-          <p:cNvPr id="5" name="Text 3"/>
-          <p:cNvSpPr/>
-          <p:nvPr/>
-        </p:nvSpPr>
-        <p:spPr>
-          <a:xfrm>
-            <a:off x="1073150" y="2810421"/>
-            <a:ext cx="4807268" cy="284460"/>
-          </a:xfrm>
-          <a:prstGeom prst="rect">
-            <a:avLst/>
-          </a:prstGeom>
-          <a:noFill/>
-          <a:ln/>
-        </p:spPr>
-        <p:txBody>
-          <a:bodyPr wrap="square" lIns="0" tIns="0" rIns="0" bIns="0" rtlCol="0" anchor="t">
-            <a:normAutofit/>
-          </a:bodyPr>
-          <a:lstStyle/>
-          <a:p>
-            <a:pPr algn="l" indent="0" marL="0">
-              <a:lnSpc>
-                <a:spcPts val="2040"/>
-              </a:lnSpc>
-              <a:buNone/>
-            </a:pPr>
-            <a:r>
-              <a:rPr lang="en-US" sz="1700" b="1" dirty="0">
-                <a:solidFill>
-                  <a:srgbClr val="10212B"/>
-                </a:solidFill>
-                <a:latin typeface="IBM Plex Sans" pitchFamily="34" charset="0"/>
-                <a:ea typeface="IBM Plex Sans" pitchFamily="34" charset="-122"/>
-                <a:cs typeface="IBM Plex Sans" pitchFamily="34" charset="-120"/>
-              </a:rPr>
-              <a:t>A bought tool reports</a:t>
-            </a:r>
-            <a:endParaRPr lang="en-US" sz="1700" dirty="0"/>
-          </a:p>
-        </p:txBody>
-      </p:sp>
-      <p:sp>
-        <p:nvSpPr>
-          <p:cNvPr id="6" name="Text 4"/>
-          <p:cNvSpPr/>
-          <p:nvPr/>
-        </p:nvSpPr>
-        <p:spPr>
-          <a:xfrm>
-            <a:off x="1073150" y="3145681"/>
-            <a:ext cx="4807268" cy="594320"/>
-          </a:xfrm>
-          <a:prstGeom prst="rect">
-            <a:avLst/>
-          </a:prstGeom>
-          <a:noFill/>
-          <a:ln/>
-        </p:spPr>
-        <p:txBody>
-          <a:bodyPr wrap="square" lIns="0" tIns="0" rIns="0" bIns="0" rtlCol="0" anchor="t">
-            <a:normAutofit/>
-          </a:bodyPr>
-          <a:lstStyle/>
-          <a:p>
-            <a:pPr algn="l" indent="0" marL="0">
-              <a:lnSpc>
-                <a:spcPts val="2240"/>
-              </a:lnSpc>
-              <a:buNone/>
-            </a:pPr>
-            <a:r>
-              <a:rPr lang="en-US" sz="1600" dirty="0">
-                <a:solidFill>
-                  <a:srgbClr val="4A5568"/>
-                </a:solidFill>
-                <a:latin typeface="IBM Plex Sans" pitchFamily="34" charset="0"/>
-                <a:ea typeface="IBM Plex Sans" pitchFamily="34" charset="-122"/>
-                <a:cs typeface="IBM Plex Sans" pitchFamily="34" charset="-120"/>
-              </a:rPr>
-              <a:t>A clean inventory, missing a large share of what we actually install — with no error to tell us.</a:t>
-            </a:r>
-            <a:endParaRPr lang="en-US" sz="1600" dirty="0"/>
-          </a:p>
-        </p:txBody>
-      </p:sp>
-      <p:sp>
-        <p:nvSpPr>
-          <p:cNvPr id="7" name="Shape 5"/>
-          <p:cNvSpPr/>
-          <p:nvPr/>
-        </p:nvSpPr>
-        <p:spPr>
-          <a:xfrm>
-            <a:off x="6203950" y="2550071"/>
-            <a:ext cx="5175250" cy="1424880"/>
-          </a:xfrm>
-          <a:prstGeom prst="roundRect">
-            <a:avLst>
-              <a:gd name="adj" fmla="val 7130"/>
-            </a:avLst>
-          </a:prstGeom>
-          <a:solidFill>
-            <a:srgbClr val="10212B"/>
-          </a:solidFill>
-          <a:ln/>
-        </p:spPr>
-      </p:sp>
-      <p:sp>
-        <p:nvSpPr>
-          <p:cNvPr id="8" name="Text 6"/>
-          <p:cNvSpPr/>
-          <p:nvPr/>
-        </p:nvSpPr>
-        <p:spPr>
-          <a:xfrm>
-            <a:off x="6457950" y="2804071"/>
-            <a:ext cx="4807268" cy="284460"/>
-          </a:xfrm>
-          <a:prstGeom prst="rect">
-            <a:avLst/>
-          </a:prstGeom>
-          <a:noFill/>
-          <a:ln/>
-        </p:spPr>
-        <p:txBody>
-          <a:bodyPr wrap="square" lIns="0" tIns="0" rIns="0" bIns="0" rtlCol="0" anchor="t">
-            <a:normAutofit/>
-          </a:bodyPr>
-          <a:lstStyle/>
-          <a:p>
-            <a:pPr algn="l" indent="0" marL="0">
-              <a:lnSpc>
-                <a:spcPts val="2040"/>
-              </a:lnSpc>
-              <a:buNone/>
-            </a:pPr>
-            <a:r>
-              <a:rPr lang="en-US" sz="1700" b="1" dirty="0">
-                <a:solidFill>
-                  <a:srgbClr val="6FBFAE"/>
-                </a:solidFill>
-                <a:latin typeface="IBM Plex Sans" pitchFamily="34" charset="0"/>
-                <a:ea typeface="IBM Plex Sans" pitchFamily="34" charset="-122"/>
-                <a:cs typeface="IBM Plex Sans" pitchFamily="34" charset="-120"/>
-              </a:rPr>
-              <a:t>Which is the dangerous case</a:t>
-            </a:r>
-            <a:endParaRPr lang="en-US" sz="1700" dirty="0"/>
-          </a:p>
-        </p:txBody>
-      </p:sp>
-      <p:sp>
-        <p:nvSpPr>
-          <p:cNvPr id="9" name="Text 7"/>
-          <p:cNvSpPr/>
-          <p:nvPr/>
-        </p:nvSpPr>
-        <p:spPr>
-          <a:xfrm>
-            <a:off x="6457950" y="3139331"/>
-            <a:ext cx="4807268" cy="594320"/>
-          </a:xfrm>
-          <a:prstGeom prst="rect">
-            <a:avLst/>
-          </a:prstGeom>
-          <a:noFill/>
-          <a:ln/>
-        </p:spPr>
-        <p:txBody>
-          <a:bodyPr wrap="square" lIns="0" tIns="0" rIns="0" bIns="0" rtlCol="0" anchor="t">
-            <a:normAutofit/>
-          </a:bodyPr>
-          <a:lstStyle/>
-          <a:p>
-            <a:pPr algn="l" indent="0" marL="0">
-              <a:lnSpc>
-                <a:spcPts val="2240"/>
-              </a:lnSpc>
-              <a:buNone/>
-            </a:pPr>
-            <a:r>
-              <a:rPr lang="en-US" sz="1600" dirty="0">
-                <a:solidFill>
-                  <a:srgbClr val="B5C4CA"/>
-                </a:solidFill>
-                <a:latin typeface="IBM Plex Sans" pitchFamily="34" charset="0"/>
-                <a:ea typeface="IBM Plex Sans" pitchFamily="34" charset="-122"/>
-                <a:cs typeface="IBM Plex Sans" pitchFamily="34" charset="-120"/>
-              </a:rPr>
-              <a:t>An incomplete list we trust is worse than no list. We'd answer the customer, and be wrong.</a:t>
-            </a:r>
-            <a:endParaRPr lang="en-US" sz="1600" dirty="0"/>
-          </a:p>
-        </p:txBody>
-      </p:sp>
-      <p:sp>
-        <p:nvSpPr>
-          <p:cNvPr id="10" name="Text 8"/>
-          <p:cNvSpPr/>
-          <p:nvPr/>
-        </p:nvSpPr>
-        <p:spPr>
-          <a:xfrm>
-            <a:off x="812800" y="4254351"/>
-            <a:ext cx="10595610" cy="309860"/>
-          </a:xfrm>
-          <a:prstGeom prst="rect">
-            <a:avLst/>
-          </a:prstGeom>
-          <a:noFill/>
-          <a:ln/>
-        </p:spPr>
-        <p:txBody>
-          <a:bodyPr wrap="square" lIns="0" tIns="0" rIns="0" bIns="0" rtlCol="0" anchor="t">
-            <a:normAutofit/>
-          </a:bodyPr>
-          <a:lstStyle/>
-          <a:p>
-            <a:pPr algn="l" indent="0" marL="0">
-              <a:lnSpc>
-                <a:spcPts val="2240"/>
-              </a:lnSpc>
-              <a:buNone/>
-            </a:pPr>
-            <a:r>
-              <a:rPr lang="en-US" sz="1600" dirty="0">
-                <a:solidFill>
-                  <a:srgbClr val="10212B"/>
-                </a:solidFill>
-                <a:latin typeface="IBM Plex Sans" pitchFamily="34" charset="0"/>
-                <a:ea typeface="IBM Plex Sans" pitchFamily="34" charset="-122"/>
-                <a:cs typeface="IBM Plex Sans" pitchFamily="34" charset="-120"/>
-              </a:rPr>
-              <a:t>The tool we'd use instead is already built, already runs against our lockfiles, and costs nothing.</a:t>
-            </a:r>
-            <a:endParaRPr lang="en-US" sz="1600" dirty="0"/>
           </a:p>
         </p:txBody>
       </p:sp>
@@ -3505,7 +4911,9 @@
         <p:nvSpPr>
           <p:cNvPr id="2" name="Text 0"/>
           <p:cNvSpPr/>
-          <p:nvPr/>
+          <p:nvPr>
+            <p:ph type="title"/>
+          </p:nvPr>
         </p:nvSpPr>
         <p:spPr>
           <a:xfrm>
@@ -3531,15 +4939,15 @@
               <a:buNone/>
             </a:pPr>
             <a:r>
-              <a:rPr lang="en-US" sz="3600" b="1" dirty="0">
+              <a:rPr lang="en-US" sz="3600" b="1" i="0" dirty="0">
                 <a:solidFill>
                   <a:srgbClr val="10212B"/>
                 </a:solidFill>
-                <a:latin typeface="IBM Plex Sans" pitchFamily="34" charset="0"/>
-                <a:ea typeface="IBM Plex Sans" pitchFamily="34" charset="-122"/>
-                <a:cs typeface="IBM Plex Sans" pitchFamily="34" charset="-120"/>
+                <a:latin typeface="Verdana" pitchFamily="34" charset="0"/>
+                <a:ea typeface="Verdana" pitchFamily="34" charset="-122"/>
+                <a:cs typeface="Verdana" pitchFamily="34" charset="-120"/>
               </a:rPr>
-              <a:t>What changes</a:t>
+              <a:t>Why we can't simply buy this</a:t>
             </a:r>
             <a:endParaRPr lang="en-US" sz="3600" dirty="0"/>
           </a:p>
@@ -3547,24 +4955,70 @@
       </p:sp>
       <p:sp>
         <p:nvSpPr>
-          <p:cNvPr id="3" name="Shape 1"/>
+          <p:cNvPr id="3" name="Text 1"/>
           <p:cNvSpPr/>
           <p:nvPr/>
         </p:nvSpPr>
         <p:spPr>
           <a:xfrm>
-            <a:off x="812800" y="1601440"/>
-            <a:ext cx="10566400" cy="0"/>
-          </a:xfrm>
-          <a:prstGeom prst="line">
+            <a:off x="812800" y="1595090"/>
+            <a:ext cx="10595610" cy="1038771"/>
+          </a:xfrm>
+          <a:prstGeom prst="rect">
             <a:avLst/>
           </a:prstGeom>
           <a:noFill/>
-          <a:ln w="12700">
+          <a:ln/>
+        </p:spPr>
+        <p:txBody>
+          <a:bodyPr wrap="square" lIns="0" tIns="0" rIns="0" bIns="0" rtlCol="0" anchor="t">
+            <a:normAutofit/>
+          </a:bodyPr>
+          <a:lstStyle/>
+          <a:p>
+            <a:pPr algn="l" indent="0" marL="0">
+              <a:lnSpc>
+                <a:spcPts val="2660"/>
+              </a:lnSpc>
+              <a:buNone/>
+            </a:pPr>
+            <a:r>
+              <a:rPr lang="en-US" sz="1900" dirty="0">
+                <a:solidFill>
+                  <a:srgbClr val="4A5568"/>
+                </a:solidFill>
+                <a:latin typeface="Verdana" pitchFamily="34" charset="0"/>
+                <a:ea typeface="Verdana" pitchFamily="34" charset="-122"/>
+                <a:cs typeface="Verdana" pitchFamily="34" charset="-120"/>
+              </a:rPr>
+              <a:t>The tools on the market were built for the ecosystems most companies use. We build on conda packages and Python wheels together, and that combination is the part they handle badly.</a:t>
+            </a:r>
+            <a:endParaRPr lang="en-US" sz="1900" dirty="0"/>
+          </a:p>
+        </p:txBody>
+      </p:sp>
+      <p:sp>
+        <p:nvSpPr>
+          <p:cNvPr id="4" name="Shape 2"/>
+          <p:cNvSpPr/>
+          <p:nvPr/>
+        </p:nvSpPr>
+        <p:spPr>
+          <a:xfrm>
+            <a:off x="815975" y="2891036"/>
+            <a:ext cx="5181600" cy="1702991"/>
+          </a:xfrm>
+          <a:prstGeom prst="roundRect">
+            <a:avLst>
+              <a:gd name="adj" fmla="val 5780"/>
+            </a:avLst>
+          </a:prstGeom>
+          <a:solidFill>
+            <a:srgbClr val="FFFFFF"/>
+          </a:solidFill>
+          <a:ln w="6350">
             <a:solidFill>
-              <a:srgbClr val="141413">
-                <a:alpha val="22000"/>
-              </a:srgbClr>
+              <a:srgbClr val="DFE3DE"/>
             </a:solidFill>
             <a:prstDash val="solid"/>
           </a:ln>
@@ -3572,1079 +5026,58 @@
       </p:sp>
       <p:sp>
         <p:nvSpPr>
-          <p:cNvPr id="4" name="Shape 2"/>
+          <p:cNvPr id="5" name="Text 3"/>
           <p:cNvSpPr/>
           <p:nvPr/>
         </p:nvSpPr>
         <p:spPr>
           <a:xfrm>
-            <a:off x="819150" y="1595090"/>
-            <a:ext cx="0" cy="2463403"/>
-          </a:xfrm>
-          <a:prstGeom prst="line">
+            <a:off x="1073150" y="3148211"/>
+            <a:ext cx="4807268" cy="284460"/>
+          </a:xfrm>
+          <a:prstGeom prst="rect">
             <a:avLst/>
           </a:prstGeom>
           <a:noFill/>
-          <a:ln w="12700">
-            <a:solidFill>
-              <a:srgbClr val="141413">
-                <a:alpha val="22000"/>
-              </a:srgbClr>
-            </a:solidFill>
-            <a:prstDash val="solid"/>
-          </a:ln>
-        </p:spPr>
-      </p:sp>
-      <p:graphicFrame>
-        <p:nvGraphicFramePr>
-          <p:cNvPr id="5" name="Table 0"/>
-          <p:cNvGraphicFramePr>
-            <a:graphicFrameLocks noGrp="1"/>
-          </p:cNvGraphicFramePr>
-          <p:nvPr>
-            <p:extLst>
-              <p:ext uri="{D42A27DB-BD31-4B8C-83A1-F6EECF244321}">
-                <p14:modId xmlns:p14="http://schemas.microsoft.com/office/powerpoint/2010/main" val="1579011935"/>
-              </p:ext>
-            </p:extLst>
-          </p:nvPr>
-        </p:nvGraphicFramePr>
-        <p:xfrm>
-          <a:off x="977900" y="1734790"/>
-          <a:ext cx="10248900" cy="2196703"/>
-        </p:xfrm>
-        <a:graphic>
-          <a:graphicData uri="http://schemas.openxmlformats.org/drawingml/2006/table">
-            <a:tbl>
-              <a:tblPr/>
-              <a:tblGrid>
-                <a:gridCol w="3894582"/>
-                <a:gridCol w="3177159"/>
-                <a:gridCol w="3177159"/>
-              </a:tblGrid>
-              <a:tr h="439341">
-                <a:tc>
-                  <a:txBody>
-                    <a:bodyPr/>
-                    <a:lstStyle/>
-                    <a:p>
-                      <a:pPr indent="0" marL="0">
-                        <a:lnSpc>
-                          <a:spcPts val="2240"/>
-                        </a:lnSpc>
-                        <a:buNone/>
-                      </a:pPr>
-                      <a:r>
-                        <a:rPr lang="en-US" sz="1600" b="1" dirty="0">
-                          <a:solidFill>
-                            <a:srgbClr val="F7F8F6"/>
-                          </a:solidFill>
-                          <a:latin typeface="IBM Plex Sans" pitchFamily="34" charset="0"/>
-                          <a:ea typeface="IBM Plex Sans" pitchFamily="34" charset="-122"/>
-                          <a:cs typeface="IBM Plex Sans" pitchFamily="34" charset="-120"/>
-                        </a:rPr>
-                        <a:t>The question</a:t>
-                      </a:r>
-                      <a:endParaRPr lang="en-US" sz="1600" dirty="0">
-                        <a:latin typeface="IBM Plex Sans" charset="0"/>
-                        <a:ea typeface="IBM Plex Sans" charset="0"/>
-                        <a:cs typeface="IBM Plex Sans" charset="0"/>
-                      </a:endParaRPr>
-                    </a:p>
-                  </a:txBody>
-                  <a:tcPr marL="71120" marR="71120" marT="71120" marB="71120" anchor="t">
-                    <a:lnL w="0" cap="flat" cmpd="sng" algn="ctr">
-                      <a:noFill/>
-                    </a:lnL>
-                    <a:lnR w="12700" cap="flat" cmpd="sng" algn="ctr">
-                      <a:solidFill>
-                        <a:srgbClr val="111E26"/>
-                      </a:solidFill>
-                      <a:prstDash val="solid"/>
-                      <a:round/>
-                      <a:headEnd type="none" w="med" len="med"/>
-                      <a:tailEnd type="none" w="med" len="med"/>
-                    </a:lnR>
-                    <a:lnT w="0" cap="flat" cmpd="sng" algn="ctr">
-                      <a:noFill/>
-                    </a:lnT>
-                    <a:lnB w="12700" cap="flat" cmpd="sng" algn="ctr">
-                      <a:solidFill>
-                        <a:srgbClr val="111E26"/>
-                      </a:solidFill>
-                      <a:prstDash val="solid"/>
-                      <a:round/>
-                      <a:headEnd type="none" w="med" len="med"/>
-                      <a:tailEnd type="none" w="med" len="med"/>
-                    </a:lnB>
-                    <a:solidFill>
-                      <a:srgbClr val="10212B"/>
-                    </a:solidFill>
-                  </a:tcPr>
-                </a:tc>
-                <a:tc>
-                  <a:txBody>
-                    <a:bodyPr/>
-                    <a:lstStyle/>
-                    <a:p>
-                      <a:pPr indent="0" marL="0">
-                        <a:lnSpc>
-                          <a:spcPts val="2240"/>
-                        </a:lnSpc>
-                        <a:buNone/>
-                      </a:pPr>
-                      <a:r>
-                        <a:rPr lang="en-US" sz="1600" b="1" dirty="0">
-                          <a:solidFill>
-                            <a:srgbClr val="F7F8F6"/>
-                          </a:solidFill>
-                          <a:latin typeface="IBM Plex Sans" pitchFamily="34" charset="0"/>
-                          <a:ea typeface="IBM Plex Sans" pitchFamily="34" charset="-122"/>
-                          <a:cs typeface="IBM Plex Sans" pitchFamily="34" charset="-120"/>
-                        </a:rPr>
-                        <a:t>Today</a:t>
-                      </a:r>
-                      <a:endParaRPr lang="en-US" sz="1600" dirty="0">
-                        <a:latin typeface="IBM Plex Sans" charset="0"/>
-                        <a:ea typeface="IBM Plex Sans" charset="0"/>
-                        <a:cs typeface="IBM Plex Sans" charset="0"/>
-                      </a:endParaRPr>
-                    </a:p>
-                  </a:txBody>
-                  <a:tcPr marL="71120" marR="71120" marT="71120" marB="71120" anchor="t">
-                    <a:lnL w="12700" cap="flat" cmpd="sng" algn="ctr">
-                      <a:solidFill>
-                        <a:srgbClr val="111E26"/>
-                      </a:solidFill>
-                      <a:prstDash val="solid"/>
-                      <a:round/>
-                      <a:headEnd type="none" w="med" len="med"/>
-                      <a:tailEnd type="none" w="med" len="med"/>
-                    </a:lnL>
-                    <a:lnR w="12700" cap="flat" cmpd="sng" algn="ctr">
-                      <a:solidFill>
-                        <a:srgbClr val="111E26"/>
-                      </a:solidFill>
-                      <a:prstDash val="solid"/>
-                      <a:round/>
-                      <a:headEnd type="none" w="med" len="med"/>
-                      <a:tailEnd type="none" w="med" len="med"/>
-                    </a:lnR>
-                    <a:lnT w="0" cap="flat" cmpd="sng" algn="ctr">
-                      <a:noFill/>
-                    </a:lnT>
-                    <a:lnB w="12700" cap="flat" cmpd="sng" algn="ctr">
-                      <a:solidFill>
-                        <a:srgbClr val="111E26"/>
-                      </a:solidFill>
-                      <a:prstDash val="solid"/>
-                      <a:round/>
-                      <a:headEnd type="none" w="med" len="med"/>
-                      <a:tailEnd type="none" w="med" len="med"/>
-                    </a:lnB>
-                    <a:solidFill>
-                      <a:srgbClr val="10212B"/>
-                    </a:solidFill>
-                  </a:tcPr>
-                </a:tc>
-                <a:tc>
-                  <a:txBody>
-                    <a:bodyPr/>
-                    <a:lstStyle/>
-                    <a:p>
-                      <a:pPr indent="0" marL="0">
-                        <a:lnSpc>
-                          <a:spcPts val="2240"/>
-                        </a:lnSpc>
-                        <a:buNone/>
-                      </a:pPr>
-                      <a:r>
-                        <a:rPr lang="en-US" sz="1600" b="1" dirty="0">
-                          <a:solidFill>
-                            <a:srgbClr val="F7F8F6"/>
-                          </a:solidFill>
-                          <a:latin typeface="IBM Plex Sans" pitchFamily="34" charset="0"/>
-                          <a:ea typeface="IBM Plex Sans" pitchFamily="34" charset="-122"/>
-                          <a:cs typeface="IBM Plex Sans" pitchFamily="34" charset="-120"/>
-                        </a:rPr>
-                        <a:t>After</a:t>
-                      </a:r>
-                      <a:endParaRPr lang="en-US" sz="1600" dirty="0">
-                        <a:latin typeface="IBM Plex Sans" charset="0"/>
-                        <a:ea typeface="IBM Plex Sans" charset="0"/>
-                        <a:cs typeface="IBM Plex Sans" charset="0"/>
-                      </a:endParaRPr>
-                    </a:p>
-                  </a:txBody>
-                  <a:tcPr marL="71120" marR="71120" marT="71120" marB="71120" anchor="t">
-                    <a:lnL w="12700" cap="flat" cmpd="sng" algn="ctr">
-                      <a:solidFill>
-                        <a:srgbClr val="111E26"/>
-                      </a:solidFill>
-                      <a:prstDash val="solid"/>
-                      <a:round/>
-                      <a:headEnd type="none" w="med" len="med"/>
-                      <a:tailEnd type="none" w="med" len="med"/>
-                    </a:lnL>
-                    <a:lnR w="12700" cap="flat" cmpd="sng" algn="ctr">
-                      <a:solidFill>
-                        <a:srgbClr val="111E26"/>
-                      </a:solidFill>
-                      <a:prstDash val="solid"/>
-                      <a:round/>
-                      <a:headEnd type="none" w="med" len="med"/>
-                      <a:tailEnd type="none" w="med" len="med"/>
-                    </a:lnR>
-                    <a:lnT w="0" cap="flat" cmpd="sng" algn="ctr">
-                      <a:noFill/>
-                    </a:lnT>
-                    <a:lnB w="12700" cap="flat" cmpd="sng" algn="ctr">
-                      <a:solidFill>
-                        <a:srgbClr val="111E26"/>
-                      </a:solidFill>
-                      <a:prstDash val="solid"/>
-                      <a:round/>
-                      <a:headEnd type="none" w="med" len="med"/>
-                      <a:tailEnd type="none" w="med" len="med"/>
-                    </a:lnB>
-                    <a:solidFill>
-                      <a:srgbClr val="10212B"/>
-                    </a:solidFill>
-                  </a:tcPr>
-                </a:tc>
-              </a:tr>
-              <a:tr h="439341">
-                <a:tc>
-                  <a:txBody>
-                    <a:bodyPr/>
-                    <a:lstStyle/>
-                    <a:p>
-                      <a:pPr indent="0" marL="0">
-                        <a:lnSpc>
-                          <a:spcPts val="2240"/>
-                        </a:lnSpc>
-                        <a:buNone/>
-                      </a:pPr>
-                      <a:r>
-                        <a:rPr lang="en-US" sz="1600" dirty="0">
-                          <a:solidFill>
-                            <a:srgbClr val="10212B"/>
-                          </a:solidFill>
-                          <a:latin typeface="IBM Plex Sans" pitchFamily="34" charset="0"/>
-                          <a:ea typeface="IBM Plex Sans" pitchFamily="34" charset="-122"/>
-                          <a:cs typeface="IBM Plex Sans" pitchFamily="34" charset="-120"/>
-                        </a:rPr>
-                        <a:t>What's in release 4.2?</a:t>
-                      </a:r>
-                      <a:endParaRPr lang="en-US" sz="1600" dirty="0">
-                        <a:latin typeface="IBM Plex Sans" charset="0"/>
-                        <a:ea typeface="IBM Plex Sans" charset="0"/>
-                        <a:cs typeface="IBM Plex Sans" charset="0"/>
-                      </a:endParaRPr>
-                    </a:p>
-                  </a:txBody>
-                  <a:tcPr marL="71120" marR="71120" marT="71120" marB="71120" anchor="t">
-                    <a:lnL w="0" cap="flat" cmpd="sng" algn="ctr">
-                      <a:noFill/>
-                    </a:lnL>
-                    <a:lnR w="12700" cap="flat" cmpd="sng" algn="ctr">
-                      <a:solidFill>
-                        <a:srgbClr val="C5C6C4"/>
-                      </a:solidFill>
-                      <a:prstDash val="solid"/>
-                      <a:round/>
-                      <a:headEnd type="none" w="med" len="med"/>
-                      <a:tailEnd type="none" w="med" len="med"/>
-                    </a:lnR>
-                    <a:lnT w="12700" cap="flat" cmpd="sng" algn="ctr">
-                      <a:solidFill>
-                        <a:srgbClr val="111E26"/>
-                      </a:solidFill>
-                      <a:prstDash val="solid"/>
-                      <a:round/>
-                      <a:headEnd type="none" w="med" len="med"/>
-                      <a:tailEnd type="none" w="med" len="med"/>
-                    </a:lnT>
-                    <a:lnB w="12700" cap="flat" cmpd="sng" algn="ctr">
-                      <a:solidFill>
-                        <a:srgbClr val="C5C6C4"/>
-                      </a:solidFill>
-                      <a:prstDash val="solid"/>
-                      <a:round/>
-                      <a:headEnd type="none" w="med" len="med"/>
-                      <a:tailEnd type="none" w="med" len="med"/>
-                    </a:lnB>
-                  </a:tcPr>
-                </a:tc>
-                <a:tc>
-                  <a:txBody>
-                    <a:bodyPr/>
-                    <a:lstStyle/>
-                    <a:p>
-                      <a:pPr indent="0" marL="0">
-                        <a:lnSpc>
-                          <a:spcPts val="2240"/>
-                        </a:lnSpc>
-                        <a:buNone/>
-                      </a:pPr>
-                      <a:r>
-                        <a:rPr lang="en-US" sz="1600" dirty="0">
-                          <a:solidFill>
-                            <a:srgbClr val="10212B"/>
-                          </a:solidFill>
-                          <a:latin typeface="IBM Plex Sans" pitchFamily="34" charset="0"/>
-                          <a:ea typeface="IBM Plex Sans" pitchFamily="34" charset="-122"/>
-                          <a:cs typeface="IBM Plex Sans" pitchFamily="34" charset="-120"/>
-                        </a:rPr>
-                        <a:t>Days of archaeology</a:t>
-                      </a:r>
-                      <a:endParaRPr lang="en-US" sz="1600" dirty="0">
-                        <a:latin typeface="IBM Plex Sans" charset="0"/>
-                        <a:ea typeface="IBM Plex Sans" charset="0"/>
-                        <a:cs typeface="IBM Plex Sans" charset="0"/>
-                      </a:endParaRPr>
-                    </a:p>
-                  </a:txBody>
-                  <a:tcPr marL="71120" marR="71120" marT="71120" marB="71120" anchor="t">
-                    <a:lnL w="12700" cap="flat" cmpd="sng" algn="ctr">
-                      <a:solidFill>
-                        <a:srgbClr val="C5C6C4"/>
-                      </a:solidFill>
-                      <a:prstDash val="solid"/>
-                      <a:round/>
-                      <a:headEnd type="none" w="med" len="med"/>
-                      <a:tailEnd type="none" w="med" len="med"/>
-                    </a:lnL>
-                    <a:lnR w="12700" cap="flat" cmpd="sng" algn="ctr">
-                      <a:solidFill>
-                        <a:srgbClr val="C5C6C4"/>
-                      </a:solidFill>
-                      <a:prstDash val="solid"/>
-                      <a:round/>
-                      <a:headEnd type="none" w="med" len="med"/>
-                      <a:tailEnd type="none" w="med" len="med"/>
-                    </a:lnR>
-                    <a:lnT w="12700" cap="flat" cmpd="sng" algn="ctr">
-                      <a:solidFill>
-                        <a:srgbClr val="111E26"/>
-                      </a:solidFill>
-                      <a:prstDash val="solid"/>
-                      <a:round/>
-                      <a:headEnd type="none" w="med" len="med"/>
-                      <a:tailEnd type="none" w="med" len="med"/>
-                    </a:lnT>
-                    <a:lnB w="12700" cap="flat" cmpd="sng" algn="ctr">
-                      <a:solidFill>
-                        <a:srgbClr val="C5C6C4"/>
-                      </a:solidFill>
-                      <a:prstDash val="solid"/>
-                      <a:round/>
-                      <a:headEnd type="none" w="med" len="med"/>
-                      <a:tailEnd type="none" w="med" len="med"/>
-                    </a:lnB>
-                  </a:tcPr>
-                </a:tc>
-                <a:tc>
-                  <a:txBody>
-                    <a:bodyPr/>
-                    <a:lstStyle/>
-                    <a:p>
-                      <a:pPr indent="0" marL="0">
-                        <a:lnSpc>
-                          <a:spcPts val="2240"/>
-                        </a:lnSpc>
-                        <a:buNone/>
-                      </a:pPr>
-                      <a:r>
-                        <a:rPr lang="en-US" sz="1600" dirty="0">
-                          <a:solidFill>
-                            <a:srgbClr val="10212B"/>
-                          </a:solidFill>
-                          <a:latin typeface="IBM Plex Sans" pitchFamily="34" charset="0"/>
-                          <a:ea typeface="IBM Plex Sans" pitchFamily="34" charset="-122"/>
-                          <a:cs typeface="IBM Plex Sans" pitchFamily="34" charset="-120"/>
-                        </a:rPr>
-                        <a:t>A file, written at build time</a:t>
-                      </a:r>
-                      <a:endParaRPr lang="en-US" sz="1600" dirty="0">
-                        <a:latin typeface="IBM Plex Sans" charset="0"/>
-                        <a:ea typeface="IBM Plex Sans" charset="0"/>
-                        <a:cs typeface="IBM Plex Sans" charset="0"/>
-                      </a:endParaRPr>
-                    </a:p>
-                  </a:txBody>
-                  <a:tcPr marL="71120" marR="71120" marT="71120" marB="71120" anchor="t">
-                    <a:lnL w="12700" cap="flat" cmpd="sng" algn="ctr">
-                      <a:solidFill>
-                        <a:srgbClr val="C5C6C4"/>
-                      </a:solidFill>
-                      <a:prstDash val="solid"/>
-                      <a:round/>
-                      <a:headEnd type="none" w="med" len="med"/>
-                      <a:tailEnd type="none" w="med" len="med"/>
-                    </a:lnL>
-                    <a:lnR w="12700" cap="flat" cmpd="sng" algn="ctr">
-                      <a:solidFill>
-                        <a:srgbClr val="C5C6C4"/>
-                      </a:solidFill>
-                      <a:prstDash val="solid"/>
-                      <a:round/>
-                      <a:headEnd type="none" w="med" len="med"/>
-                      <a:tailEnd type="none" w="med" len="med"/>
-                    </a:lnR>
-                    <a:lnT w="12700" cap="flat" cmpd="sng" algn="ctr">
-                      <a:solidFill>
-                        <a:srgbClr val="111E26"/>
-                      </a:solidFill>
-                      <a:prstDash val="solid"/>
-                      <a:round/>
-                      <a:headEnd type="none" w="med" len="med"/>
-                      <a:tailEnd type="none" w="med" len="med"/>
-                    </a:lnT>
-                    <a:lnB w="12700" cap="flat" cmpd="sng" algn="ctr">
-                      <a:solidFill>
-                        <a:srgbClr val="C5C6C4"/>
-                      </a:solidFill>
-                      <a:prstDash val="solid"/>
-                      <a:round/>
-                      <a:headEnd type="none" w="med" len="med"/>
-                      <a:tailEnd type="none" w="med" len="med"/>
-                    </a:lnB>
-                  </a:tcPr>
-                </a:tc>
-              </a:tr>
-              <a:tr h="439341">
-                <a:tc>
-                  <a:txBody>
-                    <a:bodyPr/>
-                    <a:lstStyle/>
-                    <a:p>
-                      <a:pPr indent="0" marL="0">
-                        <a:lnSpc>
-                          <a:spcPts val="2240"/>
-                        </a:lnSpc>
-                        <a:buNone/>
-                      </a:pPr>
-                      <a:r>
-                        <a:rPr lang="en-US" sz="1600" dirty="0">
-                          <a:solidFill>
-                            <a:srgbClr val="10212B"/>
-                          </a:solidFill>
-                          <a:latin typeface="IBM Plex Sans" pitchFamily="34" charset="0"/>
-                          <a:ea typeface="IBM Plex Sans" pitchFamily="34" charset="-122"/>
-                          <a:cs typeface="IBM Plex Sans" pitchFamily="34" charset="-120"/>
-                        </a:rPr>
-                        <a:t>Are we exposed to this vulnerability?</a:t>
-                      </a:r>
-                      <a:endParaRPr lang="en-US" sz="1600" dirty="0">
-                        <a:latin typeface="IBM Plex Sans" charset="0"/>
-                        <a:ea typeface="IBM Plex Sans" charset="0"/>
-                        <a:cs typeface="IBM Plex Sans" charset="0"/>
-                      </a:endParaRPr>
-                    </a:p>
-                  </a:txBody>
-                  <a:tcPr marL="71120" marR="71120" marT="71120" marB="71120" anchor="t">
-                    <a:lnL w="0" cap="flat" cmpd="sng" algn="ctr">
-                      <a:noFill/>
-                    </a:lnL>
-                    <a:lnR w="12700" cap="flat" cmpd="sng" algn="ctr">
-                      <a:solidFill>
-                        <a:srgbClr val="BFC1BE"/>
-                      </a:solidFill>
-                      <a:prstDash val="solid"/>
-                      <a:round/>
-                      <a:headEnd type="none" w="med" len="med"/>
-                      <a:tailEnd type="none" w="med" len="med"/>
-                    </a:lnR>
-                    <a:lnT w="12700" cap="flat" cmpd="sng" algn="ctr">
-                      <a:solidFill>
-                        <a:srgbClr val="C5C6C4"/>
-                      </a:solidFill>
-                      <a:prstDash val="solid"/>
-                      <a:round/>
-                      <a:headEnd type="none" w="med" len="med"/>
-                      <a:tailEnd type="none" w="med" len="med"/>
-                    </a:lnT>
-                    <a:lnB w="12700" cap="flat" cmpd="sng" algn="ctr">
-                      <a:solidFill>
-                        <a:srgbClr val="BFC1BE"/>
-                      </a:solidFill>
-                      <a:prstDash val="solid"/>
-                      <a:round/>
-                      <a:headEnd type="none" w="med" len="med"/>
-                      <a:tailEnd type="none" w="med" len="med"/>
-                    </a:lnB>
-                    <a:solidFill>
-                      <a:srgbClr val="EFF2EE"/>
-                    </a:solidFill>
-                  </a:tcPr>
-                </a:tc>
-                <a:tc>
-                  <a:txBody>
-                    <a:bodyPr/>
-                    <a:lstStyle/>
-                    <a:p>
-                      <a:pPr indent="0" marL="0">
-                        <a:lnSpc>
-                          <a:spcPts val="2240"/>
-                        </a:lnSpc>
-                        <a:buNone/>
-                      </a:pPr>
-                      <a:r>
-                        <a:rPr lang="en-US" sz="1600" dirty="0">
-                          <a:solidFill>
-                            <a:srgbClr val="10212B"/>
-                          </a:solidFill>
-                          <a:latin typeface="IBM Plex Sans" pitchFamily="34" charset="0"/>
-                          <a:ea typeface="IBM Plex Sans" pitchFamily="34" charset="-122"/>
-                          <a:cs typeface="IBM Plex Sans" pitchFamily="34" charset="-120"/>
-                        </a:rPr>
-                        <a:t>Ask every team, wait</a:t>
-                      </a:r>
-                      <a:endParaRPr lang="en-US" sz="1600" dirty="0">
-                        <a:latin typeface="IBM Plex Sans" charset="0"/>
-                        <a:ea typeface="IBM Plex Sans" charset="0"/>
-                        <a:cs typeface="IBM Plex Sans" charset="0"/>
-                      </a:endParaRPr>
-                    </a:p>
-                  </a:txBody>
-                  <a:tcPr marL="71120" marR="71120" marT="71120" marB="71120" anchor="t">
-                    <a:lnL w="12700" cap="flat" cmpd="sng" algn="ctr">
-                      <a:solidFill>
-                        <a:srgbClr val="BFC1BE"/>
-                      </a:solidFill>
-                      <a:prstDash val="solid"/>
-                      <a:round/>
-                      <a:headEnd type="none" w="med" len="med"/>
-                      <a:tailEnd type="none" w="med" len="med"/>
-                    </a:lnL>
-                    <a:lnR w="12700" cap="flat" cmpd="sng" algn="ctr">
-                      <a:solidFill>
-                        <a:srgbClr val="BFC1BE"/>
-                      </a:solidFill>
-                      <a:prstDash val="solid"/>
-                      <a:round/>
-                      <a:headEnd type="none" w="med" len="med"/>
-                      <a:tailEnd type="none" w="med" len="med"/>
-                    </a:lnR>
-                    <a:lnT w="12700" cap="flat" cmpd="sng" algn="ctr">
-                      <a:solidFill>
-                        <a:srgbClr val="C5C6C4"/>
-                      </a:solidFill>
-                      <a:prstDash val="solid"/>
-                      <a:round/>
-                      <a:headEnd type="none" w="med" len="med"/>
-                      <a:tailEnd type="none" w="med" len="med"/>
-                    </a:lnT>
-                    <a:lnB w="12700" cap="flat" cmpd="sng" algn="ctr">
-                      <a:solidFill>
-                        <a:srgbClr val="BFC1BE"/>
-                      </a:solidFill>
-                      <a:prstDash val="solid"/>
-                      <a:round/>
-                      <a:headEnd type="none" w="med" len="med"/>
-                      <a:tailEnd type="none" w="med" len="med"/>
-                    </a:lnB>
-                    <a:solidFill>
-                      <a:srgbClr val="EFF2EE"/>
-                    </a:solidFill>
-                  </a:tcPr>
-                </a:tc>
-                <a:tc>
-                  <a:txBody>
-                    <a:bodyPr/>
-                    <a:lstStyle/>
-                    <a:p>
-                      <a:pPr indent="0" marL="0">
-                        <a:lnSpc>
-                          <a:spcPts val="2240"/>
-                        </a:lnSpc>
-                        <a:buNone/>
-                      </a:pPr>
-                      <a:r>
-                        <a:rPr lang="en-US" sz="1600" dirty="0">
-                          <a:solidFill>
-                            <a:srgbClr val="10212B"/>
-                          </a:solidFill>
-                          <a:latin typeface="IBM Plex Sans" pitchFamily="34" charset="0"/>
-                          <a:ea typeface="IBM Plex Sans" pitchFamily="34" charset="-122"/>
-                          <a:cs typeface="IBM Plex Sans" pitchFamily="34" charset="-120"/>
-                        </a:rPr>
-                        <a:t>Search one document</a:t>
-                      </a:r>
-                      <a:endParaRPr lang="en-US" sz="1600" dirty="0">
-                        <a:latin typeface="IBM Plex Sans" charset="0"/>
-                        <a:ea typeface="IBM Plex Sans" charset="0"/>
-                        <a:cs typeface="IBM Plex Sans" charset="0"/>
-                      </a:endParaRPr>
-                    </a:p>
-                  </a:txBody>
-                  <a:tcPr marL="71120" marR="71120" marT="71120" marB="71120" anchor="t">
-                    <a:lnL w="12700" cap="flat" cmpd="sng" algn="ctr">
-                      <a:solidFill>
-                        <a:srgbClr val="BFC1BE"/>
-                      </a:solidFill>
-                      <a:prstDash val="solid"/>
-                      <a:round/>
-                      <a:headEnd type="none" w="med" len="med"/>
-                      <a:tailEnd type="none" w="med" len="med"/>
-                    </a:lnL>
-                    <a:lnR w="12700" cap="flat" cmpd="sng" algn="ctr">
-                      <a:solidFill>
-                        <a:srgbClr val="BFC1BE"/>
-                      </a:solidFill>
-                      <a:prstDash val="solid"/>
-                      <a:round/>
-                      <a:headEnd type="none" w="med" len="med"/>
-                      <a:tailEnd type="none" w="med" len="med"/>
-                    </a:lnR>
-                    <a:lnT w="12700" cap="flat" cmpd="sng" algn="ctr">
-                      <a:solidFill>
-                        <a:srgbClr val="C5C6C4"/>
-                      </a:solidFill>
-                      <a:prstDash val="solid"/>
-                      <a:round/>
-                      <a:headEnd type="none" w="med" len="med"/>
-                      <a:tailEnd type="none" w="med" len="med"/>
-                    </a:lnT>
-                    <a:lnB w="12700" cap="flat" cmpd="sng" algn="ctr">
-                      <a:solidFill>
-                        <a:srgbClr val="BFC1BE"/>
-                      </a:solidFill>
-                      <a:prstDash val="solid"/>
-                      <a:round/>
-                      <a:headEnd type="none" w="med" len="med"/>
-                      <a:tailEnd type="none" w="med" len="med"/>
-                    </a:lnB>
-                    <a:solidFill>
-                      <a:srgbClr val="EFF2EE"/>
-                    </a:solidFill>
-                  </a:tcPr>
-                </a:tc>
-              </a:tr>
-              <a:tr h="439341">
-                <a:tc>
-                  <a:txBody>
-                    <a:bodyPr/>
-                    <a:lstStyle/>
-                    <a:p>
-                      <a:pPr indent="0" marL="0">
-                        <a:lnSpc>
-                          <a:spcPts val="2240"/>
-                        </a:lnSpc>
-                        <a:buNone/>
-                      </a:pPr>
-                      <a:r>
-                        <a:rPr lang="en-US" sz="1600" dirty="0">
-                          <a:solidFill>
-                            <a:srgbClr val="10212B"/>
-                          </a:solidFill>
-                          <a:latin typeface="IBM Plex Sans" pitchFamily="34" charset="0"/>
-                          <a:ea typeface="IBM Plex Sans" pitchFamily="34" charset="-122"/>
-                          <a:cs typeface="IBM Plex Sans" pitchFamily="34" charset="-120"/>
-                        </a:rPr>
-                        <a:t>Can we pass this customer's review?</a:t>
-                      </a:r>
-                      <a:endParaRPr lang="en-US" sz="1600" dirty="0">
-                        <a:latin typeface="IBM Plex Sans" charset="0"/>
-                        <a:ea typeface="IBM Plex Sans" charset="0"/>
-                        <a:cs typeface="IBM Plex Sans" charset="0"/>
-                      </a:endParaRPr>
-                    </a:p>
-                  </a:txBody>
-                  <a:tcPr marL="71120" marR="71120" marT="71120" marB="71120" anchor="t">
-                    <a:lnL w="0" cap="flat" cmpd="sng" algn="ctr">
-                      <a:noFill/>
-                    </a:lnL>
-                    <a:lnR w="12700" cap="flat" cmpd="sng" algn="ctr">
-                      <a:solidFill>
-                        <a:srgbClr val="C5C6C4"/>
-                      </a:solidFill>
-                      <a:prstDash val="solid"/>
-                      <a:round/>
-                      <a:headEnd type="none" w="med" len="med"/>
-                      <a:tailEnd type="none" w="med" len="med"/>
-                    </a:lnR>
-                    <a:lnT w="12700" cap="flat" cmpd="sng" algn="ctr">
-                      <a:solidFill>
-                        <a:srgbClr val="BFC1BE"/>
-                      </a:solidFill>
-                      <a:prstDash val="solid"/>
-                      <a:round/>
-                      <a:headEnd type="none" w="med" len="med"/>
-                      <a:tailEnd type="none" w="med" len="med"/>
-                    </a:lnT>
-                    <a:lnB w="12700" cap="flat" cmpd="sng" algn="ctr">
-                      <a:solidFill>
-                        <a:srgbClr val="C5C6C4"/>
-                      </a:solidFill>
-                      <a:prstDash val="solid"/>
-                      <a:round/>
-                      <a:headEnd type="none" w="med" len="med"/>
-                      <a:tailEnd type="none" w="med" len="med"/>
-                    </a:lnB>
-                  </a:tcPr>
-                </a:tc>
-                <a:tc>
-                  <a:txBody>
-                    <a:bodyPr/>
-                    <a:lstStyle/>
-                    <a:p>
-                      <a:pPr indent="0" marL="0">
-                        <a:lnSpc>
-                          <a:spcPts val="2240"/>
-                        </a:lnSpc>
-                        <a:buNone/>
-                      </a:pPr>
-                      <a:r>
-                        <a:rPr lang="en-US" sz="1600" dirty="0">
-                          <a:solidFill>
-                            <a:srgbClr val="10212B"/>
-                          </a:solidFill>
-                          <a:latin typeface="IBM Plex Sans" pitchFamily="34" charset="0"/>
-                          <a:ea typeface="IBM Plex Sans" pitchFamily="34" charset="-122"/>
-                          <a:cs typeface="IBM Plex Sans" pitchFamily="34" charset="-120"/>
-                        </a:rPr>
-                        <a:t>Rebuilt by hand each time</a:t>
-                      </a:r>
-                      <a:endParaRPr lang="en-US" sz="1600" dirty="0">
-                        <a:latin typeface="IBM Plex Sans" charset="0"/>
-                        <a:ea typeface="IBM Plex Sans" charset="0"/>
-                        <a:cs typeface="IBM Plex Sans" charset="0"/>
-                      </a:endParaRPr>
-                    </a:p>
-                  </a:txBody>
-                  <a:tcPr marL="71120" marR="71120" marT="71120" marB="71120" anchor="t">
-                    <a:lnL w="12700" cap="flat" cmpd="sng" algn="ctr">
-                      <a:solidFill>
-                        <a:srgbClr val="C5C6C4"/>
-                      </a:solidFill>
-                      <a:prstDash val="solid"/>
-                      <a:round/>
-                      <a:headEnd type="none" w="med" len="med"/>
-                      <a:tailEnd type="none" w="med" len="med"/>
-                    </a:lnL>
-                    <a:lnR w="12700" cap="flat" cmpd="sng" algn="ctr">
-                      <a:solidFill>
-                        <a:srgbClr val="C5C6C4"/>
-                      </a:solidFill>
-                      <a:prstDash val="solid"/>
-                      <a:round/>
-                      <a:headEnd type="none" w="med" len="med"/>
-                      <a:tailEnd type="none" w="med" len="med"/>
-                    </a:lnR>
-                    <a:lnT w="12700" cap="flat" cmpd="sng" algn="ctr">
-                      <a:solidFill>
-                        <a:srgbClr val="BFC1BE"/>
-                      </a:solidFill>
-                      <a:prstDash val="solid"/>
-                      <a:round/>
-                      <a:headEnd type="none" w="med" len="med"/>
-                      <a:tailEnd type="none" w="med" len="med"/>
-                    </a:lnT>
-                    <a:lnB w="12700" cap="flat" cmpd="sng" algn="ctr">
-                      <a:solidFill>
-                        <a:srgbClr val="C5C6C4"/>
-                      </a:solidFill>
-                      <a:prstDash val="solid"/>
-                      <a:round/>
-                      <a:headEnd type="none" w="med" len="med"/>
-                      <a:tailEnd type="none" w="med" len="med"/>
-                    </a:lnB>
-                  </a:tcPr>
-                </a:tc>
-                <a:tc>
-                  <a:txBody>
-                    <a:bodyPr/>
-                    <a:lstStyle/>
-                    <a:p>
-                      <a:pPr indent="0" marL="0">
-                        <a:lnSpc>
-                          <a:spcPts val="2240"/>
-                        </a:lnSpc>
-                        <a:buNone/>
-                      </a:pPr>
-                      <a:r>
-                        <a:rPr lang="en-US" sz="1600" dirty="0">
-                          <a:solidFill>
-                            <a:srgbClr val="10212B"/>
-                          </a:solidFill>
-                          <a:latin typeface="IBM Plex Sans" pitchFamily="34" charset="0"/>
-                          <a:ea typeface="IBM Plex Sans" pitchFamily="34" charset="-122"/>
-                          <a:cs typeface="IBM Plex Sans" pitchFamily="34" charset="-120"/>
-                        </a:rPr>
-                        <a:t>Attach the standard file</a:t>
-                      </a:r>
-                      <a:endParaRPr lang="en-US" sz="1600" dirty="0">
-                        <a:latin typeface="IBM Plex Sans" charset="0"/>
-                        <a:ea typeface="IBM Plex Sans" charset="0"/>
-                        <a:cs typeface="IBM Plex Sans" charset="0"/>
-                      </a:endParaRPr>
-                    </a:p>
-                  </a:txBody>
-                  <a:tcPr marL="71120" marR="71120" marT="71120" marB="71120" anchor="t">
-                    <a:lnL w="12700" cap="flat" cmpd="sng" algn="ctr">
-                      <a:solidFill>
-                        <a:srgbClr val="C5C6C4"/>
-                      </a:solidFill>
-                      <a:prstDash val="solid"/>
-                      <a:round/>
-                      <a:headEnd type="none" w="med" len="med"/>
-                      <a:tailEnd type="none" w="med" len="med"/>
-                    </a:lnL>
-                    <a:lnR w="12700" cap="flat" cmpd="sng" algn="ctr">
-                      <a:solidFill>
-                        <a:srgbClr val="C5C6C4"/>
-                      </a:solidFill>
-                      <a:prstDash val="solid"/>
-                      <a:round/>
-                      <a:headEnd type="none" w="med" len="med"/>
-                      <a:tailEnd type="none" w="med" len="med"/>
-                    </a:lnR>
-                    <a:lnT w="12700" cap="flat" cmpd="sng" algn="ctr">
-                      <a:solidFill>
-                        <a:srgbClr val="BFC1BE"/>
-                      </a:solidFill>
-                      <a:prstDash val="solid"/>
-                      <a:round/>
-                      <a:headEnd type="none" w="med" len="med"/>
-                      <a:tailEnd type="none" w="med" len="med"/>
-                    </a:lnT>
-                    <a:lnB w="12700" cap="flat" cmpd="sng" algn="ctr">
-                      <a:solidFill>
-                        <a:srgbClr val="C5C6C4"/>
-                      </a:solidFill>
-                      <a:prstDash val="solid"/>
-                      <a:round/>
-                      <a:headEnd type="none" w="med" len="med"/>
-                      <a:tailEnd type="none" w="med" len="med"/>
-                    </a:lnB>
-                  </a:tcPr>
-                </a:tc>
-              </a:tr>
-              <a:tr h="439341">
-                <a:tc>
-                  <a:txBody>
-                    <a:bodyPr/>
-                    <a:lstStyle/>
-                    <a:p>
-                      <a:pPr indent="0" marL="0">
-                        <a:lnSpc>
-                          <a:spcPts val="2240"/>
-                        </a:lnSpc>
-                        <a:buNone/>
-                      </a:pPr>
-                      <a:r>
-                        <a:rPr lang="en-US" sz="1600" dirty="0">
-                          <a:solidFill>
-                            <a:srgbClr val="10212B"/>
-                          </a:solidFill>
-                          <a:latin typeface="IBM Plex Sans" pitchFamily="34" charset="0"/>
-                          <a:ea typeface="IBM Plex Sans" pitchFamily="34" charset="-122"/>
-                          <a:cs typeface="IBM Plex Sans" pitchFamily="34" charset="-120"/>
-                        </a:rPr>
-                        <a:t>Did a restricted license get in?</a:t>
-                      </a:r>
-                      <a:endParaRPr lang="en-US" sz="1600" dirty="0">
-                        <a:latin typeface="IBM Plex Sans" charset="0"/>
-                        <a:ea typeface="IBM Plex Sans" charset="0"/>
-                        <a:cs typeface="IBM Plex Sans" charset="0"/>
-                      </a:endParaRPr>
-                    </a:p>
-                  </a:txBody>
-                  <a:tcPr marL="71120" marR="71120" marT="71120" marB="71120" anchor="t">
-                    <a:lnL w="0" cap="flat" cmpd="sng" algn="ctr">
-                      <a:noFill/>
-                    </a:lnL>
-                    <a:lnR w="12700" cap="flat" cmpd="sng" algn="ctr">
-                      <a:solidFill>
-                        <a:srgbClr val="BFC1BE"/>
-                      </a:solidFill>
-                      <a:prstDash val="solid"/>
-                      <a:round/>
-                      <a:headEnd type="none" w="med" len="med"/>
-                      <a:tailEnd type="none" w="med" len="med"/>
-                    </a:lnR>
-                    <a:lnT w="12700" cap="flat" cmpd="sng" algn="ctr">
-                      <a:solidFill>
-                        <a:srgbClr val="C5C6C4"/>
-                      </a:solidFill>
-                      <a:prstDash val="solid"/>
-                      <a:round/>
-                      <a:headEnd type="none" w="med" len="med"/>
-                      <a:tailEnd type="none" w="med" len="med"/>
-                    </a:lnT>
-                    <a:lnB w="12700" cap="flat" cmpd="sng" algn="ctr">
-                      <a:solidFill>
-                        <a:srgbClr val="BFC1BE"/>
-                      </a:solidFill>
-                      <a:prstDash val="solid"/>
-                      <a:round/>
-                      <a:headEnd type="none" w="med" len="med"/>
-                      <a:tailEnd type="none" w="med" len="med"/>
-                    </a:lnB>
-                    <a:solidFill>
-                      <a:srgbClr val="EFF2EE"/>
-                    </a:solidFill>
-                  </a:tcPr>
-                </a:tc>
-                <a:tc>
-                  <a:txBody>
-                    <a:bodyPr/>
-                    <a:lstStyle/>
-                    <a:p>
-                      <a:pPr indent="0" marL="0">
-                        <a:lnSpc>
-                          <a:spcPts val="2240"/>
-                        </a:lnSpc>
-                        <a:buNone/>
-                      </a:pPr>
-                      <a:r>
-                        <a:rPr lang="en-US" sz="1600" dirty="0">
-                          <a:solidFill>
-                            <a:srgbClr val="10212B"/>
-                          </a:solidFill>
-                          <a:latin typeface="IBM Plex Sans" pitchFamily="34" charset="0"/>
-                          <a:ea typeface="IBM Plex Sans" pitchFamily="34" charset="-122"/>
-                          <a:cs typeface="IBM Plex Sans" pitchFamily="34" charset="-120"/>
-                        </a:rPr>
-                        <a:t>Nobody is checking</a:t>
-                      </a:r>
-                      <a:endParaRPr lang="en-US" sz="1600" dirty="0">
-                        <a:latin typeface="IBM Plex Sans" charset="0"/>
-                        <a:ea typeface="IBM Plex Sans" charset="0"/>
-                        <a:cs typeface="IBM Plex Sans" charset="0"/>
-                      </a:endParaRPr>
-                    </a:p>
-                  </a:txBody>
-                  <a:tcPr marL="71120" marR="71120" marT="71120" marB="71120" anchor="t">
-                    <a:lnL w="12700" cap="flat" cmpd="sng" algn="ctr">
-                      <a:solidFill>
-                        <a:srgbClr val="BFC1BE"/>
-                      </a:solidFill>
-                      <a:prstDash val="solid"/>
-                      <a:round/>
-                      <a:headEnd type="none" w="med" len="med"/>
-                      <a:tailEnd type="none" w="med" len="med"/>
-                    </a:lnL>
-                    <a:lnR w="12700" cap="flat" cmpd="sng" algn="ctr">
-                      <a:solidFill>
-                        <a:srgbClr val="BFC1BE"/>
-                      </a:solidFill>
-                      <a:prstDash val="solid"/>
-                      <a:round/>
-                      <a:headEnd type="none" w="med" len="med"/>
-                      <a:tailEnd type="none" w="med" len="med"/>
-                    </a:lnR>
-                    <a:lnT w="12700" cap="flat" cmpd="sng" algn="ctr">
-                      <a:solidFill>
-                        <a:srgbClr val="C5C6C4"/>
-                      </a:solidFill>
-                      <a:prstDash val="solid"/>
-                      <a:round/>
-                      <a:headEnd type="none" w="med" len="med"/>
-                      <a:tailEnd type="none" w="med" len="med"/>
-                    </a:lnT>
-                    <a:lnB w="12700" cap="flat" cmpd="sng" algn="ctr">
-                      <a:solidFill>
-                        <a:srgbClr val="BFC1BE"/>
-                      </a:solidFill>
-                      <a:prstDash val="solid"/>
-                      <a:round/>
-                      <a:headEnd type="none" w="med" len="med"/>
-                      <a:tailEnd type="none" w="med" len="med"/>
-                    </a:lnB>
-                    <a:solidFill>
-                      <a:srgbClr val="EFF2EE"/>
-                    </a:solidFill>
-                  </a:tcPr>
-                </a:tc>
-                <a:tc>
-                  <a:txBody>
-                    <a:bodyPr/>
-                    <a:lstStyle/>
-                    <a:p>
-                      <a:pPr indent="0" marL="0">
-                        <a:lnSpc>
-                          <a:spcPts val="2240"/>
-                        </a:lnSpc>
-                        <a:buNone/>
-                      </a:pPr>
-                      <a:r>
-                        <a:rPr lang="en-US" sz="1600" dirty="0">
-                          <a:solidFill>
-                            <a:srgbClr val="10212B"/>
-                          </a:solidFill>
-                          <a:latin typeface="IBM Plex Sans" pitchFamily="34" charset="0"/>
-                          <a:ea typeface="IBM Plex Sans" pitchFamily="34" charset="-122"/>
-                          <a:cs typeface="IBM Plex Sans" pitchFamily="34" charset="-120"/>
-                        </a:rPr>
-                        <a:t>The build stops before it ships</a:t>
-                      </a:r>
-                      <a:endParaRPr lang="en-US" sz="1600" dirty="0">
-                        <a:latin typeface="IBM Plex Sans" charset="0"/>
-                        <a:ea typeface="IBM Plex Sans" charset="0"/>
-                        <a:cs typeface="IBM Plex Sans" charset="0"/>
-                      </a:endParaRPr>
-                    </a:p>
-                  </a:txBody>
-                  <a:tcPr marL="71120" marR="71120" marT="71120" marB="71120" anchor="t">
-                    <a:lnL w="12700" cap="flat" cmpd="sng" algn="ctr">
-                      <a:solidFill>
-                        <a:srgbClr val="BFC1BE"/>
-                      </a:solidFill>
-                      <a:prstDash val="solid"/>
-                      <a:round/>
-                      <a:headEnd type="none" w="med" len="med"/>
-                      <a:tailEnd type="none" w="med" len="med"/>
-                    </a:lnL>
-                    <a:lnR w="12700" cap="flat" cmpd="sng" algn="ctr">
-                      <a:solidFill>
-                        <a:srgbClr val="BFC1BE"/>
-                      </a:solidFill>
-                      <a:prstDash val="solid"/>
-                      <a:round/>
-                      <a:headEnd type="none" w="med" len="med"/>
-                      <a:tailEnd type="none" w="med" len="med"/>
-                    </a:lnR>
-                    <a:lnT w="12700" cap="flat" cmpd="sng" algn="ctr">
-                      <a:solidFill>
-                        <a:srgbClr val="C5C6C4"/>
-                      </a:solidFill>
-                      <a:prstDash val="solid"/>
-                      <a:round/>
-                      <a:headEnd type="none" w="med" len="med"/>
-                      <a:tailEnd type="none" w="med" len="med"/>
-                    </a:lnT>
-                    <a:lnB w="12700" cap="flat" cmpd="sng" algn="ctr">
-                      <a:solidFill>
-                        <a:srgbClr val="BFC1BE"/>
-                      </a:solidFill>
-                      <a:prstDash val="solid"/>
-                      <a:round/>
-                      <a:headEnd type="none" w="med" len="med"/>
-                      <a:tailEnd type="none" w="med" len="med"/>
-                    </a:lnB>
-                    <a:solidFill>
-                      <a:srgbClr val="EFF2EE"/>
-                    </a:solidFill>
-                  </a:tcPr>
-                </a:tc>
-              </a:tr>
-            </a:tbl>
-          </a:graphicData>
-        </a:graphic>
-      </p:graphicFrame>
-      <p:sp>
-        <p:nvSpPr>
-          <p:cNvPr id="6" name="Text 3"/>
+          <a:ln/>
+        </p:spPr>
+        <p:txBody>
+          <a:bodyPr wrap="square" lIns="0" tIns="0" rIns="0" bIns="0" rtlCol="0" anchor="t">
+            <a:normAutofit/>
+          </a:bodyPr>
+          <a:lstStyle/>
+          <a:p>
+            <a:pPr algn="l" indent="0" marL="0">
+              <a:lnSpc>
+                <a:spcPts val="2040"/>
+              </a:lnSpc>
+              <a:buNone/>
+            </a:pPr>
+            <a:r>
+              <a:rPr lang="en-US" sz="1700" b="1" dirty="0">
+                <a:solidFill>
+                  <a:srgbClr val="10212B"/>
+                </a:solidFill>
+                <a:latin typeface="Verdana" pitchFamily="34" charset="0"/>
+                <a:ea typeface="Verdana" pitchFamily="34" charset="-122"/>
+                <a:cs typeface="Verdana" pitchFamily="34" charset="-120"/>
+              </a:rPr>
+              <a:t>A bought tool reports</a:t>
+            </a:r>
+            <a:endParaRPr lang="en-US" sz="1700" dirty="0"/>
+          </a:p>
+        </p:txBody>
+      </p:sp>
+      <p:sp>
+        <p:nvSpPr>
+          <p:cNvPr id="6" name="Text 4"/>
           <p:cNvSpPr/>
           <p:nvPr/>
         </p:nvSpPr>
         <p:spPr>
           <a:xfrm>
-            <a:off x="812800" y="4337893"/>
-            <a:ext cx="10595610" cy="309860"/>
+            <a:off x="1073150" y="3483471"/>
+            <a:ext cx="4807268" cy="878780"/>
           </a:xfrm>
           <a:prstGeom prst="rect">
             <a:avLst/>
@@ -4669,11 +5102,165 @@
                 <a:solidFill>
                   <a:srgbClr val="4A5568"/>
                 </a:solidFill>
-                <a:latin typeface="IBM Plex Sans" pitchFamily="34" charset="0"/>
-                <a:ea typeface="IBM Plex Sans" pitchFamily="34" charset="-122"/>
-                <a:cs typeface="IBM Plex Sans" pitchFamily="34" charset="-120"/>
+                <a:latin typeface="Verdana" pitchFamily="34" charset="0"/>
+                <a:ea typeface="Verdana" pitchFamily="34" charset="-122"/>
+                <a:cs typeface="Verdana" pitchFamily="34" charset="-120"/>
               </a:rPr>
-              <a:t>Same engineers, same release process. The answers stop being projects.</a:t>
+              <a:t>A clean inventory, missing a large share of what we actually install — with no error to tell us.</a:t>
+            </a:r>
+            <a:endParaRPr lang="en-US" sz="1600" dirty="0"/>
+          </a:p>
+        </p:txBody>
+      </p:sp>
+      <p:sp>
+        <p:nvSpPr>
+          <p:cNvPr id="7" name="Shape 5"/>
+          <p:cNvSpPr/>
+          <p:nvPr/>
+        </p:nvSpPr>
+        <p:spPr>
+          <a:xfrm>
+            <a:off x="6203950" y="2887861"/>
+            <a:ext cx="5175250" cy="1709341"/>
+          </a:xfrm>
+          <a:prstGeom prst="roundRect">
+            <a:avLst>
+              <a:gd name="adj" fmla="val 5944"/>
+            </a:avLst>
+          </a:prstGeom>
+          <a:solidFill>
+            <a:srgbClr val="10212B"/>
+          </a:solidFill>
+          <a:ln/>
+        </p:spPr>
+      </p:sp>
+      <p:sp>
+        <p:nvSpPr>
+          <p:cNvPr id="8" name="Text 6"/>
+          <p:cNvSpPr/>
+          <p:nvPr/>
+        </p:nvSpPr>
+        <p:spPr>
+          <a:xfrm>
+            <a:off x="6457950" y="3141861"/>
+            <a:ext cx="4807268" cy="284460"/>
+          </a:xfrm>
+          <a:prstGeom prst="rect">
+            <a:avLst/>
+          </a:prstGeom>
+          <a:noFill/>
+          <a:ln/>
+        </p:spPr>
+        <p:txBody>
+          <a:bodyPr wrap="square" lIns="0" tIns="0" rIns="0" bIns="0" rtlCol="0" anchor="t">
+            <a:normAutofit/>
+          </a:bodyPr>
+          <a:lstStyle/>
+          <a:p>
+            <a:pPr algn="l" indent="0" marL="0">
+              <a:lnSpc>
+                <a:spcPts val="2040"/>
+              </a:lnSpc>
+              <a:buNone/>
+            </a:pPr>
+            <a:r>
+              <a:rPr lang="en-US" sz="1700" b="1" dirty="0">
+                <a:solidFill>
+                  <a:srgbClr val="6FBFAE"/>
+                </a:solidFill>
+                <a:latin typeface="Verdana" pitchFamily="34" charset="0"/>
+                <a:ea typeface="Verdana" pitchFamily="34" charset="-122"/>
+                <a:cs typeface="Verdana" pitchFamily="34" charset="-120"/>
+              </a:rPr>
+              <a:t>Which is the dangerous case</a:t>
+            </a:r>
+            <a:endParaRPr lang="en-US" sz="1700" dirty="0"/>
+          </a:p>
+        </p:txBody>
+      </p:sp>
+      <p:sp>
+        <p:nvSpPr>
+          <p:cNvPr id="9" name="Text 7"/>
+          <p:cNvSpPr/>
+          <p:nvPr/>
+        </p:nvSpPr>
+        <p:spPr>
+          <a:xfrm>
+            <a:off x="6457950" y="3477121"/>
+            <a:ext cx="4807268" cy="878780"/>
+          </a:xfrm>
+          <a:prstGeom prst="rect">
+            <a:avLst/>
+          </a:prstGeom>
+          <a:noFill/>
+          <a:ln/>
+        </p:spPr>
+        <p:txBody>
+          <a:bodyPr wrap="square" lIns="0" tIns="0" rIns="0" bIns="0" rtlCol="0" anchor="t">
+            <a:normAutofit/>
+          </a:bodyPr>
+          <a:lstStyle/>
+          <a:p>
+            <a:pPr algn="l" indent="0" marL="0">
+              <a:lnSpc>
+                <a:spcPts val="2240"/>
+              </a:lnSpc>
+              <a:buNone/>
+            </a:pPr>
+            <a:r>
+              <a:rPr lang="en-US" sz="1600" dirty="0">
+                <a:solidFill>
+                  <a:srgbClr val="B5C4CA"/>
+                </a:solidFill>
+                <a:latin typeface="Verdana" pitchFamily="34" charset="0"/>
+                <a:ea typeface="Verdana" pitchFamily="34" charset="-122"/>
+                <a:cs typeface="Verdana" pitchFamily="34" charset="-120"/>
+              </a:rPr>
+              <a:t>An incomplete list we trust is worse than no list. We'd answer the customer, and be wrong.</a:t>
+            </a:r>
+            <a:endParaRPr lang="en-US" sz="1600" dirty="0"/>
+          </a:p>
+        </p:txBody>
+      </p:sp>
+      <p:sp>
+        <p:nvSpPr>
+          <p:cNvPr id="10" name="Text 8"/>
+          <p:cNvSpPr/>
+          <p:nvPr/>
+        </p:nvSpPr>
+        <p:spPr>
+          <a:xfrm>
+            <a:off x="812800" y="4876602"/>
+            <a:ext cx="10595610" cy="309860"/>
+          </a:xfrm>
+          <a:prstGeom prst="rect">
+            <a:avLst/>
+          </a:prstGeom>
+          <a:noFill/>
+          <a:ln/>
+        </p:spPr>
+        <p:txBody>
+          <a:bodyPr wrap="square" lIns="0" tIns="0" rIns="0" bIns="0" rtlCol="0" anchor="t">
+            <a:normAutofit/>
+          </a:bodyPr>
+          <a:lstStyle/>
+          <a:p>
+            <a:pPr algn="l" indent="0" marL="0">
+              <a:lnSpc>
+                <a:spcPts val="2240"/>
+              </a:lnSpc>
+              <a:buNone/>
+            </a:pPr>
+            <a:r>
+              <a:rPr lang="en-US" sz="1600" dirty="0">
+                <a:solidFill>
+                  <a:srgbClr val="10212B"/>
+                </a:solidFill>
+                <a:latin typeface="Verdana" pitchFamily="34" charset="0"/>
+                <a:ea typeface="Verdana" pitchFamily="34" charset="-122"/>
+                <a:cs typeface="Verdana" pitchFamily="34" charset="-120"/>
+              </a:rPr>
+              <a:t>The tool we'd use instead is already built, already runs against our lockfiles, and costs nothing.</a:t>
             </a:r>
             <a:endParaRPr lang="en-US" sz="1600" dirty="0"/>
           </a:p>
@@ -4715,12 +5302,14 @@
         <p:nvSpPr>
           <p:cNvPr id="2" name="Text 0"/>
           <p:cNvSpPr/>
-          <p:nvPr/>
+          <p:nvPr>
+            <p:ph type="title"/>
+          </p:nvPr>
         </p:nvSpPr>
         <p:spPr>
           <a:xfrm>
             <a:off x="812800" y="812800"/>
-            <a:ext cx="10883392" cy="516483"/>
+            <a:ext cx="10883392" cy="519658"/>
           </a:xfrm>
           <a:prstGeom prst="rect">
             <a:avLst/>
@@ -4736,22 +5325,22 @@
           <a:p>
             <a:pPr algn="l" indent="0" marL="0">
               <a:lnSpc>
-                <a:spcPts val="3873"/>
+                <a:spcPts val="3923"/>
               </a:lnSpc>
               <a:buNone/>
             </a:pPr>
             <a:r>
-              <a:rPr lang="en-US" sz="3521" b="1" dirty="0">
+              <a:rPr lang="en-US" sz="3566" b="1" i="0" dirty="0">
                 <a:solidFill>
                   <a:srgbClr val="10212B"/>
                 </a:solidFill>
-                <a:latin typeface="IBM Plex Sans" pitchFamily="34" charset="0"/>
-                <a:ea typeface="IBM Plex Sans" pitchFamily="34" charset="-122"/>
-                <a:cs typeface="IBM Plex Sans" pitchFamily="34" charset="-120"/>
+                <a:latin typeface="Verdana" pitchFamily="34" charset="0"/>
+                <a:ea typeface="Verdana" pitchFamily="34" charset="-122"/>
+                <a:cs typeface="Verdana" pitchFamily="34" charset="-120"/>
               </a:rPr>
-              <a:t>What I'm not claiming</a:t>
+              <a:t>What changes</a:t>
             </a:r>
-            <a:endParaRPr lang="en-US" sz="3521" dirty="0"/>
+            <a:endParaRPr lang="en-US" sz="3566" dirty="0"/>
           </a:p>
         </p:txBody>
       </p:sp>
@@ -4763,20 +5352,18 @@
         </p:nvSpPr>
         <p:spPr>
           <a:xfrm>
-            <a:off x="815975" y="1586458"/>
-            <a:ext cx="10560050" cy="1303189"/>
-          </a:xfrm>
-          <a:prstGeom prst="roundRect">
-            <a:avLst>
-              <a:gd name="adj" fmla="val 7553"/>
-            </a:avLst>
-          </a:prstGeom>
-          <a:solidFill>
-            <a:srgbClr val="FFFFFF"/>
-          </a:solidFill>
-          <a:ln w="6350">
+            <a:off x="812800" y="1592808"/>
+            <a:ext cx="10566400" cy="0"/>
+          </a:xfrm>
+          <a:prstGeom prst="line">
+            <a:avLst/>
+          </a:prstGeom>
+          <a:noFill/>
+          <a:ln w="12700">
             <a:solidFill>
-              <a:srgbClr val="DFE3DE"/>
+              <a:srgbClr val="141413">
+                <a:alpha val="22000"/>
+              </a:srgbClr>
             </a:solidFill>
             <a:prstDash val="solid"/>
           </a:ln>
@@ -4784,14 +5371,1279 @@
       </p:sp>
       <p:sp>
         <p:nvSpPr>
-          <p:cNvPr id="4" name="Text 2"/>
+          <p:cNvPr id="4" name="Shape 2"/>
           <p:cNvSpPr/>
           <p:nvPr/>
         </p:nvSpPr>
         <p:spPr>
           <a:xfrm>
-            <a:off x="1073150" y="1818233"/>
-            <a:ext cx="10347071" cy="288330"/>
+            <a:off x="819150" y="1586458"/>
+            <a:ext cx="0" cy="3696543"/>
+          </a:xfrm>
+          <a:prstGeom prst="line">
+            <a:avLst/>
+          </a:prstGeom>
+          <a:noFill/>
+          <a:ln w="12700">
+            <a:solidFill>
+              <a:srgbClr val="141413">
+                <a:alpha val="22000"/>
+              </a:srgbClr>
+            </a:solidFill>
+            <a:prstDash val="solid"/>
+          </a:ln>
+        </p:spPr>
+      </p:sp>
+      <p:graphicFrame>
+        <p:nvGraphicFramePr>
+          <p:cNvPr id="5" name="Table 0"/>
+          <p:cNvGraphicFramePr>
+            <a:graphicFrameLocks noGrp="1"/>
+          </p:cNvGraphicFramePr>
+          <p:nvPr>
+            <p:extLst>
+              <p:ext uri="{D42A27DB-BD31-4B8C-83A1-F6EECF244321}">
+                <p14:modId xmlns:p14="http://schemas.microsoft.com/office/powerpoint/2010/main" val="1579011935"/>
+              </p:ext>
+            </p:extLst>
+          </p:nvPr>
+        </p:nvGraphicFramePr>
+        <p:xfrm>
+          <a:off x="977900" y="1726158"/>
+          <a:ext cx="10248900" cy="3429843"/>
+        </p:xfrm>
+        <a:graphic>
+          <a:graphicData uri="http://schemas.openxmlformats.org/drawingml/2006/table">
+            <a:tbl>
+              <a:tblPr/>
+              <a:tblGrid>
+                <a:gridCol w="3894582"/>
+                <a:gridCol w="3177159"/>
+                <a:gridCol w="3177159"/>
+              </a:tblGrid>
+              <a:tr h="432048">
+                <a:tc>
+                  <a:txBody>
+                    <a:bodyPr/>
+                    <a:lstStyle/>
+                    <a:p>
+                      <a:pPr indent="0" marL="0">
+                        <a:lnSpc>
+                          <a:spcPts val="2198"/>
+                        </a:lnSpc>
+                        <a:buNone/>
+                      </a:pPr>
+                      <a:r>
+                        <a:rPr lang="en-US" sz="1570" b="1" dirty="0">
+                          <a:solidFill>
+                            <a:srgbClr val="F7F8F6"/>
+                          </a:solidFill>
+                          <a:latin typeface="Verdana" pitchFamily="34" charset="0"/>
+                          <a:ea typeface="Verdana" pitchFamily="34" charset="-122"/>
+                          <a:cs typeface="Verdana" pitchFamily="34" charset="-120"/>
+                        </a:rPr>
+                        <a:t>The question</a:t>
+                      </a:r>
+                      <a:endParaRPr lang="en-US" sz="1570" dirty="0">
+                        <a:latin typeface="Verdana" charset="0"/>
+                        <a:ea typeface="Verdana" charset="0"/>
+                        <a:cs typeface="Verdana" charset="0"/>
+                      </a:endParaRPr>
+                    </a:p>
+                  </a:txBody>
+                  <a:tcPr marL="69787" marR="69787" marT="69787" marB="69787" anchor="t">
+                    <a:lnL w="0" cap="flat" cmpd="sng" algn="ctr">
+                      <a:noFill/>
+                    </a:lnL>
+                    <a:lnR w="12700" cap="flat" cmpd="sng" algn="ctr">
+                      <a:solidFill>
+                        <a:srgbClr val="111E26"/>
+                      </a:solidFill>
+                      <a:prstDash val="solid"/>
+                      <a:round/>
+                      <a:headEnd type="none" w="med" len="med"/>
+                      <a:tailEnd type="none" w="med" len="med"/>
+                    </a:lnR>
+                    <a:lnT w="0" cap="flat" cmpd="sng" algn="ctr">
+                      <a:noFill/>
+                    </a:lnT>
+                    <a:lnB w="12700" cap="flat" cmpd="sng" algn="ctr">
+                      <a:solidFill>
+                        <a:srgbClr val="111E26"/>
+                      </a:solidFill>
+                      <a:prstDash val="solid"/>
+                      <a:round/>
+                      <a:headEnd type="none" w="med" len="med"/>
+                      <a:tailEnd type="none" w="med" len="med"/>
+                    </a:lnB>
+                    <a:solidFill>
+                      <a:srgbClr val="10212B"/>
+                    </a:solidFill>
+                  </a:tcPr>
+                </a:tc>
+                <a:tc>
+                  <a:txBody>
+                    <a:bodyPr/>
+                    <a:lstStyle/>
+                    <a:p>
+                      <a:pPr indent="0" marL="0">
+                        <a:lnSpc>
+                          <a:spcPts val="2198"/>
+                        </a:lnSpc>
+                        <a:buNone/>
+                      </a:pPr>
+                      <a:r>
+                        <a:rPr lang="en-US" sz="1570" b="1" dirty="0">
+                          <a:solidFill>
+                            <a:srgbClr val="F7F8F6"/>
+                          </a:solidFill>
+                          <a:latin typeface="Verdana" pitchFamily="34" charset="0"/>
+                          <a:ea typeface="Verdana" pitchFamily="34" charset="-122"/>
+                          <a:cs typeface="Verdana" pitchFamily="34" charset="-120"/>
+                        </a:rPr>
+                        <a:t>Today</a:t>
+                      </a:r>
+                      <a:endParaRPr lang="en-US" sz="1570" dirty="0">
+                        <a:latin typeface="Verdana" charset="0"/>
+                        <a:ea typeface="Verdana" charset="0"/>
+                        <a:cs typeface="Verdana" charset="0"/>
+                      </a:endParaRPr>
+                    </a:p>
+                  </a:txBody>
+                  <a:tcPr marL="69787" marR="69787" marT="69787" marB="69787" anchor="t">
+                    <a:lnL w="12700" cap="flat" cmpd="sng" algn="ctr">
+                      <a:solidFill>
+                        <a:srgbClr val="111E26"/>
+                      </a:solidFill>
+                      <a:prstDash val="solid"/>
+                      <a:round/>
+                      <a:headEnd type="none" w="med" len="med"/>
+                      <a:tailEnd type="none" w="med" len="med"/>
+                    </a:lnL>
+                    <a:lnR w="12700" cap="flat" cmpd="sng" algn="ctr">
+                      <a:solidFill>
+                        <a:srgbClr val="111E26"/>
+                      </a:solidFill>
+                      <a:prstDash val="solid"/>
+                      <a:round/>
+                      <a:headEnd type="none" w="med" len="med"/>
+                      <a:tailEnd type="none" w="med" len="med"/>
+                    </a:lnR>
+                    <a:lnT w="0" cap="flat" cmpd="sng" algn="ctr">
+                      <a:noFill/>
+                    </a:lnT>
+                    <a:lnB w="12700" cap="flat" cmpd="sng" algn="ctr">
+                      <a:solidFill>
+                        <a:srgbClr val="111E26"/>
+                      </a:solidFill>
+                      <a:prstDash val="solid"/>
+                      <a:round/>
+                      <a:headEnd type="none" w="med" len="med"/>
+                      <a:tailEnd type="none" w="med" len="med"/>
+                    </a:lnB>
+                    <a:solidFill>
+                      <a:srgbClr val="10212B"/>
+                    </a:solidFill>
+                  </a:tcPr>
+                </a:tc>
+                <a:tc>
+                  <a:txBody>
+                    <a:bodyPr/>
+                    <a:lstStyle/>
+                    <a:p>
+                      <a:pPr indent="0" marL="0">
+                        <a:lnSpc>
+                          <a:spcPts val="2198"/>
+                        </a:lnSpc>
+                        <a:buNone/>
+                      </a:pPr>
+                      <a:r>
+                        <a:rPr lang="en-US" sz="1570" b="1" dirty="0">
+                          <a:solidFill>
+                            <a:srgbClr val="F7F8F6"/>
+                          </a:solidFill>
+                          <a:latin typeface="Verdana" pitchFamily="34" charset="0"/>
+                          <a:ea typeface="Verdana" pitchFamily="34" charset="-122"/>
+                          <a:cs typeface="Verdana" pitchFamily="34" charset="-120"/>
+                        </a:rPr>
+                        <a:t>After</a:t>
+                      </a:r>
+                      <a:endParaRPr lang="en-US" sz="1570" dirty="0">
+                        <a:latin typeface="Verdana" charset="0"/>
+                        <a:ea typeface="Verdana" charset="0"/>
+                        <a:cs typeface="Verdana" charset="0"/>
+                      </a:endParaRPr>
+                    </a:p>
+                  </a:txBody>
+                  <a:tcPr marL="69787" marR="69787" marT="69787" marB="69787" anchor="t">
+                    <a:lnL w="12700" cap="flat" cmpd="sng" algn="ctr">
+                      <a:solidFill>
+                        <a:srgbClr val="111E26"/>
+                      </a:solidFill>
+                      <a:prstDash val="solid"/>
+                      <a:round/>
+                      <a:headEnd type="none" w="med" len="med"/>
+                      <a:tailEnd type="none" w="med" len="med"/>
+                    </a:lnL>
+                    <a:lnR w="12700" cap="flat" cmpd="sng" algn="ctr">
+                      <a:solidFill>
+                        <a:srgbClr val="111E26"/>
+                      </a:solidFill>
+                      <a:prstDash val="solid"/>
+                      <a:round/>
+                      <a:headEnd type="none" w="med" len="med"/>
+                      <a:tailEnd type="none" w="med" len="med"/>
+                    </a:lnR>
+                    <a:lnT w="0" cap="flat" cmpd="sng" algn="ctr">
+                      <a:noFill/>
+                    </a:lnT>
+                    <a:lnB w="12700" cap="flat" cmpd="sng" algn="ctr">
+                      <a:solidFill>
+                        <a:srgbClr val="111E26"/>
+                      </a:solidFill>
+                      <a:prstDash val="solid"/>
+                      <a:round/>
+                      <a:headEnd type="none" w="med" len="med"/>
+                      <a:tailEnd type="none" w="med" len="med"/>
+                    </a:lnB>
+                    <a:solidFill>
+                      <a:srgbClr val="10212B"/>
+                    </a:solidFill>
+                  </a:tcPr>
+                </a:tc>
+              </a:tr>
+              <a:tr h="432098">
+                <a:tc>
+                  <a:txBody>
+                    <a:bodyPr/>
+                    <a:lstStyle/>
+                    <a:p>
+                      <a:pPr indent="0" marL="0">
+                        <a:lnSpc>
+                          <a:spcPts val="2198"/>
+                        </a:lnSpc>
+                        <a:buNone/>
+                      </a:pPr>
+                      <a:r>
+                        <a:rPr lang="en-US" sz="1570" dirty="0">
+                          <a:solidFill>
+                            <a:srgbClr val="10212B"/>
+                          </a:solidFill>
+                          <a:latin typeface="Verdana" pitchFamily="34" charset="0"/>
+                          <a:ea typeface="Verdana" pitchFamily="34" charset="-122"/>
+                          <a:cs typeface="Verdana" pitchFamily="34" charset="-120"/>
+                        </a:rPr>
+                        <a:t>What's in release 4.2?</a:t>
+                      </a:r>
+                      <a:endParaRPr lang="en-US" sz="1570" dirty="0">
+                        <a:latin typeface="Verdana" charset="0"/>
+                        <a:ea typeface="Verdana" charset="0"/>
+                        <a:cs typeface="Verdana" charset="0"/>
+                      </a:endParaRPr>
+                    </a:p>
+                  </a:txBody>
+                  <a:tcPr marL="69787" marR="69787" marT="69787" marB="69787" anchor="t">
+                    <a:lnL w="0" cap="flat" cmpd="sng" algn="ctr">
+                      <a:noFill/>
+                    </a:lnL>
+                    <a:lnR w="12700" cap="flat" cmpd="sng" algn="ctr">
+                      <a:solidFill>
+                        <a:srgbClr val="C5C6C4"/>
+                      </a:solidFill>
+                      <a:prstDash val="solid"/>
+                      <a:round/>
+                      <a:headEnd type="none" w="med" len="med"/>
+                      <a:tailEnd type="none" w="med" len="med"/>
+                    </a:lnR>
+                    <a:lnT w="12700" cap="flat" cmpd="sng" algn="ctr">
+                      <a:solidFill>
+                        <a:srgbClr val="111E26"/>
+                      </a:solidFill>
+                      <a:prstDash val="solid"/>
+                      <a:round/>
+                      <a:headEnd type="none" w="med" len="med"/>
+                      <a:tailEnd type="none" w="med" len="med"/>
+                    </a:lnT>
+                    <a:lnB w="12700" cap="flat" cmpd="sng" algn="ctr">
+                      <a:solidFill>
+                        <a:srgbClr val="C5C6C4"/>
+                      </a:solidFill>
+                      <a:prstDash val="solid"/>
+                      <a:round/>
+                      <a:headEnd type="none" w="med" len="med"/>
+                      <a:tailEnd type="none" w="med" len="med"/>
+                    </a:lnB>
+                  </a:tcPr>
+                </a:tc>
+                <a:tc>
+                  <a:txBody>
+                    <a:bodyPr/>
+                    <a:lstStyle/>
+                    <a:p>
+                      <a:pPr indent="0" marL="0">
+                        <a:lnSpc>
+                          <a:spcPts val="2198"/>
+                        </a:lnSpc>
+                        <a:buNone/>
+                      </a:pPr>
+                      <a:r>
+                        <a:rPr lang="en-US" sz="1570" dirty="0">
+                          <a:solidFill>
+                            <a:srgbClr val="10212B"/>
+                          </a:solidFill>
+                          <a:latin typeface="Verdana" pitchFamily="34" charset="0"/>
+                          <a:ea typeface="Verdana" pitchFamily="34" charset="-122"/>
+                          <a:cs typeface="Verdana" pitchFamily="34" charset="-120"/>
+                        </a:rPr>
+                        <a:t>Days of archaeology</a:t>
+                      </a:r>
+                      <a:endParaRPr lang="en-US" sz="1570" dirty="0">
+                        <a:latin typeface="Verdana" charset="0"/>
+                        <a:ea typeface="Verdana" charset="0"/>
+                        <a:cs typeface="Verdana" charset="0"/>
+                      </a:endParaRPr>
+                    </a:p>
+                  </a:txBody>
+                  <a:tcPr marL="69787" marR="69787" marT="69787" marB="69787" anchor="t">
+                    <a:lnL w="12700" cap="flat" cmpd="sng" algn="ctr">
+                      <a:solidFill>
+                        <a:srgbClr val="C5C6C4"/>
+                      </a:solidFill>
+                      <a:prstDash val="solid"/>
+                      <a:round/>
+                      <a:headEnd type="none" w="med" len="med"/>
+                      <a:tailEnd type="none" w="med" len="med"/>
+                    </a:lnL>
+                    <a:lnR w="12700" cap="flat" cmpd="sng" algn="ctr">
+                      <a:solidFill>
+                        <a:srgbClr val="C5C6C4"/>
+                      </a:solidFill>
+                      <a:prstDash val="solid"/>
+                      <a:round/>
+                      <a:headEnd type="none" w="med" len="med"/>
+                      <a:tailEnd type="none" w="med" len="med"/>
+                    </a:lnR>
+                    <a:lnT w="12700" cap="flat" cmpd="sng" algn="ctr">
+                      <a:solidFill>
+                        <a:srgbClr val="111E26"/>
+                      </a:solidFill>
+                      <a:prstDash val="solid"/>
+                      <a:round/>
+                      <a:headEnd type="none" w="med" len="med"/>
+                      <a:tailEnd type="none" w="med" len="med"/>
+                    </a:lnT>
+                    <a:lnB w="12700" cap="flat" cmpd="sng" algn="ctr">
+                      <a:solidFill>
+                        <a:srgbClr val="C5C6C4"/>
+                      </a:solidFill>
+                      <a:prstDash val="solid"/>
+                      <a:round/>
+                      <a:headEnd type="none" w="med" len="med"/>
+                      <a:tailEnd type="none" w="med" len="med"/>
+                    </a:lnB>
+                  </a:tcPr>
+                </a:tc>
+                <a:tc>
+                  <a:txBody>
+                    <a:bodyPr/>
+                    <a:lstStyle/>
+                    <a:p>
+                      <a:pPr indent="0" marL="0">
+                        <a:lnSpc>
+                          <a:spcPts val="2198"/>
+                        </a:lnSpc>
+                        <a:buNone/>
+                      </a:pPr>
+                      <a:r>
+                        <a:rPr lang="en-US" sz="1570" dirty="0">
+                          <a:solidFill>
+                            <a:srgbClr val="10212B"/>
+                          </a:solidFill>
+                          <a:latin typeface="Verdana" pitchFamily="34" charset="0"/>
+                          <a:ea typeface="Verdana" pitchFamily="34" charset="-122"/>
+                          <a:cs typeface="Verdana" pitchFamily="34" charset="-120"/>
+                        </a:rPr>
+                        <a:t>A file, written at build time</a:t>
+                      </a:r>
+                      <a:endParaRPr lang="en-US" sz="1570" dirty="0">
+                        <a:latin typeface="Verdana" charset="0"/>
+                        <a:ea typeface="Verdana" charset="0"/>
+                        <a:cs typeface="Verdana" charset="0"/>
+                      </a:endParaRPr>
+                    </a:p>
+                  </a:txBody>
+                  <a:tcPr marL="69787" marR="69787" marT="69787" marB="69787" anchor="t">
+                    <a:lnL w="12700" cap="flat" cmpd="sng" algn="ctr">
+                      <a:solidFill>
+                        <a:srgbClr val="C5C6C4"/>
+                      </a:solidFill>
+                      <a:prstDash val="solid"/>
+                      <a:round/>
+                      <a:headEnd type="none" w="med" len="med"/>
+                      <a:tailEnd type="none" w="med" len="med"/>
+                    </a:lnL>
+                    <a:lnR w="12700" cap="flat" cmpd="sng" algn="ctr">
+                      <a:solidFill>
+                        <a:srgbClr val="C5C6C4"/>
+                      </a:solidFill>
+                      <a:prstDash val="solid"/>
+                      <a:round/>
+                      <a:headEnd type="none" w="med" len="med"/>
+                      <a:tailEnd type="none" w="med" len="med"/>
+                    </a:lnR>
+                    <a:lnT w="12700" cap="flat" cmpd="sng" algn="ctr">
+                      <a:solidFill>
+                        <a:srgbClr val="111E26"/>
+                      </a:solidFill>
+                      <a:prstDash val="solid"/>
+                      <a:round/>
+                      <a:headEnd type="none" w="med" len="med"/>
+                      <a:tailEnd type="none" w="med" len="med"/>
+                    </a:lnT>
+                    <a:lnB w="12700" cap="flat" cmpd="sng" algn="ctr">
+                      <a:solidFill>
+                        <a:srgbClr val="C5C6C4"/>
+                      </a:solidFill>
+                      <a:prstDash val="solid"/>
+                      <a:round/>
+                      <a:headEnd type="none" w="med" len="med"/>
+                      <a:tailEnd type="none" w="med" len="med"/>
+                    </a:lnB>
+                  </a:tcPr>
+                </a:tc>
+              </a:tr>
+              <a:tr h="711200">
+                <a:tc>
+                  <a:txBody>
+                    <a:bodyPr/>
+                    <a:lstStyle/>
+                    <a:p>
+                      <a:pPr indent="0" marL="0">
+                        <a:lnSpc>
+                          <a:spcPts val="2198"/>
+                        </a:lnSpc>
+                        <a:buNone/>
+                      </a:pPr>
+                      <a:r>
+                        <a:rPr lang="en-US" sz="1570" dirty="0">
+                          <a:solidFill>
+                            <a:srgbClr val="10212B"/>
+                          </a:solidFill>
+                          <a:latin typeface="Verdana" pitchFamily="34" charset="0"/>
+                          <a:ea typeface="Verdana" pitchFamily="34" charset="-122"/>
+                          <a:cs typeface="Verdana" pitchFamily="34" charset="-120"/>
+                        </a:rPr>
+                        <a:t>Are we exposed to this vulnerability?</a:t>
+                      </a:r>
+                      <a:endParaRPr lang="en-US" sz="1570" dirty="0">
+                        <a:latin typeface="Verdana" charset="0"/>
+                        <a:ea typeface="Verdana" charset="0"/>
+                        <a:cs typeface="Verdana" charset="0"/>
+                      </a:endParaRPr>
+                    </a:p>
+                  </a:txBody>
+                  <a:tcPr marL="69787" marR="69787" marT="69787" marB="69787" anchor="t">
+                    <a:lnL w="0" cap="flat" cmpd="sng" algn="ctr">
+                      <a:noFill/>
+                    </a:lnL>
+                    <a:lnR w="12700" cap="flat" cmpd="sng" algn="ctr">
+                      <a:solidFill>
+                        <a:srgbClr val="BFC1BE"/>
+                      </a:solidFill>
+                      <a:prstDash val="solid"/>
+                      <a:round/>
+                      <a:headEnd type="none" w="med" len="med"/>
+                      <a:tailEnd type="none" w="med" len="med"/>
+                    </a:lnR>
+                    <a:lnT w="12700" cap="flat" cmpd="sng" algn="ctr">
+                      <a:solidFill>
+                        <a:srgbClr val="C5C6C4"/>
+                      </a:solidFill>
+                      <a:prstDash val="solid"/>
+                      <a:round/>
+                      <a:headEnd type="none" w="med" len="med"/>
+                      <a:tailEnd type="none" w="med" len="med"/>
+                    </a:lnT>
+                    <a:lnB w="12700" cap="flat" cmpd="sng" algn="ctr">
+                      <a:solidFill>
+                        <a:srgbClr val="BFC1BE"/>
+                      </a:solidFill>
+                      <a:prstDash val="solid"/>
+                      <a:round/>
+                      <a:headEnd type="none" w="med" len="med"/>
+                      <a:tailEnd type="none" w="med" len="med"/>
+                    </a:lnB>
+                    <a:solidFill>
+                      <a:srgbClr val="EFF2EE"/>
+                    </a:solidFill>
+                  </a:tcPr>
+                </a:tc>
+                <a:tc>
+                  <a:txBody>
+                    <a:bodyPr/>
+                    <a:lstStyle/>
+                    <a:p>
+                      <a:pPr indent="0" marL="0">
+                        <a:lnSpc>
+                          <a:spcPts val="2198"/>
+                        </a:lnSpc>
+                        <a:buNone/>
+                      </a:pPr>
+                      <a:r>
+                        <a:rPr lang="en-US" sz="1570" dirty="0">
+                          <a:solidFill>
+                            <a:srgbClr val="10212B"/>
+                          </a:solidFill>
+                          <a:latin typeface="Verdana" pitchFamily="34" charset="0"/>
+                          <a:ea typeface="Verdana" pitchFamily="34" charset="-122"/>
+                          <a:cs typeface="Verdana" pitchFamily="34" charset="-120"/>
+                        </a:rPr>
+                        <a:t>Ask every team, wait</a:t>
+                      </a:r>
+                      <a:endParaRPr lang="en-US" sz="1570" dirty="0">
+                        <a:latin typeface="Verdana" charset="0"/>
+                        <a:ea typeface="Verdana" charset="0"/>
+                        <a:cs typeface="Verdana" charset="0"/>
+                      </a:endParaRPr>
+                    </a:p>
+                  </a:txBody>
+                  <a:tcPr marL="69787" marR="69787" marT="69787" marB="69787" anchor="t">
+                    <a:lnL w="12700" cap="flat" cmpd="sng" algn="ctr">
+                      <a:solidFill>
+                        <a:srgbClr val="BFC1BE"/>
+                      </a:solidFill>
+                      <a:prstDash val="solid"/>
+                      <a:round/>
+                      <a:headEnd type="none" w="med" len="med"/>
+                      <a:tailEnd type="none" w="med" len="med"/>
+                    </a:lnL>
+                    <a:lnR w="12700" cap="flat" cmpd="sng" algn="ctr">
+                      <a:solidFill>
+                        <a:srgbClr val="BFC1BE"/>
+                      </a:solidFill>
+                      <a:prstDash val="solid"/>
+                      <a:round/>
+                      <a:headEnd type="none" w="med" len="med"/>
+                      <a:tailEnd type="none" w="med" len="med"/>
+                    </a:lnR>
+                    <a:lnT w="12700" cap="flat" cmpd="sng" algn="ctr">
+                      <a:solidFill>
+                        <a:srgbClr val="C5C6C4"/>
+                      </a:solidFill>
+                      <a:prstDash val="solid"/>
+                      <a:round/>
+                      <a:headEnd type="none" w="med" len="med"/>
+                      <a:tailEnd type="none" w="med" len="med"/>
+                    </a:lnT>
+                    <a:lnB w="12700" cap="flat" cmpd="sng" algn="ctr">
+                      <a:solidFill>
+                        <a:srgbClr val="BFC1BE"/>
+                      </a:solidFill>
+                      <a:prstDash val="solid"/>
+                      <a:round/>
+                      <a:headEnd type="none" w="med" len="med"/>
+                      <a:tailEnd type="none" w="med" len="med"/>
+                    </a:lnB>
+                    <a:solidFill>
+                      <a:srgbClr val="EFF2EE"/>
+                    </a:solidFill>
+                  </a:tcPr>
+                </a:tc>
+                <a:tc>
+                  <a:txBody>
+                    <a:bodyPr/>
+                    <a:lstStyle/>
+                    <a:p>
+                      <a:pPr indent="0" marL="0">
+                        <a:lnSpc>
+                          <a:spcPts val="2198"/>
+                        </a:lnSpc>
+                        <a:buNone/>
+                      </a:pPr>
+                      <a:r>
+                        <a:rPr lang="en-US" sz="1570" dirty="0">
+                          <a:solidFill>
+                            <a:srgbClr val="10212B"/>
+                          </a:solidFill>
+                          <a:latin typeface="Verdana" pitchFamily="34" charset="0"/>
+                          <a:ea typeface="Verdana" pitchFamily="34" charset="-122"/>
+                          <a:cs typeface="Verdana" pitchFamily="34" charset="-120"/>
+                        </a:rPr>
+                        <a:t>Search one document</a:t>
+                      </a:r>
+                      <a:endParaRPr lang="en-US" sz="1570" dirty="0">
+                        <a:latin typeface="Verdana" charset="0"/>
+                        <a:ea typeface="Verdana" charset="0"/>
+                        <a:cs typeface="Verdana" charset="0"/>
+                      </a:endParaRPr>
+                    </a:p>
+                  </a:txBody>
+                  <a:tcPr marL="69787" marR="69787" marT="69787" marB="69787" anchor="t">
+                    <a:lnL w="12700" cap="flat" cmpd="sng" algn="ctr">
+                      <a:solidFill>
+                        <a:srgbClr val="BFC1BE"/>
+                      </a:solidFill>
+                      <a:prstDash val="solid"/>
+                      <a:round/>
+                      <a:headEnd type="none" w="med" len="med"/>
+                      <a:tailEnd type="none" w="med" len="med"/>
+                    </a:lnL>
+                    <a:lnR w="12700" cap="flat" cmpd="sng" algn="ctr">
+                      <a:solidFill>
+                        <a:srgbClr val="BFC1BE"/>
+                      </a:solidFill>
+                      <a:prstDash val="solid"/>
+                      <a:round/>
+                      <a:headEnd type="none" w="med" len="med"/>
+                      <a:tailEnd type="none" w="med" len="med"/>
+                    </a:lnR>
+                    <a:lnT w="12700" cap="flat" cmpd="sng" algn="ctr">
+                      <a:solidFill>
+                        <a:srgbClr val="C5C6C4"/>
+                      </a:solidFill>
+                      <a:prstDash val="solid"/>
+                      <a:round/>
+                      <a:headEnd type="none" w="med" len="med"/>
+                      <a:tailEnd type="none" w="med" len="med"/>
+                    </a:lnT>
+                    <a:lnB w="12700" cap="flat" cmpd="sng" algn="ctr">
+                      <a:solidFill>
+                        <a:srgbClr val="BFC1BE"/>
+                      </a:solidFill>
+                      <a:prstDash val="solid"/>
+                      <a:round/>
+                      <a:headEnd type="none" w="med" len="med"/>
+                      <a:tailEnd type="none" w="med" len="med"/>
+                    </a:lnB>
+                    <a:solidFill>
+                      <a:srgbClr val="EFF2EE"/>
+                    </a:solidFill>
+                  </a:tcPr>
+                </a:tc>
+              </a:tr>
+              <a:tr h="711200">
+                <a:tc>
+                  <a:txBody>
+                    <a:bodyPr/>
+                    <a:lstStyle/>
+                    <a:p>
+                      <a:pPr indent="0" marL="0">
+                        <a:lnSpc>
+                          <a:spcPts val="2198"/>
+                        </a:lnSpc>
+                        <a:buNone/>
+                      </a:pPr>
+                      <a:r>
+                        <a:rPr lang="en-US" sz="1570" dirty="0">
+                          <a:solidFill>
+                            <a:srgbClr val="10212B"/>
+                          </a:solidFill>
+                          <a:latin typeface="Verdana" pitchFamily="34" charset="0"/>
+                          <a:ea typeface="Verdana" pitchFamily="34" charset="-122"/>
+                          <a:cs typeface="Verdana" pitchFamily="34" charset="-120"/>
+                        </a:rPr>
+                        <a:t>Can we pass this customer's review?</a:t>
+                      </a:r>
+                      <a:endParaRPr lang="en-US" sz="1570" dirty="0">
+                        <a:latin typeface="Verdana" charset="0"/>
+                        <a:ea typeface="Verdana" charset="0"/>
+                        <a:cs typeface="Verdana" charset="0"/>
+                      </a:endParaRPr>
+                    </a:p>
+                  </a:txBody>
+                  <a:tcPr marL="69787" marR="69787" marT="69787" marB="69787" anchor="t">
+                    <a:lnL w="0" cap="flat" cmpd="sng" algn="ctr">
+                      <a:noFill/>
+                    </a:lnL>
+                    <a:lnR w="12700" cap="flat" cmpd="sng" algn="ctr">
+                      <a:solidFill>
+                        <a:srgbClr val="C5C6C4"/>
+                      </a:solidFill>
+                      <a:prstDash val="solid"/>
+                      <a:round/>
+                      <a:headEnd type="none" w="med" len="med"/>
+                      <a:tailEnd type="none" w="med" len="med"/>
+                    </a:lnR>
+                    <a:lnT w="12700" cap="flat" cmpd="sng" algn="ctr">
+                      <a:solidFill>
+                        <a:srgbClr val="BFC1BE"/>
+                      </a:solidFill>
+                      <a:prstDash val="solid"/>
+                      <a:round/>
+                      <a:headEnd type="none" w="med" len="med"/>
+                      <a:tailEnd type="none" w="med" len="med"/>
+                    </a:lnT>
+                    <a:lnB w="12700" cap="flat" cmpd="sng" algn="ctr">
+                      <a:solidFill>
+                        <a:srgbClr val="C5C6C4"/>
+                      </a:solidFill>
+                      <a:prstDash val="solid"/>
+                      <a:round/>
+                      <a:headEnd type="none" w="med" len="med"/>
+                      <a:tailEnd type="none" w="med" len="med"/>
+                    </a:lnB>
+                  </a:tcPr>
+                </a:tc>
+                <a:tc>
+                  <a:txBody>
+                    <a:bodyPr/>
+                    <a:lstStyle/>
+                    <a:p>
+                      <a:pPr indent="0" marL="0">
+                        <a:lnSpc>
+                          <a:spcPts val="2198"/>
+                        </a:lnSpc>
+                        <a:buNone/>
+                      </a:pPr>
+                      <a:r>
+                        <a:rPr lang="en-US" sz="1570" dirty="0">
+                          <a:solidFill>
+                            <a:srgbClr val="10212B"/>
+                          </a:solidFill>
+                          <a:latin typeface="Verdana" pitchFamily="34" charset="0"/>
+                          <a:ea typeface="Verdana" pitchFamily="34" charset="-122"/>
+                          <a:cs typeface="Verdana" pitchFamily="34" charset="-120"/>
+                        </a:rPr>
+                        <a:t>Rebuilt by hand each time</a:t>
+                      </a:r>
+                      <a:endParaRPr lang="en-US" sz="1570" dirty="0">
+                        <a:latin typeface="Verdana" charset="0"/>
+                        <a:ea typeface="Verdana" charset="0"/>
+                        <a:cs typeface="Verdana" charset="0"/>
+                      </a:endParaRPr>
+                    </a:p>
+                  </a:txBody>
+                  <a:tcPr marL="69787" marR="69787" marT="69787" marB="69787" anchor="t">
+                    <a:lnL w="12700" cap="flat" cmpd="sng" algn="ctr">
+                      <a:solidFill>
+                        <a:srgbClr val="C5C6C4"/>
+                      </a:solidFill>
+                      <a:prstDash val="solid"/>
+                      <a:round/>
+                      <a:headEnd type="none" w="med" len="med"/>
+                      <a:tailEnd type="none" w="med" len="med"/>
+                    </a:lnL>
+                    <a:lnR w="12700" cap="flat" cmpd="sng" algn="ctr">
+                      <a:solidFill>
+                        <a:srgbClr val="C5C6C4"/>
+                      </a:solidFill>
+                      <a:prstDash val="solid"/>
+                      <a:round/>
+                      <a:headEnd type="none" w="med" len="med"/>
+                      <a:tailEnd type="none" w="med" len="med"/>
+                    </a:lnR>
+                    <a:lnT w="12700" cap="flat" cmpd="sng" algn="ctr">
+                      <a:solidFill>
+                        <a:srgbClr val="BFC1BE"/>
+                      </a:solidFill>
+                      <a:prstDash val="solid"/>
+                      <a:round/>
+                      <a:headEnd type="none" w="med" len="med"/>
+                      <a:tailEnd type="none" w="med" len="med"/>
+                    </a:lnT>
+                    <a:lnB w="12700" cap="flat" cmpd="sng" algn="ctr">
+                      <a:solidFill>
+                        <a:srgbClr val="C5C6C4"/>
+                      </a:solidFill>
+                      <a:prstDash val="solid"/>
+                      <a:round/>
+                      <a:headEnd type="none" w="med" len="med"/>
+                      <a:tailEnd type="none" w="med" len="med"/>
+                    </a:lnB>
+                  </a:tcPr>
+                </a:tc>
+                <a:tc>
+                  <a:txBody>
+                    <a:bodyPr/>
+                    <a:lstStyle/>
+                    <a:p>
+                      <a:pPr indent="0" marL="0">
+                        <a:lnSpc>
+                          <a:spcPts val="2198"/>
+                        </a:lnSpc>
+                        <a:buNone/>
+                      </a:pPr>
+                      <a:r>
+                        <a:rPr lang="en-US" sz="1570" dirty="0">
+                          <a:solidFill>
+                            <a:srgbClr val="10212B"/>
+                          </a:solidFill>
+                          <a:latin typeface="Verdana" pitchFamily="34" charset="0"/>
+                          <a:ea typeface="Verdana" pitchFamily="34" charset="-122"/>
+                          <a:cs typeface="Verdana" pitchFamily="34" charset="-120"/>
+                        </a:rPr>
+                        <a:t>Attach the standard file</a:t>
+                      </a:r>
+                      <a:endParaRPr lang="en-US" sz="1570" dirty="0">
+                        <a:latin typeface="Verdana" charset="0"/>
+                        <a:ea typeface="Verdana" charset="0"/>
+                        <a:cs typeface="Verdana" charset="0"/>
+                      </a:endParaRPr>
+                    </a:p>
+                  </a:txBody>
+                  <a:tcPr marL="69787" marR="69787" marT="69787" marB="69787" anchor="t">
+                    <a:lnL w="12700" cap="flat" cmpd="sng" algn="ctr">
+                      <a:solidFill>
+                        <a:srgbClr val="C5C6C4"/>
+                      </a:solidFill>
+                      <a:prstDash val="solid"/>
+                      <a:round/>
+                      <a:headEnd type="none" w="med" len="med"/>
+                      <a:tailEnd type="none" w="med" len="med"/>
+                    </a:lnL>
+                    <a:lnR w="12700" cap="flat" cmpd="sng" algn="ctr">
+                      <a:solidFill>
+                        <a:srgbClr val="C5C6C4"/>
+                      </a:solidFill>
+                      <a:prstDash val="solid"/>
+                      <a:round/>
+                      <a:headEnd type="none" w="med" len="med"/>
+                      <a:tailEnd type="none" w="med" len="med"/>
+                    </a:lnR>
+                    <a:lnT w="12700" cap="flat" cmpd="sng" algn="ctr">
+                      <a:solidFill>
+                        <a:srgbClr val="BFC1BE"/>
+                      </a:solidFill>
+                      <a:prstDash val="solid"/>
+                      <a:round/>
+                      <a:headEnd type="none" w="med" len="med"/>
+                      <a:tailEnd type="none" w="med" len="med"/>
+                    </a:lnT>
+                    <a:lnB w="12700" cap="flat" cmpd="sng" algn="ctr">
+                      <a:solidFill>
+                        <a:srgbClr val="C5C6C4"/>
+                      </a:solidFill>
+                      <a:prstDash val="solid"/>
+                      <a:round/>
+                      <a:headEnd type="none" w="med" len="med"/>
+                      <a:tailEnd type="none" w="med" len="med"/>
+                    </a:lnB>
+                  </a:tcPr>
+                </a:tc>
+              </a:tr>
+              <a:tr h="711200">
+                <a:tc>
+                  <a:txBody>
+                    <a:bodyPr/>
+                    <a:lstStyle/>
+                    <a:p>
+                      <a:pPr indent="0" marL="0">
+                        <a:lnSpc>
+                          <a:spcPts val="2198"/>
+                        </a:lnSpc>
+                        <a:buNone/>
+                      </a:pPr>
+                      <a:r>
+                        <a:rPr lang="en-US" sz="1570" dirty="0">
+                          <a:solidFill>
+                            <a:srgbClr val="10212B"/>
+                          </a:solidFill>
+                          <a:latin typeface="Verdana" pitchFamily="34" charset="0"/>
+                          <a:ea typeface="Verdana" pitchFamily="34" charset="-122"/>
+                          <a:cs typeface="Verdana" pitchFamily="34" charset="-120"/>
+                        </a:rPr>
+                        <a:t>Did a restricted license get in?</a:t>
+                      </a:r>
+                      <a:endParaRPr lang="en-US" sz="1570" dirty="0">
+                        <a:latin typeface="Verdana" charset="0"/>
+                        <a:ea typeface="Verdana" charset="0"/>
+                        <a:cs typeface="Verdana" charset="0"/>
+                      </a:endParaRPr>
+                    </a:p>
+                  </a:txBody>
+                  <a:tcPr marL="69787" marR="69787" marT="69787" marB="69787" anchor="t">
+                    <a:lnL w="0" cap="flat" cmpd="sng" algn="ctr">
+                      <a:noFill/>
+                    </a:lnL>
+                    <a:lnR w="12700" cap="flat" cmpd="sng" algn="ctr">
+                      <a:solidFill>
+                        <a:srgbClr val="BFC1BE"/>
+                      </a:solidFill>
+                      <a:prstDash val="solid"/>
+                      <a:round/>
+                      <a:headEnd type="none" w="med" len="med"/>
+                      <a:tailEnd type="none" w="med" len="med"/>
+                    </a:lnR>
+                    <a:lnT w="12700" cap="flat" cmpd="sng" algn="ctr">
+                      <a:solidFill>
+                        <a:srgbClr val="C5C6C4"/>
+                      </a:solidFill>
+                      <a:prstDash val="solid"/>
+                      <a:round/>
+                      <a:headEnd type="none" w="med" len="med"/>
+                      <a:tailEnd type="none" w="med" len="med"/>
+                    </a:lnT>
+                    <a:lnB w="12700" cap="flat" cmpd="sng" algn="ctr">
+                      <a:solidFill>
+                        <a:srgbClr val="BFC1BE"/>
+                      </a:solidFill>
+                      <a:prstDash val="solid"/>
+                      <a:round/>
+                      <a:headEnd type="none" w="med" len="med"/>
+                      <a:tailEnd type="none" w="med" len="med"/>
+                    </a:lnB>
+                    <a:solidFill>
+                      <a:srgbClr val="EFF2EE"/>
+                    </a:solidFill>
+                  </a:tcPr>
+                </a:tc>
+                <a:tc>
+                  <a:txBody>
+                    <a:bodyPr/>
+                    <a:lstStyle/>
+                    <a:p>
+                      <a:pPr indent="0" marL="0">
+                        <a:lnSpc>
+                          <a:spcPts val="2198"/>
+                        </a:lnSpc>
+                        <a:buNone/>
+                      </a:pPr>
+                      <a:r>
+                        <a:rPr lang="en-US" sz="1570" dirty="0">
+                          <a:solidFill>
+                            <a:srgbClr val="10212B"/>
+                          </a:solidFill>
+                          <a:latin typeface="Verdana" pitchFamily="34" charset="0"/>
+                          <a:ea typeface="Verdana" pitchFamily="34" charset="-122"/>
+                          <a:cs typeface="Verdana" pitchFamily="34" charset="-120"/>
+                        </a:rPr>
+                        <a:t>Nobody is checking</a:t>
+                      </a:r>
+                      <a:endParaRPr lang="en-US" sz="1570" dirty="0">
+                        <a:latin typeface="Verdana" charset="0"/>
+                        <a:ea typeface="Verdana" charset="0"/>
+                        <a:cs typeface="Verdana" charset="0"/>
+                      </a:endParaRPr>
+                    </a:p>
+                  </a:txBody>
+                  <a:tcPr marL="69787" marR="69787" marT="69787" marB="69787" anchor="t">
+                    <a:lnL w="12700" cap="flat" cmpd="sng" algn="ctr">
+                      <a:solidFill>
+                        <a:srgbClr val="BFC1BE"/>
+                      </a:solidFill>
+                      <a:prstDash val="solid"/>
+                      <a:round/>
+                      <a:headEnd type="none" w="med" len="med"/>
+                      <a:tailEnd type="none" w="med" len="med"/>
+                    </a:lnL>
+                    <a:lnR w="12700" cap="flat" cmpd="sng" algn="ctr">
+                      <a:solidFill>
+                        <a:srgbClr val="BFC1BE"/>
+                      </a:solidFill>
+                      <a:prstDash val="solid"/>
+                      <a:round/>
+                      <a:headEnd type="none" w="med" len="med"/>
+                      <a:tailEnd type="none" w="med" len="med"/>
+                    </a:lnR>
+                    <a:lnT w="12700" cap="flat" cmpd="sng" algn="ctr">
+                      <a:solidFill>
+                        <a:srgbClr val="C5C6C4"/>
+                      </a:solidFill>
+                      <a:prstDash val="solid"/>
+                      <a:round/>
+                      <a:headEnd type="none" w="med" len="med"/>
+                      <a:tailEnd type="none" w="med" len="med"/>
+                    </a:lnT>
+                    <a:lnB w="12700" cap="flat" cmpd="sng" algn="ctr">
+                      <a:solidFill>
+                        <a:srgbClr val="BFC1BE"/>
+                      </a:solidFill>
+                      <a:prstDash val="solid"/>
+                      <a:round/>
+                      <a:headEnd type="none" w="med" len="med"/>
+                      <a:tailEnd type="none" w="med" len="med"/>
+                    </a:lnB>
+                    <a:solidFill>
+                      <a:srgbClr val="EFF2EE"/>
+                    </a:solidFill>
+                  </a:tcPr>
+                </a:tc>
+                <a:tc>
+                  <a:txBody>
+                    <a:bodyPr/>
+                    <a:lstStyle/>
+                    <a:p>
+                      <a:pPr indent="0" marL="0">
+                        <a:lnSpc>
+                          <a:spcPts val="2198"/>
+                        </a:lnSpc>
+                        <a:buNone/>
+                      </a:pPr>
+                      <a:r>
+                        <a:rPr lang="en-US" sz="1570" dirty="0">
+                          <a:solidFill>
+                            <a:srgbClr val="10212B"/>
+                          </a:solidFill>
+                          <a:latin typeface="Verdana" pitchFamily="34" charset="0"/>
+                          <a:ea typeface="Verdana" pitchFamily="34" charset="-122"/>
+                          <a:cs typeface="Verdana" pitchFamily="34" charset="-120"/>
+                        </a:rPr>
+                        <a:t>The build stops before it ships</a:t>
+                      </a:r>
+                      <a:endParaRPr lang="en-US" sz="1570" dirty="0">
+                        <a:latin typeface="Verdana" charset="0"/>
+                        <a:ea typeface="Verdana" charset="0"/>
+                        <a:cs typeface="Verdana" charset="0"/>
+                      </a:endParaRPr>
+                    </a:p>
+                  </a:txBody>
+                  <a:tcPr marL="69787" marR="69787" marT="69787" marB="69787" anchor="t">
+                    <a:lnL w="12700" cap="flat" cmpd="sng" algn="ctr">
+                      <a:solidFill>
+                        <a:srgbClr val="BFC1BE"/>
+                      </a:solidFill>
+                      <a:prstDash val="solid"/>
+                      <a:round/>
+                      <a:headEnd type="none" w="med" len="med"/>
+                      <a:tailEnd type="none" w="med" len="med"/>
+                    </a:lnL>
+                    <a:lnR w="12700" cap="flat" cmpd="sng" algn="ctr">
+                      <a:solidFill>
+                        <a:srgbClr val="BFC1BE"/>
+                      </a:solidFill>
+                      <a:prstDash val="solid"/>
+                      <a:round/>
+                      <a:headEnd type="none" w="med" len="med"/>
+                      <a:tailEnd type="none" w="med" len="med"/>
+                    </a:lnR>
+                    <a:lnT w="12700" cap="flat" cmpd="sng" algn="ctr">
+                      <a:solidFill>
+                        <a:srgbClr val="C5C6C4"/>
+                      </a:solidFill>
+                      <a:prstDash val="solid"/>
+                      <a:round/>
+                      <a:headEnd type="none" w="med" len="med"/>
+                      <a:tailEnd type="none" w="med" len="med"/>
+                    </a:lnT>
+                    <a:lnB w="12700" cap="flat" cmpd="sng" algn="ctr">
+                      <a:solidFill>
+                        <a:srgbClr val="BFC1BE"/>
+                      </a:solidFill>
+                      <a:prstDash val="solid"/>
+                      <a:round/>
+                      <a:headEnd type="none" w="med" len="med"/>
+                      <a:tailEnd type="none" w="med" len="med"/>
+                    </a:lnB>
+                    <a:solidFill>
+                      <a:srgbClr val="EFF2EE"/>
+                    </a:solidFill>
+                  </a:tcPr>
+                </a:tc>
+              </a:tr>
+              <a:tr h="432098">
+                <a:tc>
+                  <a:txBody>
+                    <a:bodyPr/>
+                    <a:lstStyle/>
+                    <a:p>
+                      <a:pPr indent="0" marL="0">
+                        <a:lnSpc>
+                          <a:spcPts val="2198"/>
+                        </a:lnSpc>
+                        <a:buNone/>
+                      </a:pPr>
+                      <a:r>
+                        <a:rPr lang="en-US" sz="1570" dirty="0">
+                          <a:solidFill>
+                            <a:srgbClr val="10212B"/>
+                          </a:solidFill>
+                          <a:latin typeface="Verdana" pitchFamily="34" charset="0"/>
+                          <a:ea typeface="Verdana" pitchFamily="34" charset="-122"/>
+                          <a:cs typeface="Verdana" pitchFamily="34" charset="-120"/>
+                        </a:rPr>
+                        <a:t>Can we trust a supplier's SBOM?</a:t>
+                      </a:r>
+                      <a:endParaRPr lang="en-US" sz="1570" dirty="0">
+                        <a:latin typeface="Verdana" charset="0"/>
+                        <a:ea typeface="Verdana" charset="0"/>
+                        <a:cs typeface="Verdana" charset="0"/>
+                      </a:endParaRPr>
+                    </a:p>
+                  </a:txBody>
+                  <a:tcPr marL="69787" marR="69787" marT="69787" marB="69787" anchor="t">
+                    <a:lnL w="0" cap="flat" cmpd="sng" algn="ctr">
+                      <a:noFill/>
+                    </a:lnL>
+                    <a:lnR w="12700" cap="flat" cmpd="sng" algn="ctr">
+                      <a:solidFill>
+                        <a:srgbClr val="C5C6C4"/>
+                      </a:solidFill>
+                      <a:prstDash val="solid"/>
+                      <a:round/>
+                      <a:headEnd type="none" w="med" len="med"/>
+                      <a:tailEnd type="none" w="med" len="med"/>
+                    </a:lnR>
+                    <a:lnT w="12700" cap="flat" cmpd="sng" algn="ctr">
+                      <a:solidFill>
+                        <a:srgbClr val="BFC1BE"/>
+                      </a:solidFill>
+                      <a:prstDash val="solid"/>
+                      <a:round/>
+                      <a:headEnd type="none" w="med" len="med"/>
+                      <a:tailEnd type="none" w="med" len="med"/>
+                    </a:lnT>
+                    <a:lnB w="12700" cap="flat" cmpd="sng" algn="ctr">
+                      <a:solidFill>
+                        <a:srgbClr val="C5C6C4"/>
+                      </a:solidFill>
+                      <a:prstDash val="solid"/>
+                      <a:round/>
+                      <a:headEnd type="none" w="med" len="med"/>
+                      <a:tailEnd type="none" w="med" len="med"/>
+                    </a:lnB>
+                  </a:tcPr>
+                </a:tc>
+                <a:tc>
+                  <a:txBody>
+                    <a:bodyPr/>
+                    <a:lstStyle/>
+                    <a:p>
+                      <a:pPr indent="0" marL="0">
+                        <a:lnSpc>
+                          <a:spcPts val="2198"/>
+                        </a:lnSpc>
+                        <a:buNone/>
+                      </a:pPr>
+                      <a:r>
+                        <a:rPr lang="en-US" sz="1570" dirty="0">
+                          <a:solidFill>
+                            <a:srgbClr val="10212B"/>
+                          </a:solidFill>
+                          <a:latin typeface="Verdana" pitchFamily="34" charset="0"/>
+                          <a:ea typeface="Verdana" pitchFamily="34" charset="-122"/>
+                          <a:cs typeface="Verdana" pitchFamily="34" charset="-120"/>
+                        </a:rPr>
+                        <a:t>Take it on faith</a:t>
+                      </a:r>
+                      <a:endParaRPr lang="en-US" sz="1570" dirty="0">
+                        <a:latin typeface="Verdana" charset="0"/>
+                        <a:ea typeface="Verdana" charset="0"/>
+                        <a:cs typeface="Verdana" charset="0"/>
+                      </a:endParaRPr>
+                    </a:p>
+                  </a:txBody>
+                  <a:tcPr marL="69787" marR="69787" marT="69787" marB="69787" anchor="t">
+                    <a:lnL w="12700" cap="flat" cmpd="sng" algn="ctr">
+                      <a:solidFill>
+                        <a:srgbClr val="C5C6C4"/>
+                      </a:solidFill>
+                      <a:prstDash val="solid"/>
+                      <a:round/>
+                      <a:headEnd type="none" w="med" len="med"/>
+                      <a:tailEnd type="none" w="med" len="med"/>
+                    </a:lnL>
+                    <a:lnR w="12700" cap="flat" cmpd="sng" algn="ctr">
+                      <a:solidFill>
+                        <a:srgbClr val="C5C6C4"/>
+                      </a:solidFill>
+                      <a:prstDash val="solid"/>
+                      <a:round/>
+                      <a:headEnd type="none" w="med" len="med"/>
+                      <a:tailEnd type="none" w="med" len="med"/>
+                    </a:lnR>
+                    <a:lnT w="12700" cap="flat" cmpd="sng" algn="ctr">
+                      <a:solidFill>
+                        <a:srgbClr val="BFC1BE"/>
+                      </a:solidFill>
+                      <a:prstDash val="solid"/>
+                      <a:round/>
+                      <a:headEnd type="none" w="med" len="med"/>
+                      <a:tailEnd type="none" w="med" len="med"/>
+                    </a:lnT>
+                    <a:lnB w="12700" cap="flat" cmpd="sng" algn="ctr">
+                      <a:solidFill>
+                        <a:srgbClr val="C5C6C4"/>
+                      </a:solidFill>
+                      <a:prstDash val="solid"/>
+                      <a:round/>
+                      <a:headEnd type="none" w="med" len="med"/>
+                      <a:tailEnd type="none" w="med" len="med"/>
+                    </a:lnB>
+                  </a:tcPr>
+                </a:tc>
+                <a:tc>
+                  <a:txBody>
+                    <a:bodyPr/>
+                    <a:lstStyle/>
+                    <a:p>
+                      <a:pPr indent="0" marL="0">
+                        <a:lnSpc>
+                          <a:spcPts val="2198"/>
+                        </a:lnSpc>
+                        <a:buNone/>
+                      </a:pPr>
+                      <a:r>
+                        <a:rPr lang="en-US" sz="1570" dirty="0">
+                          <a:solidFill>
+                            <a:srgbClr val="10212B"/>
+                          </a:solidFill>
+                          <a:latin typeface="Verdana" pitchFamily="34" charset="0"/>
+                          <a:ea typeface="Verdana" pitchFamily="34" charset="-122"/>
+                          <a:cs typeface="Verdana" pitchFamily="34" charset="-120"/>
+                        </a:rPr>
+                        <a:t>Checked before we accept it</a:t>
+                      </a:r>
+                      <a:endParaRPr lang="en-US" sz="1570" dirty="0">
+                        <a:latin typeface="Verdana" charset="0"/>
+                        <a:ea typeface="Verdana" charset="0"/>
+                        <a:cs typeface="Verdana" charset="0"/>
+                      </a:endParaRPr>
+                    </a:p>
+                  </a:txBody>
+                  <a:tcPr marL="69787" marR="69787" marT="69787" marB="69787" anchor="t">
+                    <a:lnL w="12700" cap="flat" cmpd="sng" algn="ctr">
+                      <a:solidFill>
+                        <a:srgbClr val="C5C6C4"/>
+                      </a:solidFill>
+                      <a:prstDash val="solid"/>
+                      <a:round/>
+                      <a:headEnd type="none" w="med" len="med"/>
+                      <a:tailEnd type="none" w="med" len="med"/>
+                    </a:lnL>
+                    <a:lnR w="12700" cap="flat" cmpd="sng" algn="ctr">
+                      <a:solidFill>
+                        <a:srgbClr val="C5C6C4"/>
+                      </a:solidFill>
+                      <a:prstDash val="solid"/>
+                      <a:round/>
+                      <a:headEnd type="none" w="med" len="med"/>
+                      <a:tailEnd type="none" w="med" len="med"/>
+                    </a:lnR>
+                    <a:lnT w="12700" cap="flat" cmpd="sng" algn="ctr">
+                      <a:solidFill>
+                        <a:srgbClr val="BFC1BE"/>
+                      </a:solidFill>
+                      <a:prstDash val="solid"/>
+                      <a:round/>
+                      <a:headEnd type="none" w="med" len="med"/>
+                      <a:tailEnd type="none" w="med" len="med"/>
+                    </a:lnT>
+                    <a:lnB w="12700" cap="flat" cmpd="sng" algn="ctr">
+                      <a:solidFill>
+                        <a:srgbClr val="C5C6C4"/>
+                      </a:solidFill>
+                      <a:prstDash val="solid"/>
+                      <a:round/>
+                      <a:headEnd type="none" w="med" len="med"/>
+                      <a:tailEnd type="none" w="med" len="med"/>
+                    </a:lnB>
+                  </a:tcPr>
+                </a:tc>
+              </a:tr>
+            </a:tbl>
+          </a:graphicData>
+        </a:graphic>
+      </p:graphicFrame>
+      <p:sp>
+        <p:nvSpPr>
+          <p:cNvPr id="6" name="Text 3"/>
+          <p:cNvSpPr/>
+          <p:nvPr/>
+        </p:nvSpPr>
+        <p:spPr>
+          <a:xfrm>
+            <a:off x="812800" y="5562402"/>
+            <a:ext cx="10595610" cy="304998"/>
           </a:xfrm>
           <a:prstGeom prst="rect">
             <a:avLst/>
@@ -4807,296 +6659,22 @@
           <a:p>
             <a:pPr algn="l" indent="0" marL="0">
               <a:lnSpc>
-                <a:spcPts val="2072"/>
+                <a:spcPts val="2219"/>
               </a:lnSpc>
               <a:buNone/>
             </a:pPr>
             <a:r>
-              <a:rPr lang="en-US" sz="1727" b="1" dirty="0">
-                <a:solidFill>
-                  <a:srgbClr val="10212B"/>
-                </a:solidFill>
-                <a:latin typeface="IBM Plex Sans" pitchFamily="34" charset="0"/>
-                <a:ea typeface="IBM Plex Sans" pitchFamily="34" charset="-122"/>
-                <a:cs typeface="IBM Plex Sans" pitchFamily="34" charset="-120"/>
-              </a:rPr>
-              <a:t>This is not a security product</a:t>
-            </a:r>
-            <a:endParaRPr lang="en-US" sz="1727" dirty="0"/>
-          </a:p>
-        </p:txBody>
-      </p:sp>
-      <p:sp>
-        <p:nvSpPr>
-          <p:cNvPr id="5" name="Text 3"/>
-          <p:cNvSpPr/>
-          <p:nvPr/>
-        </p:nvSpPr>
-        <p:spPr>
-          <a:xfrm>
-            <a:off x="1073150" y="2131963"/>
-            <a:ext cx="10347071" cy="551309"/>
-          </a:xfrm>
-          <a:prstGeom prst="rect">
-            <a:avLst/>
-          </a:prstGeom>
-          <a:noFill/>
-          <a:ln/>
-        </p:spPr>
-        <p:txBody>
-          <a:bodyPr wrap="square" lIns="0" tIns="0" rIns="0" bIns="0" rtlCol="0" anchor="t">
-            <a:normAutofit/>
-          </a:bodyPr>
-          <a:lstStyle/>
-          <a:p>
-            <a:pPr algn="l" indent="0" marL="0">
-              <a:lnSpc>
-                <a:spcPts val="2086"/>
-              </a:lnSpc>
-              <a:buNone/>
-            </a:pPr>
-            <a:r>
-              <a:rPr lang="en-US" sz="1545" dirty="0">
+              <a:rPr lang="en-US" sz="1585" dirty="0">
                 <a:solidFill>
                   <a:srgbClr val="4A5568"/>
                 </a:solidFill>
-                <a:latin typeface="IBM Plex Sans" pitchFamily="34" charset="0"/>
-                <a:ea typeface="IBM Plex Sans" pitchFamily="34" charset="-122"/>
-                <a:cs typeface="IBM Plex Sans" pitchFamily="34" charset="-120"/>
+                <a:latin typeface="Verdana" pitchFamily="34" charset="0"/>
+                <a:ea typeface="Verdana" pitchFamily="34" charset="-122"/>
+                <a:cs typeface="Verdana" pitchFamily="34" charset="-120"/>
               </a:rPr>
-              <a:t>It tells us what we ship. The tools that hunt for vulnerabilities still do that job, and now they get a complete list to work from.</a:t>
+              <a:t>Same engineers, same release process. The answers stop being projects.</a:t>
             </a:r>
-            <a:endParaRPr lang="en-US" sz="1545" dirty="0"/>
-          </a:p>
-        </p:txBody>
-      </p:sp>
-      <p:sp>
-        <p:nvSpPr>
-          <p:cNvPr id="6" name="Shape 4"/>
-          <p:cNvSpPr/>
-          <p:nvPr/>
-        </p:nvSpPr>
-        <p:spPr>
-          <a:xfrm>
-            <a:off x="815975" y="3061097"/>
-            <a:ext cx="10560050" cy="1303139"/>
-          </a:xfrm>
-          <a:prstGeom prst="roundRect">
-            <a:avLst>
-              <a:gd name="adj" fmla="val 7553"/>
-            </a:avLst>
-          </a:prstGeom>
-          <a:solidFill>
-            <a:srgbClr val="FFFFFF"/>
-          </a:solidFill>
-          <a:ln w="6350">
-            <a:solidFill>
-              <a:srgbClr val="DFE3DE"/>
-            </a:solidFill>
-            <a:prstDash val="solid"/>
-          </a:ln>
-        </p:spPr>
-      </p:sp>
-      <p:sp>
-        <p:nvSpPr>
-          <p:cNvPr id="7" name="Text 5"/>
-          <p:cNvSpPr/>
-          <p:nvPr/>
-        </p:nvSpPr>
-        <p:spPr>
-          <a:xfrm>
-            <a:off x="1073150" y="3292872"/>
-            <a:ext cx="10347071" cy="288330"/>
-          </a:xfrm>
-          <a:prstGeom prst="rect">
-            <a:avLst/>
-          </a:prstGeom>
-          <a:noFill/>
-          <a:ln/>
-        </p:spPr>
-        <p:txBody>
-          <a:bodyPr wrap="square" lIns="0" tIns="0" rIns="0" bIns="0" rtlCol="0" anchor="t">
-            <a:normAutofit/>
-          </a:bodyPr>
-          <a:lstStyle/>
-          <a:p>
-            <a:pPr algn="l" indent="0" marL="0">
-              <a:lnSpc>
-                <a:spcPts val="2072"/>
-              </a:lnSpc>
-              <a:buNone/>
-            </a:pPr>
-            <a:r>
-              <a:rPr lang="en-US" sz="1727" b="1" dirty="0">
-                <a:solidFill>
-                  <a:srgbClr val="10212B"/>
-                </a:solidFill>
-                <a:latin typeface="IBM Plex Sans" pitchFamily="34" charset="0"/>
-                <a:ea typeface="IBM Plex Sans" pitchFamily="34" charset="-122"/>
-                <a:cs typeface="IBM Plex Sans" pitchFamily="34" charset="-120"/>
-              </a:rPr>
-              <a:t>It won't find what upstreams never published</a:t>
-            </a:r>
-            <a:endParaRPr lang="en-US" sz="1727" dirty="0"/>
-          </a:p>
-        </p:txBody>
-      </p:sp>
-      <p:sp>
-        <p:nvSpPr>
-          <p:cNvPr id="8" name="Text 6"/>
-          <p:cNvSpPr/>
-          <p:nvPr/>
-        </p:nvSpPr>
-        <p:spPr>
-          <a:xfrm>
-            <a:off x="1073150" y="3606602"/>
-            <a:ext cx="10347071" cy="551259"/>
-          </a:xfrm>
-          <a:prstGeom prst="rect">
-            <a:avLst/>
-          </a:prstGeom>
-          <a:noFill/>
-          <a:ln/>
-        </p:spPr>
-        <p:txBody>
-          <a:bodyPr wrap="square" lIns="0" tIns="0" rIns="0" bIns="0" rtlCol="0" anchor="t">
-            <a:normAutofit/>
-          </a:bodyPr>
-          <a:lstStyle/>
-          <a:p>
-            <a:pPr algn="l" indent="0" marL="0">
-              <a:lnSpc>
-                <a:spcPts val="2086"/>
-              </a:lnSpc>
-              <a:buNone/>
-            </a:pPr>
-            <a:r>
-              <a:rPr lang="en-US" sz="1545" dirty="0">
-                <a:solidFill>
-                  <a:srgbClr val="4A5568"/>
-                </a:solidFill>
-                <a:latin typeface="IBM Plex Sans" pitchFamily="34" charset="0"/>
-                <a:ea typeface="IBM Plex Sans" pitchFamily="34" charset="-122"/>
-                <a:cs typeface="IBM Plex Sans" pitchFamily="34" charset="-120"/>
-              </a:rPr>
-              <a:t>Where a license or an advisory doesn't exist, the document records the gap rather than guessing. We'd rather show a known blank than a wrong answer.</a:t>
-            </a:r>
-            <a:endParaRPr lang="en-US" sz="1545" dirty="0"/>
-          </a:p>
-        </p:txBody>
-      </p:sp>
-      <p:sp>
-        <p:nvSpPr>
-          <p:cNvPr id="9" name="Shape 7"/>
-          <p:cNvSpPr/>
-          <p:nvPr/>
-        </p:nvSpPr>
-        <p:spPr>
-          <a:xfrm>
-            <a:off x="815975" y="4535686"/>
-            <a:ext cx="10560050" cy="1303139"/>
-          </a:xfrm>
-          <a:prstGeom prst="roundRect">
-            <a:avLst>
-              <a:gd name="adj" fmla="val 7553"/>
-            </a:avLst>
-          </a:prstGeom>
-          <a:solidFill>
-            <a:srgbClr val="FFFFFF"/>
-          </a:solidFill>
-          <a:ln w="6350">
-            <a:solidFill>
-              <a:srgbClr val="DFE3DE"/>
-            </a:solidFill>
-            <a:prstDash val="solid"/>
-          </a:ln>
-        </p:spPr>
-      </p:sp>
-      <p:sp>
-        <p:nvSpPr>
-          <p:cNvPr id="10" name="Text 8"/>
-          <p:cNvSpPr/>
-          <p:nvPr/>
-        </p:nvSpPr>
-        <p:spPr>
-          <a:xfrm>
-            <a:off x="1073150" y="4767461"/>
-            <a:ext cx="10347071" cy="288330"/>
-          </a:xfrm>
-          <a:prstGeom prst="rect">
-            <a:avLst/>
-          </a:prstGeom>
-          <a:noFill/>
-          <a:ln/>
-        </p:spPr>
-        <p:txBody>
-          <a:bodyPr wrap="square" lIns="0" tIns="0" rIns="0" bIns="0" rtlCol="0" anchor="t">
-            <a:normAutofit/>
-          </a:bodyPr>
-          <a:lstStyle/>
-          <a:p>
-            <a:pPr algn="l" indent="0" marL="0">
-              <a:lnSpc>
-                <a:spcPts val="2072"/>
-              </a:lnSpc>
-              <a:buNone/>
-            </a:pPr>
-            <a:r>
-              <a:rPr lang="en-US" sz="1727" b="1" dirty="0">
-                <a:solidFill>
-                  <a:srgbClr val="10212B"/>
-                </a:solidFill>
-                <a:latin typeface="IBM Plex Sans" pitchFamily="34" charset="0"/>
-                <a:ea typeface="IBM Plex Sans" pitchFamily="34" charset="-122"/>
-                <a:cs typeface="IBM Plex Sans" pitchFamily="34" charset="-120"/>
-              </a:rPr>
-              <a:t>It isn't a compliance program</a:t>
-            </a:r>
-            <a:endParaRPr lang="en-US" sz="1727" dirty="0"/>
-          </a:p>
-        </p:txBody>
-      </p:sp>
-      <p:sp>
-        <p:nvSpPr>
-          <p:cNvPr id="11" name="Text 9"/>
-          <p:cNvSpPr/>
-          <p:nvPr/>
-        </p:nvSpPr>
-        <p:spPr>
-          <a:xfrm>
-            <a:off x="1073150" y="5081191"/>
-            <a:ext cx="10347071" cy="551259"/>
-          </a:xfrm>
-          <a:prstGeom prst="rect">
-            <a:avLst/>
-          </a:prstGeom>
-          <a:noFill/>
-          <a:ln/>
-        </p:spPr>
-        <p:txBody>
-          <a:bodyPr wrap="square" lIns="0" tIns="0" rIns="0" bIns="0" rtlCol="0" anchor="t">
-            <a:normAutofit/>
-          </a:bodyPr>
-          <a:lstStyle/>
-          <a:p>
-            <a:pPr algn="l" indent="0" marL="0">
-              <a:lnSpc>
-                <a:spcPts val="2086"/>
-              </a:lnSpc>
-              <a:buNone/>
-            </a:pPr>
-            <a:r>
-              <a:rPr lang="en-US" sz="1545" dirty="0">
-                <a:solidFill>
-                  <a:srgbClr val="4A5568"/>
-                </a:solidFill>
-                <a:latin typeface="IBM Plex Sans" pitchFamily="34" charset="0"/>
-                <a:ea typeface="IBM Plex Sans" pitchFamily="34" charset="-122"/>
-                <a:cs typeface="IBM Plex Sans" pitchFamily="34" charset="-120"/>
-              </a:rPr>
-              <a:t>It produces the evidence. Someone still has to own the process, and that ownership question is worth settling separately.</a:t>
-            </a:r>
-            <a:endParaRPr lang="en-US" sz="1545" dirty="0"/>
+            <a:endParaRPr lang="en-US" sz="1585" dirty="0"/>
           </a:p>
         </p:txBody>
       </p:sp>
@@ -5136,12 +6714,14 @@
         <p:nvSpPr>
           <p:cNvPr id="2" name="Text 0"/>
           <p:cNvSpPr/>
-          <p:nvPr/>
+          <p:nvPr>
+            <p:ph type="title"/>
+          </p:nvPr>
         </p:nvSpPr>
         <p:spPr>
           <a:xfrm>
             <a:off x="812800" y="812800"/>
-            <a:ext cx="10883392" cy="528290"/>
+            <a:ext cx="10883392" cy="516483"/>
           </a:xfrm>
           <a:prstGeom prst="rect">
             <a:avLst/>
@@ -5157,58 +6737,62 @@
           <a:p>
             <a:pPr algn="l" indent="0" marL="0">
               <a:lnSpc>
-                <a:spcPts val="3960"/>
+                <a:spcPts val="3873"/>
               </a:lnSpc>
               <a:buNone/>
             </a:pPr>
             <a:r>
-              <a:rPr lang="en-US" sz="3600" b="1" dirty="0">
+              <a:rPr lang="en-US" sz="3521" b="1" i="0" dirty="0">
                 <a:solidFill>
                   <a:srgbClr val="10212B"/>
                 </a:solidFill>
-                <a:latin typeface="IBM Plex Sans" pitchFamily="34" charset="0"/>
-                <a:ea typeface="IBM Plex Sans" pitchFamily="34" charset="-122"/>
-                <a:cs typeface="IBM Plex Sans" pitchFamily="34" charset="-120"/>
+                <a:latin typeface="Verdana" pitchFamily="34" charset="0"/>
+                <a:ea typeface="Verdana" pitchFamily="34" charset="-122"/>
+                <a:cs typeface="Verdana" pitchFamily="34" charset="-120"/>
               </a:rPr>
-              <a:t>What if this turns out to be wrong?</a:t>
+              <a:t>What I'm not claiming</a:t>
             </a:r>
-            <a:endParaRPr lang="en-US" sz="3600" dirty="0"/>
-          </a:p>
-        </p:txBody>
-      </p:sp>
-      <p:pic>
-        <p:nvPicPr>
-          <p:cNvPr id="3" name="Image 0" descr="Verified">    </p:cNvPr>
-          <p:cNvPicPr>
-            <a:picLocks noChangeAspect="1"/>
-          </p:cNvPicPr>
-          <p:nvPr/>
-        </p:nvPicPr>
-        <p:blipFill>
-          <a:blip r:embed="rId1"/>
-          <a:srcRect l="-154" r="-154" t="0" b="0"/>
-          <a:stretch/>
-        </p:blipFill>
-        <p:spPr>
-          <a:xfrm>
-            <a:off x="812800" y="1595090"/>
-            <a:ext cx="178346" cy="266700"/>
-          </a:xfrm>
-          <a:prstGeom prst="rect">
-            <a:avLst/>
-          </a:prstGeom>
-        </p:spPr>
-      </p:pic>
-      <p:sp>
-        <p:nvSpPr>
-          <p:cNvPr id="4" name="Text 1"/>
+            <a:endParaRPr lang="en-US" sz="3521" dirty="0"/>
+          </a:p>
+        </p:txBody>
+      </p:sp>
+      <p:sp>
+        <p:nvSpPr>
+          <p:cNvPr id="3" name="Shape 1"/>
           <p:cNvSpPr/>
           <p:nvPr/>
         </p:nvSpPr>
         <p:spPr>
           <a:xfrm>
-            <a:off x="1105446" y="1595090"/>
-            <a:ext cx="5035623" cy="591145"/>
+            <a:off x="815975" y="1586458"/>
+            <a:ext cx="10560050" cy="1303189"/>
+          </a:xfrm>
+          <a:prstGeom prst="roundRect">
+            <a:avLst>
+              <a:gd name="adj" fmla="val 7553"/>
+            </a:avLst>
+          </a:prstGeom>
+          <a:solidFill>
+            <a:srgbClr val="FFFFFF"/>
+          </a:solidFill>
+          <a:ln w="6350">
+            <a:solidFill>
+              <a:srgbClr val="DFE3DE"/>
+            </a:solidFill>
+            <a:prstDash val="solid"/>
+          </a:ln>
+        </p:spPr>
+      </p:sp>
+      <p:sp>
+        <p:nvSpPr>
+          <p:cNvPr id="4" name="Text 2"/>
+          <p:cNvSpPr/>
+          <p:nvPr/>
+        </p:nvSpPr>
+        <p:spPr>
+          <a:xfrm>
+            <a:off x="1073150" y="1818233"/>
+            <a:ext cx="10347071" cy="288330"/>
           </a:xfrm>
           <a:prstGeom prst="rect">
             <a:avLst/>
@@ -5224,58 +6808,35 @@
           <a:p>
             <a:pPr algn="l" indent="0" marL="0">
               <a:lnSpc>
-                <a:spcPts val="2228"/>
+                <a:spcPts val="2072"/>
               </a:lnSpc>
               <a:buNone/>
             </a:pPr>
             <a:r>
-              <a:rPr lang="en-US" sz="1650" dirty="0">
+              <a:rPr lang="en-US" sz="1727" b="1" dirty="0">
                 <a:solidFill>
                   <a:srgbClr val="10212B"/>
                 </a:solidFill>
-                <a:latin typeface="IBM Plex Sans" pitchFamily="34" charset="0"/>
-                <a:ea typeface="IBM Plex Sans" pitchFamily="34" charset="-122"/>
-                <a:cs typeface="IBM Plex Sans" pitchFamily="34" charset="-120"/>
+                <a:latin typeface="Verdana" pitchFamily="34" charset="0"/>
+                <a:ea typeface="Verdana" pitchFamily="34" charset="-122"/>
+                <a:cs typeface="Verdana" pitchFamily="34" charset="-120"/>
               </a:rPr>
-              <a:t>No contract, no subscription, no vendor who can raise the price or be acquired</a:t>
+              <a:t>This is not a security product</a:t>
             </a:r>
-            <a:endParaRPr lang="en-US" sz="1650" dirty="0"/>
-          </a:p>
-        </p:txBody>
-      </p:sp>
-      <p:pic>
-        <p:nvPicPr>
-          <p:cNvPr id="5" name="Image 1" descr="Code">    </p:cNvPr>
-          <p:cNvPicPr>
-            <a:picLocks noChangeAspect="1"/>
-          </p:cNvPicPr>
-          <p:nvPr/>
-        </p:nvPicPr>
-        <p:blipFill>
-          <a:blip r:embed="rId2"/>
-          <a:srcRect l="0" r="0" t="-94" b="-94"/>
-          <a:stretch/>
-        </p:blipFill>
-        <p:spPr>
-          <a:xfrm>
-            <a:off x="812800" y="2313236"/>
-            <a:ext cx="158452" cy="266700"/>
-          </a:xfrm>
-          <a:prstGeom prst="rect">
-            <a:avLst/>
-          </a:prstGeom>
-        </p:spPr>
-      </p:pic>
-      <p:sp>
-        <p:nvSpPr>
-          <p:cNvPr id="6" name="Text 2"/>
+            <a:endParaRPr lang="en-US" sz="1727" dirty="0"/>
+          </a:p>
+        </p:txBody>
+      </p:sp>
+      <p:sp>
+        <p:nvSpPr>
+          <p:cNvPr id="5" name="Text 3"/>
           <p:cNvSpPr/>
           <p:nvPr/>
         </p:nvSpPr>
         <p:spPr>
           <a:xfrm>
-            <a:off x="1085552" y="2313236"/>
-            <a:ext cx="5056113" cy="591145"/>
+            <a:off x="1073150" y="2131963"/>
+            <a:ext cx="10347071" cy="551309"/>
           </a:xfrm>
           <a:prstGeom prst="rect">
             <a:avLst/>
@@ -5291,58 +6852,62 @@
           <a:p>
             <a:pPr algn="l" indent="0" marL="0">
               <a:lnSpc>
-                <a:spcPts val="2228"/>
+                <a:spcPts val="2086"/>
               </a:lnSpc>
               <a:buNone/>
             </a:pPr>
             <a:r>
-              <a:rPr lang="en-US" sz="1650" dirty="0">
+              <a:rPr lang="en-US" sz="1545" dirty="0">
                 <a:solidFill>
-                  <a:srgbClr val="10212B"/>
+                  <a:srgbClr val="4A5568"/>
                 </a:solidFill>
-                <a:latin typeface="IBM Plex Sans" pitchFamily="34" charset="0"/>
-                <a:ea typeface="IBM Plex Sans" pitchFamily="34" charset="-122"/>
-                <a:cs typeface="IBM Plex Sans" pitchFamily="34" charset="-120"/>
+                <a:latin typeface="Verdana" pitchFamily="34" charset="0"/>
+                <a:ea typeface="Verdana" pitchFamily="34" charset="-122"/>
+                <a:cs typeface="Verdana" pitchFamily="34" charset="-120"/>
               </a:rPr>
-              <a:t>Open source under Apache-2.0, so the code stays available to us whatever happens to it</a:t>
+              <a:t>It tells us what we ship. The tools that hunt for vulnerabilities still do that job, and now they get a complete list to work from.</a:t>
             </a:r>
-            <a:endParaRPr lang="en-US" sz="1650" dirty="0"/>
-          </a:p>
-        </p:txBody>
-      </p:sp>
-      <p:pic>
-        <p:nvPicPr>
-          <p:cNvPr id="7" name="Image 2" descr="Book">    </p:cNvPr>
-          <p:cNvPicPr>
-            <a:picLocks noChangeAspect="1"/>
-          </p:cNvPicPr>
-          <p:nvPr/>
-        </p:nvPicPr>
-        <p:blipFill>
-          <a:blip r:embed="rId3"/>
-          <a:srcRect l="0" r="0" t="-131" b="-131"/>
-          <a:stretch/>
-        </p:blipFill>
-        <p:spPr>
-          <a:xfrm>
-            <a:off x="812800" y="3031381"/>
-            <a:ext cx="152003" cy="266700"/>
-          </a:xfrm>
-          <a:prstGeom prst="rect">
-            <a:avLst/>
-          </a:prstGeom>
-        </p:spPr>
-      </p:pic>
-      <p:sp>
-        <p:nvSpPr>
-          <p:cNvPr id="8" name="Text 3"/>
+            <a:endParaRPr lang="en-US" sz="1545" dirty="0"/>
+          </a:p>
+        </p:txBody>
+      </p:sp>
+      <p:sp>
+        <p:nvSpPr>
+          <p:cNvPr id="6" name="Shape 4"/>
           <p:cNvSpPr/>
           <p:nvPr/>
         </p:nvSpPr>
         <p:spPr>
           <a:xfrm>
-            <a:off x="1079103" y="3031381"/>
-            <a:ext cx="5062756" cy="591145"/>
+            <a:off x="815975" y="3061097"/>
+            <a:ext cx="10560050" cy="1303139"/>
+          </a:xfrm>
+          <a:prstGeom prst="roundRect">
+            <a:avLst>
+              <a:gd name="adj" fmla="val 7553"/>
+            </a:avLst>
+          </a:prstGeom>
+          <a:solidFill>
+            <a:srgbClr val="FFFFFF"/>
+          </a:solidFill>
+          <a:ln w="6350">
+            <a:solidFill>
+              <a:srgbClr val="DFE3DE"/>
+            </a:solidFill>
+            <a:prstDash val="solid"/>
+          </a:ln>
+        </p:spPr>
+      </p:sp>
+      <p:sp>
+        <p:nvSpPr>
+          <p:cNvPr id="7" name="Text 5"/>
+          <p:cNvSpPr/>
+          <p:nvPr/>
+        </p:nvSpPr>
+        <p:spPr>
+          <a:xfrm>
+            <a:off x="1073150" y="3292872"/>
+            <a:ext cx="10347071" cy="288330"/>
           </a:xfrm>
           <a:prstGeom prst="rect">
             <a:avLst/>
@@ -5358,58 +6923,35 @@
           <a:p>
             <a:pPr algn="l" indent="0" marL="0">
               <a:lnSpc>
-                <a:spcPts val="2228"/>
+                <a:spcPts val="2072"/>
               </a:lnSpc>
               <a:buNone/>
             </a:pPr>
             <a:r>
-              <a:rPr lang="en-US" sz="1650" dirty="0">
+              <a:rPr lang="en-US" sz="1727" b="1" dirty="0">
                 <a:solidFill>
                   <a:srgbClr val="10212B"/>
                 </a:solidFill>
-                <a:latin typeface="IBM Plex Sans" pitchFamily="34" charset="0"/>
-                <a:ea typeface="IBM Plex Sans" pitchFamily="34" charset="-122"/>
-                <a:cs typeface="IBM Plex Sans" pitchFamily="34" charset="-120"/>
+                <a:latin typeface="Verdana" pitchFamily="34" charset="0"/>
+                <a:ea typeface="Verdana" pitchFamily="34" charset="-122"/>
+                <a:cs typeface="Verdana" pitchFamily="34" charset="-120"/>
               </a:rPr>
-              <a:t>Output is CycloneDX and SPDX, the two industry standards — no lock-in to switch away from</a:t>
+              <a:t>It won't find what upstreams never published</a:t>
             </a:r>
-            <a:endParaRPr lang="en-US" sz="1650" dirty="0"/>
-          </a:p>
-        </p:txBody>
-      </p:sp>
-      <p:pic>
-        <p:nvPicPr>
-          <p:cNvPr id="9" name="Image 3" descr="Chart">    </p:cNvPr>
-          <p:cNvPicPr>
-            <a:picLocks noChangeAspect="1"/>
-          </p:cNvPicPr>
-          <p:nvPr/>
-        </p:nvPicPr>
-        <p:blipFill>
-          <a:blip r:embed="rId4"/>
-          <a:srcRect l="-279" r="-279" t="0" b="0"/>
-          <a:stretch/>
-        </p:blipFill>
-        <p:spPr>
-          <a:xfrm>
-            <a:off x="6197600" y="1595090"/>
-            <a:ext cx="223490" cy="266700"/>
-          </a:xfrm>
-          <a:prstGeom prst="rect">
-            <a:avLst/>
-          </a:prstGeom>
-        </p:spPr>
-      </p:pic>
-      <p:sp>
-        <p:nvSpPr>
-          <p:cNvPr id="10" name="Text 4"/>
+            <a:endParaRPr lang="en-US" sz="1727" dirty="0"/>
+          </a:p>
+        </p:txBody>
+      </p:sp>
+      <p:sp>
+        <p:nvSpPr>
+          <p:cNvPr id="8" name="Text 6"/>
           <p:cNvSpPr/>
           <p:nvPr/>
         </p:nvSpPr>
         <p:spPr>
           <a:xfrm>
-            <a:off x="6535390" y="1595090"/>
-            <a:ext cx="4989124" cy="591145"/>
+            <a:off x="1073150" y="3606602"/>
+            <a:ext cx="10347071" cy="551259"/>
           </a:xfrm>
           <a:prstGeom prst="rect">
             <a:avLst/>
@@ -5425,58 +6967,62 @@
           <a:p>
             <a:pPr algn="l" indent="0" marL="0">
               <a:lnSpc>
-                <a:spcPts val="2228"/>
+                <a:spcPts val="2086"/>
               </a:lnSpc>
               <a:buNone/>
             </a:pPr>
             <a:r>
-              <a:rPr lang="en-US" sz="1650" dirty="0">
+              <a:rPr lang="en-US" sz="1545" dirty="0">
                 <a:solidFill>
-                  <a:srgbClr val="10212B"/>
+                  <a:srgbClr val="4A5568"/>
                 </a:solidFill>
-                <a:latin typeface="IBM Plex Sans" pitchFamily="34" charset="0"/>
-                <a:ea typeface="IBM Plex Sans" pitchFamily="34" charset="-122"/>
-                <a:cs typeface="IBM Plex Sans" pitchFamily="34" charset="-120"/>
+                <a:latin typeface="Verdana" pitchFamily="34" charset="0"/>
+                <a:ea typeface="Verdana" pitchFamily="34" charset="-122"/>
+                <a:cs typeface="Verdana" pitchFamily="34" charset="-120"/>
               </a:rPr>
-              <a:t>Released, versioned and tested on every platform we build on</a:t>
+              <a:t>Where a license or an advisory doesn't exist, the document records the gap rather than guessing. We'd rather show a known blank than a wrong answer.</a:t>
             </a:r>
-            <a:endParaRPr lang="en-US" sz="1650" dirty="0"/>
-          </a:p>
-        </p:txBody>
-      </p:sp>
-      <p:pic>
-        <p:nvPicPr>
-          <p:cNvPr id="11" name="Image 4" descr="Users">    </p:cNvPr>
-          <p:cNvPicPr>
-            <a:picLocks noChangeAspect="1"/>
-          </p:cNvPicPr>
-          <p:nvPr/>
-        </p:nvPicPr>
-        <p:blipFill>
-          <a:blip r:embed="rId5"/>
-          <a:srcRect l="-84" r="-84" t="0" b="0"/>
-          <a:stretch/>
-        </p:blipFill>
-        <p:spPr>
-          <a:xfrm>
-            <a:off x="6197600" y="2313236"/>
-            <a:ext cx="178098" cy="266700"/>
-          </a:xfrm>
-          <a:prstGeom prst="rect">
-            <a:avLst/>
-          </a:prstGeom>
-        </p:spPr>
-      </p:pic>
-      <p:sp>
-        <p:nvSpPr>
-          <p:cNvPr id="12" name="Text 5"/>
+            <a:endParaRPr lang="en-US" sz="1545" dirty="0"/>
+          </a:p>
+        </p:txBody>
+      </p:sp>
+      <p:sp>
+        <p:nvSpPr>
+          <p:cNvPr id="9" name="Shape 7"/>
           <p:cNvSpPr/>
           <p:nvPr/>
         </p:nvSpPr>
         <p:spPr>
           <a:xfrm>
-            <a:off x="6489998" y="2313236"/>
-            <a:ext cx="5035878" cy="591145"/>
+            <a:off x="815975" y="4535686"/>
+            <a:ext cx="10560050" cy="1303139"/>
+          </a:xfrm>
+          <a:prstGeom prst="roundRect">
+            <a:avLst>
+              <a:gd name="adj" fmla="val 7553"/>
+            </a:avLst>
+          </a:prstGeom>
+          <a:solidFill>
+            <a:srgbClr val="FFFFFF"/>
+          </a:solidFill>
+          <a:ln w="6350">
+            <a:solidFill>
+              <a:srgbClr val="DFE3DE"/>
+            </a:solidFill>
+            <a:prstDash val="solid"/>
+          </a:ln>
+        </p:spPr>
+      </p:sp>
+      <p:sp>
+        <p:nvSpPr>
+          <p:cNvPr id="10" name="Text 8"/>
+          <p:cNvSpPr/>
+          <p:nvPr/>
+        </p:nvSpPr>
+        <p:spPr>
+          <a:xfrm>
+            <a:off x="1073150" y="4767461"/>
+            <a:ext cx="10347071" cy="288330"/>
           </a:xfrm>
           <a:prstGeom prst="rect">
             <a:avLst/>
@@ -5492,58 +7038,35 @@
           <a:p>
             <a:pPr algn="l" indent="0" marL="0">
               <a:lnSpc>
-                <a:spcPts val="2228"/>
+                <a:spcPts val="2072"/>
               </a:lnSpc>
               <a:buNone/>
             </a:pPr>
             <a:r>
-              <a:rPr lang="en-US" sz="1650" dirty="0">
+              <a:rPr lang="en-US" sz="1727" b="1" dirty="0">
                 <a:solidFill>
                   <a:srgbClr val="10212B"/>
                 </a:solidFill>
-                <a:latin typeface="IBM Plex Sans" pitchFamily="34" charset="0"/>
-                <a:ea typeface="IBM Plex Sans" pitchFamily="34" charset="-122"/>
-                <a:cs typeface="IBM Plex Sans" pitchFamily="34" charset="-120"/>
+                <a:latin typeface="Verdana" pitchFamily="34" charset="0"/>
+                <a:ea typeface="Verdana" pitchFamily="34" charset="-122"/>
+                <a:cs typeface="Verdana" pitchFamily="34" charset="-120"/>
               </a:rPr>
-              <a:t>Maintained by [name] here; small enough that someone else could take it over</a:t>
+              <a:t>It isn't a compliance program</a:t>
             </a:r>
-            <a:endParaRPr lang="en-US" sz="1650" dirty="0"/>
-          </a:p>
-        </p:txBody>
-      </p:sp>
-      <p:pic>
-        <p:nvPicPr>
-          <p:cNvPr id="13" name="Image 5" descr="Warning">    </p:cNvPr>
-          <p:cNvPicPr>
-            <a:picLocks noChangeAspect="1"/>
-          </p:cNvPicPr>
-          <p:nvPr/>
-        </p:nvPicPr>
-        <p:blipFill>
-          <a:blip r:embed="rId6"/>
-          <a:srcRect l="0" r="0" t="-344" b="-344"/>
-          <a:stretch/>
-        </p:blipFill>
-        <p:spPr>
-          <a:xfrm>
-            <a:off x="6197600" y="3031381"/>
-            <a:ext cx="201811" cy="266700"/>
-          </a:xfrm>
-          <a:prstGeom prst="rect">
-            <a:avLst/>
-          </a:prstGeom>
-        </p:spPr>
-      </p:pic>
-      <p:sp>
-        <p:nvSpPr>
-          <p:cNvPr id="14" name="Text 6"/>
+            <a:endParaRPr lang="en-US" sz="1727" dirty="0"/>
+          </a:p>
+        </p:txBody>
+      </p:sp>
+      <p:sp>
+        <p:nvSpPr>
+          <p:cNvPr id="11" name="Text 9"/>
           <p:cNvSpPr/>
           <p:nvPr/>
         </p:nvSpPr>
         <p:spPr>
           <a:xfrm>
-            <a:off x="6513711" y="3031381"/>
-            <a:ext cx="5011454" cy="591145"/>
+            <a:off x="1073150" y="5081191"/>
+            <a:ext cx="10347071" cy="551259"/>
           </a:xfrm>
           <a:prstGeom prst="rect">
             <a:avLst/>
@@ -5559,22 +7082,22 @@
           <a:p>
             <a:pPr algn="l" indent="0" marL="0">
               <a:lnSpc>
-                <a:spcPts val="2228"/>
+                <a:spcPts val="2086"/>
               </a:lnSpc>
               <a:buNone/>
             </a:pPr>
             <a:r>
-              <a:rPr lang="en-US" sz="1650" dirty="0">
+              <a:rPr lang="en-US" sz="1545" dirty="0">
                 <a:solidFill>
-                  <a:srgbClr val="10212B"/>
+                  <a:srgbClr val="4A5568"/>
                 </a:solidFill>
-                <a:latin typeface="IBM Plex Sans" pitchFamily="34" charset="0"/>
-                <a:ea typeface="IBM Plex Sans" pitchFamily="34" charset="-122"/>
-                <a:cs typeface="IBM Plex Sans" pitchFamily="34" charset="-120"/>
+                <a:latin typeface="Verdana" pitchFamily="34" charset="0"/>
+                <a:ea typeface="Verdana" pitchFamily="34" charset="-122"/>
+                <a:cs typeface="Verdana" pitchFamily="34" charset="-120"/>
               </a:rPr>
-              <a:t>Worst case: we stop running it and delete one step from one pipeline</a:t>
+              <a:t>It produces the evidence. Someone still has to own the process, and that ownership question is worth settling separately.</a:t>
             </a:r>
-            <a:endParaRPr lang="en-US" sz="1650" dirty="0"/>
+            <a:endParaRPr lang="en-US" sz="1545" dirty="0"/>
           </a:p>
         </p:txBody>
       </p:sp>
@@ -5592,7 +7115,7 @@
     <p:bg>
       <p:bgPr>
         <a:solidFill>
-          <a:srgbClr val="1F7A6C"/>
+          <a:srgbClr val="F7F8F6"/>
         </a:solidFill>
       </p:bgPr>
     </p:bg>
@@ -5614,12 +7137,14 @@
         <p:nvSpPr>
           <p:cNvPr id="2" name="Text 0"/>
           <p:cNvSpPr/>
-          <p:nvPr/>
-        </p:nvSpPr>
-        <p:spPr>
-          <a:xfrm>
-            <a:off x="812800" y="1968550"/>
-            <a:ext cx="10883392" cy="238720"/>
+          <p:nvPr>
+            <p:ph type="title"/>
+          </p:nvPr>
+        </p:nvSpPr>
+        <p:spPr>
+          <a:xfrm>
+            <a:off x="812800" y="812800"/>
+            <a:ext cx="10883392" cy="528290"/>
           </a:xfrm>
           <a:prstGeom prst="rect">
             <a:avLst/>
@@ -5635,35 +7160,58 @@
           <a:p>
             <a:pPr algn="l" indent="0" marL="0">
               <a:lnSpc>
-                <a:spcPts val="1680"/>
+                <a:spcPts val="3960"/>
               </a:lnSpc>
               <a:buNone/>
             </a:pPr>
             <a:r>
-              <a:rPr lang="en-US" sz="1200" b="1" spc="150" kern="0" dirty="0">
+              <a:rPr lang="en-US" sz="3600" b="1" i="0" dirty="0">
                 <a:solidFill>
-                  <a:srgbClr val="CDEDE5"/>
+                  <a:srgbClr val="10212B"/>
                 </a:solidFill>
-                <a:latin typeface="JetBrains Mono" pitchFamily="34" charset="0"/>
-                <a:ea typeface="JetBrains Mono" pitchFamily="34" charset="-122"/>
-                <a:cs typeface="JetBrains Mono" pitchFamily="34" charset="-120"/>
+                <a:latin typeface="Verdana" pitchFamily="34" charset="0"/>
+                <a:ea typeface="Verdana" pitchFamily="34" charset="-122"/>
+                <a:cs typeface="Verdana" pitchFamily="34" charset="-120"/>
               </a:rPr>
-              <a:t>WHAT I NEED FROM YOU</a:t>
+              <a:t>What if this turns out to be wrong?</a:t>
             </a:r>
-            <a:endParaRPr lang="en-US" sz="1200" dirty="0"/>
-          </a:p>
-        </p:txBody>
-      </p:sp>
-      <p:sp>
-        <p:nvSpPr>
-          <p:cNvPr id="3" name="Text 1"/>
+            <a:endParaRPr lang="en-US" sz="3600" dirty="0"/>
+          </a:p>
+        </p:txBody>
+      </p:sp>
+      <p:pic>
+        <p:nvPicPr>
+          <p:cNvPr id="3" name="Image 0" descr="Verified">    </p:cNvPr>
+          <p:cNvPicPr>
+            <a:picLocks noChangeAspect="1"/>
+          </p:cNvPicPr>
+          <p:nvPr/>
+        </p:nvPicPr>
+        <p:blipFill>
+          <a:blip r:embed="rId1"/>
+          <a:srcRect l="0" r="0" t="-251" b="-251"/>
+          <a:stretch/>
+        </p:blipFill>
+        <p:spPr>
+          <a:xfrm>
+            <a:off x="812800" y="1595090"/>
+            <a:ext cx="157956" cy="266700"/>
+          </a:xfrm>
+          <a:prstGeom prst="rect">
+            <a:avLst/>
+          </a:prstGeom>
+        </p:spPr>
+      </p:pic>
+      <p:sp>
+        <p:nvSpPr>
+          <p:cNvPr id="4" name="Text 1"/>
           <p:cNvSpPr/>
           <p:nvPr/>
         </p:nvSpPr>
         <p:spPr>
           <a:xfrm>
-            <a:off x="812800" y="2435870"/>
-            <a:ext cx="10203180" cy="1310580"/>
+            <a:off x="1085056" y="1595090"/>
+            <a:ext cx="5056624" cy="591145"/>
           </a:xfrm>
           <a:prstGeom prst="rect">
             <a:avLst/>
@@ -5679,35 +7227,58 @@
           <a:p>
             <a:pPr algn="l" indent="0" marL="0">
               <a:lnSpc>
-                <a:spcPts val="5060"/>
+                <a:spcPts val="2228"/>
               </a:lnSpc>
               <a:buNone/>
             </a:pPr>
             <a:r>
-              <a:rPr lang="en-US" sz="4600" b="1" dirty="0">
+              <a:rPr lang="en-US" sz="1650" dirty="0">
                 <a:solidFill>
-                  <a:srgbClr val="F7F8F6"/>
+                  <a:srgbClr val="10212B"/>
                 </a:solidFill>
-                <a:latin typeface="IBM Plex Sans" pitchFamily="34" charset="0"/>
-                <a:ea typeface="IBM Plex Sans" pitchFamily="34" charset="-122"/>
-                <a:cs typeface="IBM Plex Sans" pitchFamily="34" charset="-120"/>
+                <a:latin typeface="Verdana" pitchFamily="34" charset="0"/>
+                <a:ea typeface="Verdana" pitchFamily="34" charset="-122"/>
+                <a:cs typeface="Verdana" pitchFamily="34" charset="-120"/>
               </a:rPr>
-              <a:t>Say yes to two weeks on one product.</a:t>
+              <a:t>No contract, no subscription, no vendor who can raise the price or be acquired</a:t>
             </a:r>
-            <a:endParaRPr lang="en-US" sz="4600" dirty="0"/>
-          </a:p>
-        </p:txBody>
-      </p:sp>
-      <p:sp>
-        <p:nvSpPr>
-          <p:cNvPr id="4" name="Text 2"/>
+            <a:endParaRPr lang="en-US" sz="1650" dirty="0"/>
+          </a:p>
+        </p:txBody>
+      </p:sp>
+      <p:pic>
+        <p:nvPicPr>
+          <p:cNvPr id="5" name="Image 1" descr="Code">    </p:cNvPr>
+          <p:cNvPicPr>
+            <a:picLocks noChangeAspect="1"/>
+          </p:cNvPicPr>
+          <p:nvPr/>
+        </p:nvPicPr>
+        <p:blipFill>
+          <a:blip r:embed="rId2"/>
+          <a:srcRect l="-195" r="-195" t="0" b="0"/>
+          <a:stretch/>
+        </p:blipFill>
+        <p:spPr>
+          <a:xfrm>
+            <a:off x="812800" y="2313236"/>
+            <a:ext cx="140246" cy="266700"/>
+          </a:xfrm>
+          <a:prstGeom prst="rect">
+            <a:avLst/>
+          </a:prstGeom>
+        </p:spPr>
+      </p:pic>
+      <p:sp>
+        <p:nvSpPr>
+          <p:cNvPr id="6" name="Text 2"/>
           <p:cNvSpPr/>
           <p:nvPr/>
         </p:nvSpPr>
         <p:spPr>
           <a:xfrm>
-            <a:off x="812800" y="3975050"/>
-            <a:ext cx="10072370" cy="736600"/>
+            <a:off x="1067346" y="2313236"/>
+            <a:ext cx="5074866" cy="591145"/>
           </a:xfrm>
           <a:prstGeom prst="rect">
             <a:avLst/>
@@ -5723,35 +7294,58 @@
           <a:p>
             <a:pPr algn="l" indent="0" marL="0">
               <a:lnSpc>
-                <a:spcPts val="2800"/>
+                <a:spcPts val="2228"/>
               </a:lnSpc>
               <a:buNone/>
             </a:pPr>
             <a:r>
-              <a:rPr lang="en-US" sz="2000" dirty="0">
+              <a:rPr lang="en-US" sz="1650" dirty="0">
                 <a:solidFill>
-                  <a:srgbClr val="E4F4F0"/>
+                  <a:srgbClr val="10212B"/>
                 </a:solidFill>
-                <a:latin typeface="IBM Plex Sans" pitchFamily="34" charset="0"/>
-                <a:ea typeface="IBM Plex Sans" pitchFamily="34" charset="-122"/>
-                <a:cs typeface="IBM Plex Sans" pitchFamily="34" charset="-120"/>
+                <a:latin typeface="Verdana" pitchFamily="34" charset="0"/>
+                <a:ea typeface="Verdana" pitchFamily="34" charset="-122"/>
+                <a:cs typeface="Verdana" pitchFamily="34" charset="-120"/>
               </a:rPr>
-              <a:t>I'll come back with the bill of materials from a real release, what it found that we didn't know, and a plan to make it standard — or a recommendation to drop it.</a:t>
+              <a:t>Open source under Apache-2.0, so the code stays available to us whatever happens to it</a:t>
             </a:r>
-            <a:endParaRPr lang="en-US" sz="2000" dirty="0"/>
-          </a:p>
-        </p:txBody>
-      </p:sp>
-      <p:sp>
-        <p:nvSpPr>
-          <p:cNvPr id="5" name="Text 3"/>
+            <a:endParaRPr lang="en-US" sz="1650" dirty="0"/>
+          </a:p>
+        </p:txBody>
+      </p:sp>
+      <p:pic>
+        <p:nvPicPr>
+          <p:cNvPr id="7" name="Image 2" descr="Book">    </p:cNvPr>
+          <p:cNvPicPr>
+            <a:picLocks noChangeAspect="1"/>
+          </p:cNvPicPr>
+          <p:nvPr/>
+        </p:nvPicPr>
+        <p:blipFill>
+          <a:blip r:embed="rId3"/>
+          <a:srcRect l="-112" r="-112" t="0" b="0"/>
+          <a:stretch/>
+        </p:blipFill>
+        <p:spPr>
+          <a:xfrm>
+            <a:off x="812800" y="3031381"/>
+            <a:ext cx="133648" cy="266700"/>
+          </a:xfrm>
+          <a:prstGeom prst="rect">
+            <a:avLst/>
+          </a:prstGeom>
+        </p:spPr>
+      </p:pic>
+      <p:sp>
+        <p:nvSpPr>
+          <p:cNvPr id="8" name="Text 3"/>
           <p:cNvSpPr/>
           <p:nvPr/>
         </p:nvSpPr>
         <p:spPr>
           <a:xfrm>
-            <a:off x="812800" y="6238280"/>
-            <a:ext cx="2910778" cy="238720"/>
+            <a:off x="1060748" y="3031381"/>
+            <a:ext cx="5081662" cy="874018"/>
           </a:xfrm>
           <a:prstGeom prst="rect">
             <a:avLst/>
@@ -5767,22 +7361,223 @@
           <a:p>
             <a:pPr algn="l" indent="0" marL="0">
               <a:lnSpc>
-                <a:spcPts val="1680"/>
+                <a:spcPts val="2228"/>
               </a:lnSpc>
               <a:buNone/>
             </a:pPr>
             <a:r>
-              <a:rPr lang="en-US" sz="1200" dirty="0">
+              <a:rPr lang="en-US" sz="1650" dirty="0">
                 <a:solidFill>
-                  <a:srgbClr val="CDEDE5"/>
+                  <a:srgbClr val="10212B"/>
                 </a:solidFill>
-                <a:latin typeface="IBM Plex Sans" pitchFamily="34" charset="0"/>
-                <a:ea typeface="IBM Plex Sans" pitchFamily="34" charset="-122"/>
-                <a:cs typeface="IBM Plex Sans" pitchFamily="34" charset="-120"/>
+                <a:latin typeface="Verdana" pitchFamily="34" charset="0"/>
+                <a:ea typeface="Verdana" pitchFamily="34" charset="-122"/>
+                <a:cs typeface="Verdana" pitchFamily="34" charset="-120"/>
               </a:rPr>
-              <a:t>[Presenter] · decision requested by [date]</a:t>
+              <a:t>Output is CycloneDX and SPDX, the two industry standards — no lock-in to switch away from</a:t>
             </a:r>
-            <a:endParaRPr lang="en-US" sz="1200" dirty="0"/>
+            <a:endParaRPr lang="en-US" sz="1650" dirty="0"/>
+          </a:p>
+        </p:txBody>
+      </p:sp>
+      <p:pic>
+        <p:nvPicPr>
+          <p:cNvPr id="9" name="Image 3" descr="Chart">    </p:cNvPr>
+          <p:cNvPicPr>
+            <a:picLocks noChangeAspect="1"/>
+          </p:cNvPicPr>
+          <p:nvPr/>
+        </p:nvPicPr>
+        <p:blipFill>
+          <a:blip r:embed="rId4"/>
+          <a:srcRect l="-428" r="-428" t="0" b="0"/>
+          <a:stretch/>
+        </p:blipFill>
+        <p:spPr>
+          <a:xfrm>
+            <a:off x="6197600" y="1595090"/>
+            <a:ext cx="198537" cy="266700"/>
+          </a:xfrm>
+          <a:prstGeom prst="rect">
+            <a:avLst/>
+          </a:prstGeom>
+        </p:spPr>
+      </p:pic>
+      <p:sp>
+        <p:nvSpPr>
+          <p:cNvPr id="10" name="Text 4"/>
+          <p:cNvSpPr/>
+          <p:nvPr/>
+        </p:nvSpPr>
+        <p:spPr>
+          <a:xfrm>
+            <a:off x="6510437" y="1595090"/>
+            <a:ext cx="5014826" cy="591145"/>
+          </a:xfrm>
+          <a:prstGeom prst="rect">
+            <a:avLst/>
+          </a:prstGeom>
+          <a:noFill/>
+          <a:ln/>
+        </p:spPr>
+        <p:txBody>
+          <a:bodyPr wrap="square" lIns="0" tIns="0" rIns="0" bIns="0" rtlCol="0" anchor="t">
+            <a:normAutofit/>
+          </a:bodyPr>
+          <a:lstStyle/>
+          <a:p>
+            <a:pPr algn="l" indent="0" marL="0">
+              <a:lnSpc>
+                <a:spcPts val="2228"/>
+              </a:lnSpc>
+              <a:buNone/>
+            </a:pPr>
+            <a:r>
+              <a:rPr lang="en-US" sz="1650" dirty="0">
+                <a:solidFill>
+                  <a:srgbClr val="10212B"/>
+                </a:solidFill>
+                <a:latin typeface="Verdana" pitchFamily="34" charset="0"/>
+                <a:ea typeface="Verdana" pitchFamily="34" charset="-122"/>
+                <a:cs typeface="Verdana" pitchFamily="34" charset="-120"/>
+              </a:rPr>
+              <a:t>Released, versioned and tested on every platform we build on</a:t>
+            </a:r>
+            <a:endParaRPr lang="en-US" sz="1650" dirty="0"/>
+          </a:p>
+        </p:txBody>
+      </p:sp>
+      <p:pic>
+        <p:nvPicPr>
+          <p:cNvPr id="11" name="Image 4" descr="Users">    </p:cNvPr>
+          <p:cNvPicPr>
+            <a:picLocks noChangeAspect="1"/>
+          </p:cNvPicPr>
+          <p:nvPr/>
+        </p:nvPicPr>
+        <p:blipFill>
+          <a:blip r:embed="rId5"/>
+          <a:srcRect l="0" r="0" t="-713" b="-713"/>
+          <a:stretch/>
+        </p:blipFill>
+        <p:spPr>
+          <a:xfrm>
+            <a:off x="6197600" y="2313236"/>
+            <a:ext cx="156518" cy="266700"/>
+          </a:xfrm>
+          <a:prstGeom prst="rect">
+            <a:avLst/>
+          </a:prstGeom>
+        </p:spPr>
+      </p:pic>
+      <p:sp>
+        <p:nvSpPr>
+          <p:cNvPr id="12" name="Text 5"/>
+          <p:cNvSpPr/>
+          <p:nvPr/>
+        </p:nvSpPr>
+        <p:spPr>
+          <a:xfrm>
+            <a:off x="6468418" y="2313236"/>
+            <a:ext cx="5058106" cy="591145"/>
+          </a:xfrm>
+          <a:prstGeom prst="rect">
+            <a:avLst/>
+          </a:prstGeom>
+          <a:noFill/>
+          <a:ln/>
+        </p:spPr>
+        <p:txBody>
+          <a:bodyPr wrap="square" lIns="0" tIns="0" rIns="0" bIns="0" rtlCol="0" anchor="t">
+            <a:normAutofit/>
+          </a:bodyPr>
+          <a:lstStyle/>
+          <a:p>
+            <a:pPr algn="l" indent="0" marL="0">
+              <a:lnSpc>
+                <a:spcPts val="2228"/>
+              </a:lnSpc>
+              <a:buNone/>
+            </a:pPr>
+            <a:r>
+              <a:rPr lang="en-US" sz="1650" dirty="0">
+                <a:solidFill>
+                  <a:srgbClr val="10212B"/>
+                </a:solidFill>
+                <a:latin typeface="Verdana" pitchFamily="34" charset="0"/>
+                <a:ea typeface="Verdana" pitchFamily="34" charset="-122"/>
+                <a:cs typeface="Verdana" pitchFamily="34" charset="-120"/>
+              </a:rPr>
+              <a:t>Maintained by [name] here; small enough that someone else could take it over</a:t>
+            </a:r>
+            <a:endParaRPr lang="en-US" sz="1650" dirty="0"/>
+          </a:p>
+        </p:txBody>
+      </p:sp>
+      <p:pic>
+        <p:nvPicPr>
+          <p:cNvPr id="13" name="Image 5" descr="Warning">    </p:cNvPr>
+          <p:cNvPicPr>
+            <a:picLocks noChangeAspect="1"/>
+          </p:cNvPicPr>
+          <p:nvPr/>
+        </p:nvPicPr>
+        <p:blipFill>
+          <a:blip r:embed="rId6"/>
+          <a:srcRect l="-167" r="-167" t="0" b="0"/>
+          <a:stretch/>
+        </p:blipFill>
+        <p:spPr>
+          <a:xfrm>
+            <a:off x="6197600" y="3031381"/>
+            <a:ext cx="178395" cy="266700"/>
+          </a:xfrm>
+          <a:prstGeom prst="rect">
+            <a:avLst/>
+          </a:prstGeom>
+        </p:spPr>
+      </p:pic>
+      <p:sp>
+        <p:nvSpPr>
+          <p:cNvPr id="14" name="Text 6"/>
+          <p:cNvSpPr/>
+          <p:nvPr/>
+        </p:nvSpPr>
+        <p:spPr>
+          <a:xfrm>
+            <a:off x="6490295" y="3031381"/>
+            <a:ext cx="5035572" cy="591145"/>
+          </a:xfrm>
+          <a:prstGeom prst="rect">
+            <a:avLst/>
+          </a:prstGeom>
+          <a:noFill/>
+          <a:ln/>
+        </p:spPr>
+        <p:txBody>
+          <a:bodyPr wrap="square" lIns="0" tIns="0" rIns="0" bIns="0" rtlCol="0" anchor="t">
+            <a:normAutofit/>
+          </a:bodyPr>
+          <a:lstStyle/>
+          <a:p>
+            <a:pPr algn="l" indent="0" marL="0">
+              <a:lnSpc>
+                <a:spcPts val="2228"/>
+              </a:lnSpc>
+              <a:buNone/>
+            </a:pPr>
+            <a:r>
+              <a:rPr lang="en-US" sz="1650" dirty="0">
+                <a:solidFill>
+                  <a:srgbClr val="10212B"/>
+                </a:solidFill>
+                <a:latin typeface="Verdana" pitchFamily="34" charset="0"/>
+                <a:ea typeface="Verdana" pitchFamily="34" charset="-122"/>
+                <a:cs typeface="Verdana" pitchFamily="34" charset="-120"/>
+              </a:rPr>
+              <a:t>Worst case: we stop running it and delete one step from one pipeline</a:t>
+            </a:r>
+            <a:endParaRPr lang="en-US" sz="1650" dirty="0"/>
           </a:p>
         </p:txBody>
       </p:sp>
@@ -5795,38 +7590,38 @@
 </file>
 
 <file path=ppt/theme/theme1.xml><?xml version="1.0" encoding="utf-8"?>
-<a:theme xmlns:a="http://schemas.openxmlformats.org/drawingml/2006/main" name="Office Theme">
+<a:theme xmlns:a="http://schemas.openxmlformats.org/drawingml/2006/main" name="pixi-sbom: The Executive Case">
   <a:themeElements>
-    <a:clrScheme name="Office">
+    <a:clrScheme name="pixi-sbom: The Executive Case">
       <a:dk1>
-        <a:sysClr val="windowText" lastClr="000000"/>
+        <a:srgbClr val="10212B"/>
       </a:dk1>
       <a:lt1>
-        <a:sysClr val="window" lastClr="FFFFFF"/>
+        <a:srgbClr val="F7F8F6"/>
       </a:lt1>
       <a:dk2>
-        <a:srgbClr val="44546A"/>
+        <a:srgbClr val="4A575E"/>
       </a:dk2>
       <a:lt2>
-        <a:srgbClr val="E7E6E6"/>
+        <a:srgbClr val="E0E3E2"/>
       </a:lt2>
       <a:accent1>
-        <a:srgbClr val="4472C4"/>
+        <a:srgbClr val="6FBFAE"/>
       </a:accent1>
       <a:accent2>
-        <a:srgbClr val="ED7D31"/>
+        <a:srgbClr val="1F7A6C"/>
       </a:accent2>
       <a:accent3>
-        <a:srgbClr val="A5A5A5"/>
+        <a:srgbClr val="4A5568"/>
       </a:accent3>
       <a:accent4>
-        <a:srgbClr val="FFC000"/>
+        <a:srgbClr val="B5C4CA"/>
       </a:accent4>
       <a:accent5>
-        <a:srgbClr val="5B9BD5"/>
+        <a:srgbClr val="6A7179"/>
       </a:accent5>
       <a:accent6>
-        <a:srgbClr val="70AD47"/>
+        <a:srgbClr val="CDEDE5"/>
       </a:accent6>
       <a:hlink>
         <a:srgbClr val="0563C1"/>
@@ -5835,9 +7630,9 @@
         <a:srgbClr val="954F72"/>
       </a:folHlink>
     </a:clrScheme>
-    <a:fontScheme name="Office">
+    <a:fontScheme name="pixi-sbom: The Executive Case">
       <a:majorFont>
-        <a:latin typeface="Calibri Light" panose="020F0302020204030204"/>
+        <a:latin typeface="Verdana"/>
         <a:ea typeface=""/>
         <a:cs typeface=""/>
         <a:font script="Jpan" typeface="游ゴシック Light"/>
@@ -5889,7 +7684,7 @@
         <a:font script="Tfng" typeface="Ebrima"/>
       </a:majorFont>
       <a:minorFont>
-        <a:latin typeface="Calibri" panose="020F0502020204030204"/>
+        <a:latin typeface="Verdana"/>
         <a:ea typeface=""/>
         <a:cs typeface=""/>
         <a:font script="Jpan" typeface="游ゴシック"/>
@@ -6081,10 +7876,5 @@
   </a:themeElements>
   <a:objectDefaults/>
   <a:extraClrSchemeLst/>
-  <a:extLst>
-    <a:ext uri="{05A4C25C-085E-4340-85A3-A5531E510DB2}">
-      <thm15:themeFamily xmlns:thm15="http://schemas.microsoft.com/office/thememl/2012/main" name="Office Theme" id="{62F939B6-93AF-4DB8-9C6B-D6C7DFDC589F}" vid="{4A3C46E8-61CC-4603-A589-7422A47A8E4A}"/>
-    </a:ext>
-  </a:extLst>
 </a:theme>
 </file>